--- a/Bloc_2_Analyse_Exploratoire/Steam/Steam_presentation.pptx
+++ b/Bloc_2_Analyse_Exploratoire/Steam/Steam_presentation.pptx
@@ -3155,9 +3155,9 @@
           <a:solidFill>
             <a:srgbClr val="1E293B"/>
           </a:solidFill>
-          <a:ln w="25400">
+          <a:ln w="12700">
             <a:solidFill>
-              <a:srgbClr val="0EA5E9"/>
+              <a:srgbClr val="334155"/>
             </a:solidFill>
           </a:ln>
         </p:spPr>
@@ -3206,7 +3206,7 @@
           <a:lstStyle/>
           <a:p>
             <a:pPr>
-              <a:defRPr sz="1300" b="1">
+              <a:defRPr sz="1200" b="1">
                 <a:solidFill>
                   <a:srgbClr val="38BDF8"/>
                 </a:solidFill>
@@ -3228,7 +3228,7 @@
         <p:spPr>
           <a:xfrm>
             <a:off x="1828800" y="1920240"/>
-            <a:ext cx="8534095" cy="1097280"/>
+            <a:ext cx="8534095" cy="1005840"/>
           </a:xfrm>
           <a:prstGeom prst="rect">
             <a:avLst/>
@@ -3236,13 +3236,13 @@
           <a:noFill/>
         </p:spPr>
         <p:txBody>
-          <a:bodyPr wrap="none">
+          <a:bodyPr wrap="square">
             <a:spAutoFit/>
           </a:bodyPr>
           <a:lstStyle/>
           <a:p>
             <a:pPr>
-              <a:defRPr sz="3600" b="1">
+              <a:defRPr sz="3200" b="1">
                 <a:solidFill>
                   <a:srgbClr val="F8FAFC"/>
                 </a:solidFill>
@@ -3255,7 +3255,7 @@
           </a:p>
           <a:p>
             <a:pPr>
-              <a:defRPr sz="1700">
+              <a:defRPr sz="1400">
                 <a:solidFill>
                   <a:srgbClr val="94A3B8"/>
                 </a:solidFill>
@@ -3270,23 +3270,25 @@
       </p:sp>
       <p:sp>
         <p:nvSpPr>
-          <p:cNvPr id="6" name="Rectangle 5"/>
+          <p:cNvPr id="6" name="Rounded Rectangle 5"/>
           <p:cNvSpPr/>
           <p:nvPr/>
         </p:nvSpPr>
         <p:spPr>
           <a:xfrm>
             <a:off x="1828800" y="3383280"/>
-            <a:ext cx="8534095" cy="27432"/>
-          </a:xfrm>
-          <a:prstGeom prst="rect">
+            <a:ext cx="2651760" cy="1280160"/>
+          </a:xfrm>
+          <a:prstGeom prst="roundRect">
             <a:avLst/>
           </a:prstGeom>
           <a:solidFill>
-            <a:srgbClr val="334155"/>
+            <a:srgbClr val="0F172A"/>
           </a:solidFill>
-          <a:ln>
-            <a:noFill/>
+          <a:ln w="12700">
+            <a:solidFill>
+              <a:srgbClr val="334155"/>
+            </a:solidFill>
           </a:ln>
         </p:spPr>
         <p:style>
@@ -3319,8 +3321,8 @@
         </p:nvSpPr>
         <p:spPr>
           <a:xfrm>
-            <a:off x="1828800" y="3657600"/>
-            <a:ext cx="2743200" cy="1097280"/>
+            <a:off x="2011680" y="3520440"/>
+            <a:ext cx="2286000" cy="1005840"/>
           </a:xfrm>
           <a:prstGeom prst="rect">
             <a:avLst/>
@@ -3334,9 +3336,9 @@
           <a:lstStyle/>
           <a:p>
             <a:pPr>
-              <a:defRPr sz="2200" b="1">
-                <a:solidFill>
-                  <a:srgbClr val="10B981"/>
+              <a:defRPr sz="2000" b="1">
+                <a:solidFill>
+                  <a:srgbClr val="38BDF8"/>
                 </a:solidFill>
                 <a:latin typeface="Segoe UI"/>
               </a:defRPr>
@@ -3347,7 +3349,7 @@
           </a:p>
           <a:p>
             <a:pPr>
-              <a:defRPr sz="1100" b="1">
+              <a:defRPr sz="1000" b="1">
                 <a:solidFill>
                   <a:srgbClr val="F8FAFC"/>
                 </a:solidFill>
@@ -3360,7 +3362,7 @@
           </a:p>
           <a:p>
             <a:pPr>
-              <a:defRPr sz="950">
+              <a:defRPr sz="900">
                 <a:solidFill>
                   <a:srgbClr val="94A3B8"/>
                 </a:solidFill>
@@ -3375,14 +3377,59 @@
       </p:sp>
       <p:sp>
         <p:nvSpPr>
-          <p:cNvPr id="8" name="TextBox 7"/>
+          <p:cNvPr id="8" name="Rounded Rectangle 7"/>
+          <p:cNvSpPr/>
+          <p:nvPr/>
+        </p:nvSpPr>
+        <p:spPr>
+          <a:xfrm>
+            <a:off x="4754880" y="3383280"/>
+            <a:ext cx="2651760" cy="1280160"/>
+          </a:xfrm>
+          <a:prstGeom prst="roundRect">
+            <a:avLst/>
+          </a:prstGeom>
+          <a:solidFill>
+            <a:srgbClr val="0F172A"/>
+          </a:solidFill>
+          <a:ln w="12700">
+            <a:solidFill>
+              <a:srgbClr val="334155"/>
+            </a:solidFill>
+          </a:ln>
+        </p:spPr>
+        <p:style>
+          <a:lnRef idx="1">
+            <a:schemeClr val="accent1"/>
+          </a:lnRef>
+          <a:fillRef idx="3">
+            <a:schemeClr val="accent1"/>
+          </a:fillRef>
+          <a:effectRef idx="2">
+            <a:schemeClr val="accent1"/>
+          </a:effectRef>
+          <a:fontRef idx="minor">
+            <a:schemeClr val="lt1"/>
+          </a:fontRef>
+        </p:style>
+        <p:txBody>
+          <a:bodyPr rtlCol="0" anchor="ctr"/>
+          <a:lstStyle/>
+          <a:p>
+            <a:pPr algn="ctr"/>
+          </a:p>
+        </p:txBody>
+      </p:sp>
+      <p:sp>
+        <p:nvSpPr>
+          <p:cNvPr id="9" name="TextBox 8"/>
           <p:cNvSpPr txBox="1"/>
           <p:nvPr/>
         </p:nvSpPr>
         <p:spPr>
           <a:xfrm>
-            <a:off x="4754880" y="3657600"/>
-            <a:ext cx="2743200" cy="1097280"/>
+            <a:off x="4937760" y="3520440"/>
+            <a:ext cx="2286000" cy="1005840"/>
           </a:xfrm>
           <a:prstGeom prst="rect">
             <a:avLst/>
@@ -3396,9 +3443,9 @@
           <a:lstStyle/>
           <a:p>
             <a:pPr>
-              <a:defRPr sz="2200" b="1">
-                <a:solidFill>
-                  <a:srgbClr val="F59E0B"/>
+              <a:defRPr sz="2000" b="1">
+                <a:solidFill>
+                  <a:srgbClr val="10B981"/>
                 </a:solidFill>
                 <a:latin typeface="Segoe UI"/>
               </a:defRPr>
@@ -3409,7 +3456,7 @@
           </a:p>
           <a:p>
             <a:pPr>
-              <a:defRPr sz="1100" b="1">
+              <a:defRPr sz="1000" b="1">
                 <a:solidFill>
                   <a:srgbClr val="F8FAFC"/>
                 </a:solidFill>
@@ -3422,7 +3469,7 @@
           </a:p>
           <a:p>
             <a:pPr>
-              <a:defRPr sz="950">
+              <a:defRPr sz="900">
                 <a:solidFill>
                   <a:srgbClr val="94A3B8"/>
                 </a:solidFill>
@@ -3437,14 +3484,59 @@
       </p:sp>
       <p:sp>
         <p:nvSpPr>
-          <p:cNvPr id="9" name="TextBox 8"/>
+          <p:cNvPr id="10" name="Rounded Rectangle 9"/>
+          <p:cNvSpPr/>
+          <p:nvPr/>
+        </p:nvSpPr>
+        <p:spPr>
+          <a:xfrm>
+            <a:off x="7680960" y="3383280"/>
+            <a:ext cx="2651760" cy="1280160"/>
+          </a:xfrm>
+          <a:prstGeom prst="roundRect">
+            <a:avLst/>
+          </a:prstGeom>
+          <a:solidFill>
+            <a:srgbClr val="0F172A"/>
+          </a:solidFill>
+          <a:ln w="12700">
+            <a:solidFill>
+              <a:srgbClr val="334155"/>
+            </a:solidFill>
+          </a:ln>
+        </p:spPr>
+        <p:style>
+          <a:lnRef idx="1">
+            <a:schemeClr val="accent1"/>
+          </a:lnRef>
+          <a:fillRef idx="3">
+            <a:schemeClr val="accent1"/>
+          </a:fillRef>
+          <a:effectRef idx="2">
+            <a:schemeClr val="accent1"/>
+          </a:effectRef>
+          <a:fontRef idx="minor">
+            <a:schemeClr val="lt1"/>
+          </a:fontRef>
+        </p:style>
+        <p:txBody>
+          <a:bodyPr rtlCol="0" anchor="ctr"/>
+          <a:lstStyle/>
+          <a:p>
+            <a:pPr algn="ctr"/>
+          </a:p>
+        </p:txBody>
+      </p:sp>
+      <p:sp>
+        <p:nvSpPr>
+          <p:cNvPr id="11" name="TextBox 10"/>
           <p:cNvSpPr txBox="1"/>
           <p:nvPr/>
         </p:nvSpPr>
         <p:spPr>
           <a:xfrm>
-            <a:off x="7680960" y="3657600"/>
-            <a:ext cx="2743200" cy="1097280"/>
+            <a:off x="7863840" y="3520440"/>
+            <a:ext cx="2286000" cy="1005840"/>
           </a:xfrm>
           <a:prstGeom prst="rect">
             <a:avLst/>
@@ -3458,9 +3550,9 @@
           <a:lstStyle/>
           <a:p>
             <a:pPr>
-              <a:defRPr sz="2200" b="1">
-                <a:solidFill>
-                  <a:srgbClr val="38BDF8"/>
+              <a:defRPr sz="2000" b="1">
+                <a:solidFill>
+                  <a:srgbClr val="F59E0B"/>
                 </a:solidFill>
                 <a:latin typeface="Segoe UI"/>
               </a:defRPr>
@@ -3471,7 +3563,7 @@
           </a:p>
           <a:p>
             <a:pPr>
-              <a:defRPr sz="1100" b="1">
+              <a:defRPr sz="1000" b="1">
                 <a:solidFill>
                   <a:srgbClr val="F8FAFC"/>
                 </a:solidFill>
@@ -3484,7 +3576,7 @@
           </a:p>
           <a:p>
             <a:pPr>
-              <a:defRPr sz="950">
+              <a:defRPr sz="900">
                 <a:solidFill>
                   <a:srgbClr val="94A3B8"/>
                 </a:solidFill>
@@ -3499,13 +3591,13 @@
       </p:sp>
       <p:sp>
         <p:nvSpPr>
-          <p:cNvPr id="10" name="TextBox 9"/>
+          <p:cNvPr id="12" name="TextBox 11"/>
           <p:cNvSpPr txBox="1"/>
           <p:nvPr/>
         </p:nvSpPr>
         <p:spPr>
           <a:xfrm>
-            <a:off x="1828800" y="4983480"/>
+            <a:off x="1828800" y="4937760"/>
             <a:ext cx="8534095" cy="457200"/>
           </a:xfrm>
           <a:prstGeom prst="rect">
@@ -3520,9 +3612,9 @@
           <a:lstStyle/>
           <a:p>
             <a:pPr>
-              <a:defRPr sz="1100" b="1">
-                <a:solidFill>
-                  <a:srgbClr val="94A3B8"/>
+              <a:defRPr sz="1100">
+                <a:solidFill>
+                  <a:srgbClr val="F8FAFC"/>
                 </a:solidFill>
                 <a:latin typeface="Segoe UI"/>
               </a:defRPr>
@@ -3611,7 +3703,7 @@
           <a:noFill/>
         </p:spPr>
         <p:txBody>
-          <a:bodyPr wrap="square">
+          <a:bodyPr wrap="square" lIns="0" tIns="0" rIns="0" bIns="0">
             <a:spAutoFit/>
           </a:bodyPr>
           <a:lstStyle/>
@@ -3647,13 +3739,13 @@
           <a:noFill/>
         </p:spPr>
         <p:txBody>
-          <a:bodyPr wrap="square">
+          <a:bodyPr wrap="square" lIns="0" tIns="0" rIns="0" bIns="0">
             <a:spAutoFit/>
           </a:bodyPr>
           <a:lstStyle/>
           <a:p>
             <a:pPr>
-              <a:defRPr sz="2100" b="1">
+              <a:defRPr sz="1800" b="1">
                 <a:solidFill>
                   <a:srgbClr val="F8FAFC"/>
                 </a:solidFill>
@@ -3683,7 +3775,7 @@
           <a:noFill/>
         </p:spPr>
         <p:txBody>
-          <a:bodyPr wrap="square">
+          <a:bodyPr wrap="none" lIns="0" tIns="0" rIns="0" bIns="0">
             <a:spAutoFit/>
           </a:bodyPr>
           <a:lstStyle/>
@@ -3719,21 +3811,21 @@
           <a:noFill/>
         </p:spPr>
         <p:txBody>
-          <a:bodyPr wrap="square">
+          <a:bodyPr wrap="none" lIns="0" tIns="0" rIns="0" bIns="0">
             <a:spAutoFit/>
           </a:bodyPr>
           <a:lstStyle/>
           <a:p>
             <a:pPr>
-              <a:defRPr sz="1000">
-                <a:solidFill>
-                  <a:srgbClr val="64748B"/>
+              <a:defRPr sz="950">
+                <a:solidFill>
+                  <a:srgbClr val="94A3B8"/>
                 </a:solidFill>
                 <a:latin typeface="Segoe UI"/>
               </a:defRPr>
             </a:pPr>
             <a:r>
-              <a:t>Christopher GILLERON  |  Steam Video Games Analysis (PySpark / Databricks)  |  Certification CDSD Bloc 2</a:t>
+              <a:t>Christopher GILLERON  |  Steam Video Games Analysis (PySpark / Databricks)  |  Certification CDSD Bloc 2  |  Temps alloué : 5 min</a:t>
             </a:r>
           </a:p>
         </p:txBody>
@@ -3747,7 +3839,7 @@
         <p:spPr>
           <a:xfrm>
             <a:off x="731520" y="1371600"/>
-            <a:ext cx="5212080" cy="4754880"/>
+            <a:ext cx="5212080" cy="4846320"/>
           </a:xfrm>
           <a:prstGeom prst="roundRect">
             <a:avLst/>
@@ -3755,7 +3847,7 @@
           <a:solidFill>
             <a:srgbClr val="1E293B"/>
           </a:solidFill>
-          <a:ln w="19050">
+          <a:ln w="12700">
             <a:solidFill>
               <a:srgbClr val="334155"/>
             </a:solidFill>
@@ -3791,8 +3883,8 @@
         </p:nvSpPr>
         <p:spPr>
           <a:xfrm>
-            <a:off x="914400" y="1536192"/>
-            <a:ext cx="4846320" cy="365760"/>
+            <a:off x="914400" y="1554480"/>
+            <a:ext cx="4846320" cy="4480560"/>
           </a:xfrm>
           <a:prstGeom prst="rect">
             <a:avLst/>
@@ -3806,47 +3898,25 @@
           <a:lstStyle/>
           <a:p>
             <a:pPr>
-              <a:defRPr sz="1100" b="1">
+              <a:defRPr sz="1400" b="1">
                 <a:solidFill>
                   <a:srgbClr val="38BDF8"/>
                 </a:solidFill>
-                <a:latin typeface="Segoe UI"/>
               </a:defRPr>
             </a:pPr>
             <a:r>
               <a:t>01 | CONTEXTE STRATÉGIQUE UBISOFT</a:t>
             </a:r>
           </a:p>
-        </p:txBody>
-      </p:sp>
-      <p:sp>
-        <p:nvSpPr>
-          <p:cNvPr id="9" name="TextBox 8"/>
-          <p:cNvSpPr txBox="1"/>
-          <p:nvPr/>
-        </p:nvSpPr>
-        <p:spPr>
-          <a:xfrm>
-            <a:off x="914400" y="1920240"/>
-            <a:ext cx="4846320" cy="4023360"/>
-          </a:xfrm>
-          <a:prstGeom prst="rect">
-            <a:avLst/>
-          </a:prstGeom>
-          <a:noFill/>
-        </p:spPr>
-        <p:txBody>
-          <a:bodyPr wrap="square">
-            <a:spAutoFit/>
-          </a:bodyPr>
-          <a:lstStyle/>
-          <a:p>
-            <a:pPr>
-              <a:defRPr sz="1000" b="1">
-                <a:solidFill>
-                  <a:srgbClr val="38BDF8"/>
-                </a:solidFill>
-                <a:latin typeface="Segoe UI"/>
+          <a:p>
+            <a:pPr>
+              <a:spcBef>
+                <a:spcPts val="1000"/>
+              </a:spcBef>
+              <a:defRPr b="1" sz="1100">
+                <a:solidFill>
+                  <a:srgbClr val="F8FAFC"/>
+                </a:solidFill>
               </a:defRPr>
             </a:pPr>
             <a:r>
@@ -3855,24 +3925,25 @@
           </a:p>
           <a:p>
             <a:pPr>
-              <a:defRPr sz="900">
+              <a:defRPr sz="1000">
+                <a:solidFill>
+                  <a:srgbClr val="94A3B8"/>
+                </a:solidFill>
+              </a:defRPr>
+            </a:pPr>
+            <a:r>
+              <a:t>Explorer l'intégralité du catalogue Steam pour orienter la conception, le pricing et le positionnement du prochain jeu phare.</a:t>
+            </a:r>
+          </a:p>
+          <a:p>
+            <a:pPr>
+              <a:spcBef>
+                <a:spcPts val="1000"/>
+              </a:spcBef>
+              <a:defRPr b="1" sz="1100">
                 <a:solidFill>
                   <a:srgbClr val="F8FAFC"/>
                 </a:solidFill>
-                <a:latin typeface="Segoe UI"/>
-              </a:defRPr>
-            </a:pPr>
-            <a:r>
-              <a:t>Explorer l'intégralité du catalogue Steam pour orienter la conception, le pricing et le positionnement du prochain jeu phare.</a:t>
-            </a:r>
-          </a:p>
-          <a:p>
-            <a:pPr>
-              <a:defRPr sz="1000" b="1">
-                <a:solidFill>
-                  <a:srgbClr val="38BDF8"/>
-                </a:solidFill>
-                <a:latin typeface="Segoe UI"/>
               </a:defRPr>
             </a:pPr>
             <a:r>
@@ -3881,24 +3952,25 @@
           </a:p>
           <a:p>
             <a:pPr>
-              <a:defRPr sz="900">
+              <a:defRPr sz="1000">
+                <a:solidFill>
+                  <a:srgbClr val="94A3B8"/>
+                </a:solidFill>
+              </a:defRPr>
+            </a:pPr>
+            <a:r>
+              <a:t>55 691 jeux vidéo uniques collectés via l'API Steam Web, hébergés sur AWS S3 sous forme de dump JSON semi-structuré.</a:t>
+            </a:r>
+          </a:p>
+          <a:p>
+            <a:pPr>
+              <a:spcBef>
+                <a:spcPts val="1000"/>
+              </a:spcBef>
+              <a:defRPr b="1" sz="1100">
                 <a:solidFill>
                   <a:srgbClr val="F8FAFC"/>
                 </a:solidFill>
-                <a:latin typeface="Segoe UI"/>
-              </a:defRPr>
-            </a:pPr>
-            <a:r>
-              <a:t>55 691 jeux vidéo uniques collectés via l'API Steam Web, hébergés sur AWS S3 sous forme de dump JSON semi-structuré.</a:t>
-            </a:r>
-          </a:p>
-          <a:p>
-            <a:pPr>
-              <a:defRPr sz="1000" b="1">
-                <a:solidFill>
-                  <a:srgbClr val="38BDF8"/>
-                </a:solidFill>
-                <a:latin typeface="Segoe UI"/>
               </a:defRPr>
             </a:pPr>
             <a:r>
@@ -3907,29 +3979,55 @@
           </a:p>
           <a:p>
             <a:pPr>
-              <a:defRPr sz="900">
+              <a:defRPr sz="1000">
+                <a:solidFill>
+                  <a:srgbClr val="94A3B8"/>
+                </a:solidFill>
+              </a:defRPr>
+            </a:pPr>
+            <a:r>
+              <a:t>Identifier les genres les plus lucratifs, mesurer l'impact du Free-to-Play, analyser la concurrence et optimiser le support OS.</a:t>
+            </a:r>
+          </a:p>
+          <a:p>
+            <a:pPr>
+              <a:spcBef>
+                <a:spcPts val="1000"/>
+              </a:spcBef>
+              <a:defRPr b="1" sz="1100">
                 <a:solidFill>
                   <a:srgbClr val="F8FAFC"/>
                 </a:solidFill>
-                <a:latin typeface="Segoe UI"/>
-              </a:defRPr>
-            </a:pPr>
-            <a:r>
-              <a:t>Identifier les genres les plus lucratifs, mesurer l'impact du Free-to-Play, analyser la concurrence et optimiser le support OS.</a:t>
-            </a:r>
-          </a:p>
-        </p:txBody>
-      </p:sp>
-      <p:sp>
-        <p:nvSpPr>
-          <p:cNvPr id="10" name="Rounded Rectangle 9"/>
+              </a:defRPr>
+            </a:pPr>
+            <a:r>
+              <a:t>Contrainte Volume :</a:t>
+            </a:r>
+          </a:p>
+          <a:p>
+            <a:pPr>
+              <a:defRPr sz="1000">
+                <a:solidFill>
+                  <a:srgbClr val="94A3B8"/>
+                </a:solidFill>
+              </a:defRPr>
+            </a:pPr>
+            <a:r>
+              <a:t>Traiter un schéma complexe multi-niveaux sans perte d'information grâce au moteur distribué PySpark sur Databricks.</a:t>
+            </a:r>
+          </a:p>
+        </p:txBody>
+      </p:sp>
+      <p:sp>
+        <p:nvSpPr>
+          <p:cNvPr id="9" name="Rounded Rectangle 8"/>
           <p:cNvSpPr/>
           <p:nvPr/>
         </p:nvSpPr>
         <p:spPr>
           <a:xfrm>
             <a:off x="6217920" y="1371600"/>
-            <a:ext cx="5242255" cy="4754880"/>
+            <a:ext cx="5242255" cy="4846320"/>
           </a:xfrm>
           <a:prstGeom prst="roundRect">
             <a:avLst/>
@@ -3937,7 +4035,7 @@
           <a:solidFill>
             <a:srgbClr val="1E293B"/>
           </a:solidFill>
-          <a:ln w="19050">
+          <a:ln w="12700">
             <a:solidFill>
               <a:srgbClr val="334155"/>
             </a:solidFill>
@@ -3967,14 +4065,14 @@
       </p:sp>
       <p:sp>
         <p:nvSpPr>
-          <p:cNvPr id="11" name="TextBox 10"/>
+          <p:cNvPr id="10" name="TextBox 9"/>
           <p:cNvSpPr txBox="1"/>
           <p:nvPr/>
         </p:nvSpPr>
         <p:spPr>
           <a:xfrm>
-            <a:off x="6400800" y="1536192"/>
-            <a:ext cx="4876495" cy="365760"/>
+            <a:off x="6400800" y="1554480"/>
+            <a:ext cx="4876495" cy="4480560"/>
           </a:xfrm>
           <a:prstGeom prst="rect">
             <a:avLst/>
@@ -3988,47 +4086,25 @@
           <a:lstStyle/>
           <a:p>
             <a:pPr>
-              <a:defRPr sz="1100" b="1">
+              <a:defRPr sz="1400" b="1">
                 <a:solidFill>
                   <a:srgbClr val="38BDF8"/>
                 </a:solidFill>
-                <a:latin typeface="Segoe UI"/>
               </a:defRPr>
             </a:pPr>
             <a:r>
               <a:t>02 | PIPELINE DE TRAITEMENT PYSPARK (DATABRICKS)</a:t>
             </a:r>
           </a:p>
-        </p:txBody>
-      </p:sp>
-      <p:sp>
-        <p:nvSpPr>
-          <p:cNvPr id="12" name="TextBox 11"/>
-          <p:cNvSpPr txBox="1"/>
-          <p:nvPr/>
-        </p:nvSpPr>
-        <p:spPr>
-          <a:xfrm>
-            <a:off x="6400800" y="1920240"/>
-            <a:ext cx="4876495" cy="4023360"/>
-          </a:xfrm>
-          <a:prstGeom prst="rect">
-            <a:avLst/>
-          </a:prstGeom>
-          <a:noFill/>
-        </p:spPr>
-        <p:txBody>
-          <a:bodyPr wrap="square">
-            <a:spAutoFit/>
-          </a:bodyPr>
-          <a:lstStyle/>
-          <a:p>
-            <a:pPr>
-              <a:defRPr sz="1000" b="1">
-                <a:solidFill>
-                  <a:srgbClr val="38BDF8"/>
-                </a:solidFill>
-                <a:latin typeface="Segoe UI"/>
+          <a:p>
+            <a:pPr>
+              <a:spcBef>
+                <a:spcPts val="1000"/>
+              </a:spcBef>
+              <a:defRPr b="1" sz="1100">
+                <a:solidFill>
+                  <a:srgbClr val="F8FAFC"/>
+                </a:solidFill>
               </a:defRPr>
             </a:pPr>
             <a:r>
@@ -4037,24 +4113,25 @@
           </a:p>
           <a:p>
             <a:pPr>
-              <a:defRPr sz="900">
+              <a:defRPr sz="1000">
+                <a:solidFill>
+                  <a:srgbClr val="94A3B8"/>
+                </a:solidFill>
+              </a:defRPr>
+            </a:pPr>
+            <a:r>
+              <a:t>Dé-imbrication automatique de 22 attributs racines depuis la structure complexe 'data'.</a:t>
+            </a:r>
+          </a:p>
+          <a:p>
+            <a:pPr>
+              <a:spcBef>
+                <a:spcPts val="1000"/>
+              </a:spcBef>
+              <a:defRPr b="1" sz="1100">
                 <a:solidFill>
                   <a:srgbClr val="F8FAFC"/>
                 </a:solidFill>
-                <a:latin typeface="Segoe UI"/>
-              </a:defRPr>
-            </a:pPr>
-            <a:r>
-              <a:t>Dé-imbrication automatique de 22 attributs racines depuis la structure complexe 'data'.</a:t>
-            </a:r>
-          </a:p>
-          <a:p>
-            <a:pPr>
-              <a:defRPr sz="1000" b="1">
-                <a:solidFill>
-                  <a:srgbClr val="38BDF8"/>
-                </a:solidFill>
-                <a:latin typeface="Segoe UI"/>
               </a:defRPr>
             </a:pPr>
             <a:r>
@@ -4063,24 +4140,25 @@
           </a:p>
           <a:p>
             <a:pPr>
-              <a:defRPr sz="900">
+              <a:defRPr sz="1000">
+                <a:solidFill>
+                  <a:srgbClr val="94A3B8"/>
+                </a:solidFill>
+              </a:defRPr>
+            </a:pPr>
+            <a:r>
+              <a:t>Implémentation de first_existing_col() pour garantir l'extraction des prix, genres et dates quel que soit le schéma.</a:t>
+            </a:r>
+          </a:p>
+          <a:p>
+            <a:pPr>
+              <a:spcBef>
+                <a:spcPts val="1000"/>
+              </a:spcBef>
+              <a:defRPr b="1" sz="1100">
                 <a:solidFill>
                   <a:srgbClr val="F8FAFC"/>
                 </a:solidFill>
-                <a:latin typeface="Segoe UI"/>
-              </a:defRPr>
-            </a:pPr>
-            <a:r>
-              <a:t>Implémentation de first_existing_col() pour garantir l'extraction des prix, genres et dates quel que soit le schéma.</a:t>
-            </a:r>
-          </a:p>
-          <a:p>
-            <a:pPr>
-              <a:defRPr sz="1000" b="1">
-                <a:solidFill>
-                  <a:srgbClr val="38BDF8"/>
-                </a:solidFill>
-                <a:latin typeface="Segoe UI"/>
               </a:defRPr>
             </a:pPr>
             <a:r>
@@ -4089,24 +4167,25 @@
           </a:p>
           <a:p>
             <a:pPr>
-              <a:defRPr sz="900">
+              <a:defRPr sz="1000">
+                <a:solidFill>
+                  <a:srgbClr val="94A3B8"/>
+                </a:solidFill>
+              </a:defRPr>
+            </a:pPr>
+            <a:r>
+              <a:t>Conversion des centimes en euros (price / 100), détection de is_free, parsing multi-formats des dates via try_to_date().</a:t>
+            </a:r>
+          </a:p>
+          <a:p>
+            <a:pPr>
+              <a:spcBef>
+                <a:spcPts val="1000"/>
+              </a:spcBef>
+              <a:defRPr b="1" sz="1100">
                 <a:solidFill>
                   <a:srgbClr val="F8FAFC"/>
                 </a:solidFill>
-                <a:latin typeface="Segoe UI"/>
-              </a:defRPr>
-            </a:pPr>
-            <a:r>
-              <a:t>Conversion des centimes en euros (price / 100), détection de is_free, parsing multi-formats des dates via try_to_date().</a:t>
-            </a:r>
-          </a:p>
-          <a:p>
-            <a:pPr>
-              <a:defRPr sz="1000" b="1">
-                <a:solidFill>
-                  <a:srgbClr val="38BDF8"/>
-                </a:solidFill>
-                <a:latin typeface="Segoe UI"/>
               </a:defRPr>
             </a:pPr>
             <a:r>
@@ -4115,11 +4194,10 @@
           </a:p>
           <a:p>
             <a:pPr>
-              <a:defRPr sz="900">
-                <a:solidFill>
-                  <a:srgbClr val="F8FAFC"/>
-                </a:solidFill>
-                <a:latin typeface="Segoe UI"/>
+              <a:defRPr sz="1000">
+                <a:solidFill>
+                  <a:srgbClr val="94A3B8"/>
+                </a:solidFill>
               </a:defRPr>
             </a:pPr>
             <a:r>
@@ -4206,7 +4284,7 @@
           <a:noFill/>
         </p:spPr>
         <p:txBody>
-          <a:bodyPr wrap="square">
+          <a:bodyPr wrap="square" lIns="0" tIns="0" rIns="0" bIns="0">
             <a:spAutoFit/>
           </a:bodyPr>
           <a:lstStyle/>
@@ -4242,13 +4320,13 @@
           <a:noFill/>
         </p:spPr>
         <p:txBody>
-          <a:bodyPr wrap="square">
+          <a:bodyPr wrap="square" lIns="0" tIns="0" rIns="0" bIns="0">
             <a:spAutoFit/>
           </a:bodyPr>
           <a:lstStyle/>
           <a:p>
             <a:pPr>
-              <a:defRPr sz="2100" b="1">
+              <a:defRPr sz="1800" b="1">
                 <a:solidFill>
                   <a:srgbClr val="F8FAFC"/>
                 </a:solidFill>
@@ -4278,7 +4356,7 @@
           <a:noFill/>
         </p:spPr>
         <p:txBody>
-          <a:bodyPr wrap="square">
+          <a:bodyPr wrap="none" lIns="0" tIns="0" rIns="0" bIns="0">
             <a:spAutoFit/>
           </a:bodyPr>
           <a:lstStyle/>
@@ -4314,21 +4392,21 @@
           <a:noFill/>
         </p:spPr>
         <p:txBody>
-          <a:bodyPr wrap="square">
+          <a:bodyPr wrap="none" lIns="0" tIns="0" rIns="0" bIns="0">
             <a:spAutoFit/>
           </a:bodyPr>
           <a:lstStyle/>
           <a:p>
             <a:pPr>
-              <a:defRPr sz="1000">
-                <a:solidFill>
-                  <a:srgbClr val="64748B"/>
+              <a:defRPr sz="950">
+                <a:solidFill>
+                  <a:srgbClr val="94A3B8"/>
                 </a:solidFill>
                 <a:latin typeface="Segoe UI"/>
               </a:defRPr>
             </a:pPr>
             <a:r>
-              <a:t>Christopher GILLERON  |  Steam Video Games Analysis (PySpark / Databricks)  |  Certification CDSD Bloc 2</a:t>
+              <a:t>Christopher GILLERON  |  Steam Video Games Analysis (PySpark / Databricks)  |  Certification CDSD Bloc 2  |  Temps alloué : 5 min</a:t>
             </a:r>
           </a:p>
         </p:txBody>
@@ -4342,7 +4420,7 @@
         <p:spPr>
           <a:xfrm>
             <a:off x="731520" y="1371600"/>
-            <a:ext cx="5212080" cy="4754880"/>
+            <a:ext cx="5212080" cy="4846320"/>
           </a:xfrm>
           <a:prstGeom prst="roundRect">
             <a:avLst/>
@@ -4350,7 +4428,7 @@
           <a:solidFill>
             <a:srgbClr val="1E293B"/>
           </a:solidFill>
-          <a:ln w="19050">
+          <a:ln w="12700">
             <a:solidFill>
               <a:srgbClr val="334155"/>
             </a:solidFill>
@@ -4386,8 +4464,8 @@
         </p:nvSpPr>
         <p:spPr>
           <a:xfrm>
-            <a:off x="914400" y="1536192"/>
-            <a:ext cx="4846320" cy="365760"/>
+            <a:off x="914400" y="1554480"/>
+            <a:ext cx="4846320" cy="4480560"/>
           </a:xfrm>
           <a:prstGeom prst="rect">
             <a:avLst/>
@@ -4401,47 +4479,25 @@
           <a:lstStyle/>
           <a:p>
             <a:pPr>
-              <a:defRPr sz="1100" b="1">
+              <a:defRPr sz="1300" b="1">
                 <a:solidFill>
                   <a:srgbClr val="38BDF8"/>
                 </a:solidFill>
-                <a:latin typeface="Segoe UI"/>
               </a:defRPr>
             </a:pPr>
             <a:r>
               <a:t>CHRONOLOGIE DES SORTIES (55 691 JEUX)</a:t>
             </a:r>
           </a:p>
-        </p:txBody>
-      </p:sp>
-      <p:sp>
-        <p:nvSpPr>
-          <p:cNvPr id="9" name="TextBox 8"/>
-          <p:cNvSpPr txBox="1"/>
-          <p:nvPr/>
-        </p:nvSpPr>
-        <p:spPr>
-          <a:xfrm>
-            <a:off x="914400" y="1920240"/>
-            <a:ext cx="4846320" cy="4023360"/>
-          </a:xfrm>
-          <a:prstGeom prst="rect">
-            <a:avLst/>
-          </a:prstGeom>
-          <a:noFill/>
-        </p:spPr>
-        <p:txBody>
-          <a:bodyPr wrap="square">
-            <a:spAutoFit/>
-          </a:bodyPr>
-          <a:lstStyle/>
-          <a:p>
-            <a:pPr>
-              <a:defRPr sz="1000" b="1">
-                <a:solidFill>
-                  <a:srgbClr val="38BDF8"/>
-                </a:solidFill>
-                <a:latin typeface="Segoe UI"/>
+          <a:p>
+            <a:pPr>
+              <a:spcBef>
+                <a:spcPts val="600"/>
+              </a:spcBef>
+              <a:defRPr b="1" sz="1050">
+                <a:solidFill>
+                  <a:srgbClr val="F8FAFC"/>
+                </a:solidFill>
               </a:defRPr>
             </a:pPr>
             <a:r>
@@ -4450,50 +4506,52 @@
           </a:p>
           <a:p>
             <a:pPr>
-              <a:defRPr sz="900">
+              <a:defRPr sz="950">
+                <a:solidFill>
+                  <a:srgbClr val="94A3B8"/>
+                </a:solidFill>
+              </a:defRPr>
+            </a:pPr>
+            <a:r>
+              <a:t>Moins de 500 jeux/an validés manuellement par Valve (471 en 2013).</a:t>
+            </a:r>
+          </a:p>
+          <a:p>
+            <a:pPr>
+              <a:spcBef>
+                <a:spcPts val="600"/>
+              </a:spcBef>
+              <a:defRPr b="1" sz="1050">
                 <a:solidFill>
                   <a:srgbClr val="F8FAFC"/>
                 </a:solidFill>
-                <a:latin typeface="Segoe UI"/>
-              </a:defRPr>
-            </a:pPr>
-            <a:r>
-              <a:t>Validation manuelle stricte par Valve : moins de 500 jeux par an (471 en 2013).</a:t>
-            </a:r>
-          </a:p>
-          <a:p>
-            <a:pPr>
-              <a:defRPr sz="1000" b="1">
-                <a:solidFill>
-                  <a:srgbClr val="38BDF8"/>
-                </a:solidFill>
-                <a:latin typeface="Segoe UI"/>
-              </a:defRPr>
-            </a:pPr>
-            <a:r>
-              <a:t>2014 - 2018 (Steam Greenlight / Direct) :</a:t>
-            </a:r>
-          </a:p>
-          <a:p>
-            <a:pPr>
-              <a:defRPr sz="900">
+              </a:defRPr>
+            </a:pPr>
+            <a:r>
+              <a:t>2014 - 2018 (Steam Direct) :</a:t>
+            </a:r>
+          </a:p>
+          <a:p>
+            <a:pPr>
+              <a:defRPr sz="950">
+                <a:solidFill>
+                  <a:srgbClr val="94A3B8"/>
+                </a:solidFill>
+              </a:defRPr>
+            </a:pPr>
+            <a:r>
+              <a:t>Explosion de l'offre indépendante : passage de 1 557 sorties en 2014 à 7 678 en 2018 (multiplication par 5).</a:t>
+            </a:r>
+          </a:p>
+          <a:p>
+            <a:pPr>
+              <a:spcBef>
+                <a:spcPts val="600"/>
+              </a:spcBef>
+              <a:defRPr b="1" sz="1050">
                 <a:solidFill>
                   <a:srgbClr val="F8FAFC"/>
                 </a:solidFill>
-                <a:latin typeface="Segoe UI"/>
-              </a:defRPr>
-            </a:pPr>
-            <a:r>
-              <a:t>Explosion de l'offre indépendante : passage de 1 557 sorties en 2014 à 7 678 en 2018 (multiplication par 5).</a:t>
-            </a:r>
-          </a:p>
-          <a:p>
-            <a:pPr>
-              <a:defRPr sz="1000" b="1">
-                <a:solidFill>
-                  <a:srgbClr val="38BDF8"/>
-                </a:solidFill>
-                <a:latin typeface="Segoe UI"/>
               </a:defRPr>
             </a:pPr>
             <a:r>
@@ -4502,24 +4560,25 @@
           </a:p>
           <a:p>
             <a:pPr>
-              <a:defRPr sz="900">
+              <a:defRPr sz="950">
+                <a:solidFill>
+                  <a:srgbClr val="94A3B8"/>
+                </a:solidFill>
+              </a:defRPr>
+            </a:pPr>
+            <a:r>
+              <a:t>8 305 sorties en 2020 et pic historique absolu à 8 823 sorties en 2021 (+26.6% vs 2019).</a:t>
+            </a:r>
+          </a:p>
+          <a:p>
+            <a:pPr>
+              <a:spcBef>
+                <a:spcPts val="600"/>
+              </a:spcBef>
+              <a:defRPr b="1" sz="1050">
                 <a:solidFill>
                   <a:srgbClr val="F8FAFC"/>
                 </a:solidFill>
-                <a:latin typeface="Segoe UI"/>
-              </a:defRPr>
-            </a:pPr>
-            <a:r>
-              <a:t>8 305 sorties en 2020 et pic historique absolu à 8 823 sorties en 2021 (+26.6% vs 2019).</a:t>
-            </a:r>
-          </a:p>
-          <a:p>
-            <a:pPr>
-              <a:defRPr sz="1000" b="1">
-                <a:solidFill>
-                  <a:srgbClr val="38BDF8"/>
-                </a:solidFill>
-                <a:latin typeface="Segoe UI"/>
               </a:defRPr>
             </a:pPr>
             <a:r>
@@ -4528,29 +4587,82 @@
           </a:p>
           <a:p>
             <a:pPr>
-              <a:defRPr sz="900">
+              <a:defRPr sz="950">
+                <a:solidFill>
+                  <a:srgbClr val="94A3B8"/>
+                </a:solidFill>
+              </a:defRPr>
+            </a:pPr>
+            <a:r>
+              <a:t>7 455 sorties enregistrées : stabilisation à un rythme 15 fois supérieur à 2012.</a:t>
+            </a:r>
+          </a:p>
+          <a:p>
+            <a:pPr>
+              <a:spcBef>
+                <a:spcPts val="600"/>
+              </a:spcBef>
+              <a:defRPr b="1" sz="1050">
                 <a:solidFill>
                   <a:srgbClr val="F8FAFC"/>
                 </a:solidFill>
-                <a:latin typeface="Segoe UI"/>
-              </a:defRPr>
-            </a:pPr>
-            <a:r>
-              <a:t>7 455 sorties enregistrées dans le dump : stabilisation à un rythme 15 fois supérieur à 2012.</a:t>
-            </a:r>
-          </a:p>
-        </p:txBody>
-      </p:sp>
-      <p:sp>
-        <p:nvSpPr>
-          <p:cNvPr id="10" name="Rounded Rectangle 9"/>
+              </a:defRPr>
+            </a:pPr>
+            <a:r>
+              <a:t>Effet Catalyseur Majeur :</a:t>
+            </a:r>
+          </a:p>
+          <a:p>
+            <a:pPr>
+              <a:defRPr sz="950">
+                <a:solidFill>
+                  <a:srgbClr val="94A3B8"/>
+                </a:solidFill>
+              </a:defRPr>
+            </a:pPr>
+            <a:r>
+              <a:t>Près d'un tiers (30.8%) du catalogue total a été publié en seulement 24 mois pendant la crise.</a:t>
+            </a:r>
+          </a:p>
+          <a:p>
+            <a:pPr>
+              <a:spcBef>
+                <a:spcPts val="600"/>
+              </a:spcBef>
+              <a:defRPr b="1" sz="1050">
+                <a:solidFill>
+                  <a:srgbClr val="F8FAFC"/>
+                </a:solidFill>
+              </a:defRPr>
+            </a:pPr>
+            <a:r>
+              <a:t>Conséquence pour Ubisoft :</a:t>
+            </a:r>
+          </a:p>
+          <a:p>
+            <a:pPr>
+              <a:defRPr sz="950">
+                <a:solidFill>
+                  <a:srgbClr val="94A3B8"/>
+                </a:solidFill>
+              </a:defRPr>
+            </a:pPr>
+            <a:r>
+              <a:t>Saturation inédite de l'attention des joueurs : impératif d'activer des leviers marketing forts dès le Day One.</a:t>
+            </a:r>
+          </a:p>
+        </p:txBody>
+      </p:sp>
+      <p:sp>
+        <p:nvSpPr>
+          <p:cNvPr id="9" name="Rounded Rectangle 8"/>
           <p:cNvSpPr/>
           <p:nvPr/>
         </p:nvSpPr>
         <p:spPr>
           <a:xfrm>
             <a:off x="6217920" y="1371600"/>
-            <a:ext cx="5242255" cy="4754880"/>
+            <a:ext cx="5242255" cy="4846320"/>
           </a:xfrm>
           <a:prstGeom prst="roundRect">
             <a:avLst/>
@@ -4558,7 +4670,7 @@
           <a:solidFill>
             <a:srgbClr val="1E293B"/>
           </a:solidFill>
-          <a:ln w="19050">
+          <a:ln w="12700">
             <a:solidFill>
               <a:srgbClr val="334155"/>
             </a:solidFill>
@@ -4586,16 +4698,85 @@
           </a:p>
         </p:txBody>
       </p:sp>
-      <p:sp>
-        <p:nvSpPr>
-          <p:cNvPr id="11" name="TextBox 10"/>
+      <p:pic>
+        <p:nvPicPr>
+          <p:cNvPr id="10" name="Picture 9" descr="steam_chart_covid.png"/>
+          <p:cNvPicPr>
+            <a:picLocks noChangeAspect="1"/>
+          </p:cNvPicPr>
+          <p:nvPr/>
+        </p:nvPicPr>
+        <p:blipFill>
+          <a:blip r:embed="rId2"/>
+          <a:stretch>
+            <a:fillRect/>
+          </a:stretch>
+        </p:blipFill>
+        <p:spPr>
+          <a:xfrm>
+            <a:off x="6400800" y="1554480"/>
+            <a:ext cx="4876495" cy="2029968"/>
+          </a:xfrm>
+          <a:prstGeom prst="rect">
+            <a:avLst/>
+          </a:prstGeom>
+        </p:spPr>
+      </p:pic>
+      <p:sp>
+        <p:nvSpPr>
+          <p:cNvPr id="11" name="Rounded Rectangle 10"/>
+          <p:cNvSpPr/>
+          <p:nvPr/>
+        </p:nvSpPr>
+        <p:spPr>
+          <a:xfrm>
+            <a:off x="6400800" y="3749039"/>
+            <a:ext cx="4876495" cy="2286000"/>
+          </a:xfrm>
+          <a:prstGeom prst="roundRect">
+            <a:avLst/>
+          </a:prstGeom>
+          <a:solidFill>
+            <a:srgbClr val="0F172A"/>
+          </a:solidFill>
+          <a:ln w="12700">
+            <a:solidFill>
+              <a:srgbClr val="334155"/>
+            </a:solidFill>
+          </a:ln>
+        </p:spPr>
+        <p:style>
+          <a:lnRef idx="1">
+            <a:schemeClr val="accent1"/>
+          </a:lnRef>
+          <a:fillRef idx="3">
+            <a:schemeClr val="accent1"/>
+          </a:fillRef>
+          <a:effectRef idx="2">
+            <a:schemeClr val="accent1"/>
+          </a:effectRef>
+          <a:fontRef idx="minor">
+            <a:schemeClr val="lt1"/>
+          </a:fontRef>
+        </p:style>
+        <p:txBody>
+          <a:bodyPr rtlCol="0" anchor="ctr"/>
+          <a:lstStyle/>
+          <a:p>
+            <a:pPr algn="ctr"/>
+          </a:p>
+        </p:txBody>
+      </p:sp>
+      <p:sp>
+        <p:nvSpPr>
+          <p:cNvPr id="12" name="TextBox 11"/>
           <p:cNvSpPr txBox="1"/>
           <p:nvPr/>
         </p:nvSpPr>
         <p:spPr>
           <a:xfrm>
-            <a:off x="6400800" y="1536192"/>
-            <a:ext cx="4876495" cy="365760"/>
+            <a:off x="6583680" y="3840480"/>
+            <a:ext cx="4510735" cy="2103120"/>
           </a:xfrm>
           <a:prstGeom prst="rect">
             <a:avLst/>
@@ -4613,409 +4794,55 @@
                 <a:solidFill>
                   <a:srgbClr val="38BDF8"/>
                 </a:solidFill>
-                <a:latin typeface="Segoe UI"/>
-              </a:defRPr>
-            </a:pPr>
-            <a:r>
-              <a:t>IMPACT DE LA CRISE SANITAIRE (DATABRICKS)</a:t>
-            </a:r>
-          </a:p>
-        </p:txBody>
-      </p:sp>
-      <p:graphicFrame>
-        <p:nvGraphicFramePr>
-          <p:cNvPr id="12" name="Table 11"/>
-          <p:cNvGraphicFramePr>
-            <a:graphicFrameLocks noGrp="1"/>
-          </p:cNvGraphicFramePr>
-          <p:nvPr/>
-        </p:nvGraphicFramePr>
-        <p:xfrm>
-          <a:off x="6492240" y="2011680"/>
-          <a:ext cx="4693615" cy="1828800"/>
-        </p:xfrm>
-        <a:graphic>
-          <a:graphicData uri="http://schemas.openxmlformats.org/drawingml/2006/table">
-            <a:tbl>
-              <a:tblPr firstRow="1" bandRow="1">
-                <a:tableStyleId>{5C22544A-7EE6-4342-B048-85BDC9FD1C3A}</a:tableStyleId>
-              </a:tblPr>
-              <a:tblGrid>
-                <a:gridCol w="1564538"/>
-                <a:gridCol w="1564538"/>
-                <a:gridCol w="1564539"/>
-              </a:tblGrid>
-              <a:tr h="457200">
-                <a:tc>
-                  <a:txBody>
-                    <a:bodyPr/>
-                    <a:lstStyle/>
-                    <a:p>
-                      <a:pPr>
-                        <a:defRPr sz="1000" b="1">
-                          <a:solidFill>
-                            <a:srgbClr val="38BDF8"/>
-                          </a:solidFill>
-                          <a:latin typeface="Segoe UI"/>
-                        </a:defRPr>
-                      </a:pPr>
-                      <a:r>
-                        <a:t>Période d'Analyse</a:t>
-                      </a:r>
-                    </a:p>
-                  </a:txBody>
-                  <a:tcPr>
-                    <a:solidFill>
-                      <a:srgbClr val="0F172A"/>
-                    </a:solidFill>
-                  </a:tcPr>
-                </a:tc>
-                <a:tc>
-                  <a:txBody>
-                    <a:bodyPr/>
-                    <a:lstStyle/>
-                    <a:p>
-                      <a:pPr>
-                        <a:defRPr sz="1000" b="1">
-                          <a:solidFill>
-                            <a:srgbClr val="38BDF8"/>
-                          </a:solidFill>
-                          <a:latin typeface="Segoe UI"/>
-                        </a:defRPr>
-                      </a:pPr>
-                      <a:r>
-                        <a:t>Total Sorties</a:t>
-                      </a:r>
-                    </a:p>
-                  </a:txBody>
-                  <a:tcPr>
-                    <a:solidFill>
-                      <a:srgbClr val="0F172A"/>
-                    </a:solidFill>
-                  </a:tcPr>
-                </a:tc>
-                <a:tc>
-                  <a:txBody>
-                    <a:bodyPr/>
-                    <a:lstStyle/>
-                    <a:p>
-                      <a:pPr>
-                        <a:defRPr sz="1000" b="1">
-                          <a:solidFill>
-                            <a:srgbClr val="38BDF8"/>
-                          </a:solidFill>
-                          <a:latin typeface="Segoe UI"/>
-                        </a:defRPr>
-                      </a:pPr>
-                      <a:r>
-                        <a:t>% Catalogue</a:t>
-                      </a:r>
-                    </a:p>
-                  </a:txBody>
-                  <a:tcPr>
-                    <a:solidFill>
-                      <a:srgbClr val="0F172A"/>
-                    </a:solidFill>
-                  </a:tcPr>
-                </a:tc>
-              </a:tr>
-              <a:tr h="457200">
-                <a:tc>
-                  <a:txBody>
-                    <a:bodyPr/>
-                    <a:lstStyle/>
-                    <a:p>
-                      <a:pPr>
-                        <a:defRPr sz="950" b="1">
-                          <a:solidFill>
-                            <a:srgbClr val="F8FAFC"/>
-                          </a:solidFill>
-                          <a:latin typeface="Segoe UI"/>
-                        </a:defRPr>
-                      </a:pPr>
-                      <a:r>
-                        <a:t>Avant Covid (≤ 2019)</a:t>
-                      </a:r>
-                    </a:p>
-                  </a:txBody>
-                  <a:tcPr>
-                    <a:solidFill>
-                      <a:srgbClr val="18202F"/>
-                    </a:solidFill>
-                  </a:tcPr>
-                </a:tc>
-                <a:tc>
-                  <a:txBody>
-                    <a:bodyPr/>
-                    <a:lstStyle/>
-                    <a:p>
-                      <a:pPr>
-                        <a:defRPr sz="950" b="0">
-                          <a:solidFill>
-                            <a:srgbClr val="F8FAFC"/>
-                          </a:solidFill>
-                          <a:latin typeface="Segoe UI"/>
-                        </a:defRPr>
-                      </a:pPr>
-                      <a:r>
-                        <a:t>31 009</a:t>
-                      </a:r>
-                    </a:p>
-                  </a:txBody>
-                  <a:tcPr>
-                    <a:solidFill>
-                      <a:srgbClr val="18202F"/>
-                    </a:solidFill>
-                  </a:tcPr>
-                </a:tc>
-                <a:tc>
-                  <a:txBody>
-                    <a:bodyPr/>
-                    <a:lstStyle/>
-                    <a:p>
-                      <a:pPr>
-                        <a:defRPr sz="950" b="0">
-                          <a:solidFill>
-                            <a:srgbClr val="F8FAFC"/>
-                          </a:solidFill>
-                          <a:latin typeface="Segoe UI"/>
-                        </a:defRPr>
-                      </a:pPr>
-                      <a:r>
-                        <a:t>55.8 %</a:t>
-                      </a:r>
-                    </a:p>
-                  </a:txBody>
-                  <a:tcPr>
-                    <a:solidFill>
-                      <a:srgbClr val="18202F"/>
-                    </a:solidFill>
-                  </a:tcPr>
-                </a:tc>
-              </a:tr>
-              <a:tr h="457200">
-                <a:tc>
-                  <a:txBody>
-                    <a:bodyPr/>
-                    <a:lstStyle/>
-                    <a:p>
-                      <a:pPr>
-                        <a:defRPr sz="950" b="1">
-                          <a:solidFill>
-                            <a:srgbClr val="F8FAFC"/>
-                          </a:solidFill>
-                          <a:latin typeface="Segoe UI"/>
-                        </a:defRPr>
-                      </a:pPr>
-                      <a:r>
-                        <a:t>Pandémie Covid (2020-2021)</a:t>
-                      </a:r>
-                    </a:p>
-                  </a:txBody>
-                  <a:tcPr>
-                    <a:solidFill>
-                      <a:srgbClr val="1E293B"/>
-                    </a:solidFill>
-                  </a:tcPr>
-                </a:tc>
-                <a:tc>
-                  <a:txBody>
-                    <a:bodyPr/>
-                    <a:lstStyle/>
-                    <a:p>
-                      <a:pPr>
-                        <a:defRPr sz="950" b="0">
-                          <a:solidFill>
-                            <a:srgbClr val="F8FAFC"/>
-                          </a:solidFill>
-                          <a:latin typeface="Segoe UI"/>
-                        </a:defRPr>
-                      </a:pPr>
-                      <a:r>
-                        <a:t>17 128</a:t>
-                      </a:r>
-                    </a:p>
-                  </a:txBody>
-                  <a:tcPr>
-                    <a:solidFill>
-                      <a:srgbClr val="1E293B"/>
-                    </a:solidFill>
-                  </a:tcPr>
-                </a:tc>
-                <a:tc>
-                  <a:txBody>
-                    <a:bodyPr/>
-                    <a:lstStyle/>
-                    <a:p>
-                      <a:pPr>
-                        <a:defRPr sz="950" b="0">
-                          <a:solidFill>
-                            <a:srgbClr val="F8FAFC"/>
-                          </a:solidFill>
-                          <a:latin typeface="Segoe UI"/>
-                        </a:defRPr>
-                      </a:pPr>
-                      <a:r>
-                        <a:t>30.8 %</a:t>
-                      </a:r>
-                    </a:p>
-                  </a:txBody>
-                  <a:tcPr>
-                    <a:solidFill>
-                      <a:srgbClr val="1E293B"/>
-                    </a:solidFill>
-                  </a:tcPr>
-                </a:tc>
-              </a:tr>
-              <a:tr h="457200">
-                <a:tc>
-                  <a:txBody>
-                    <a:bodyPr/>
-                    <a:lstStyle/>
-                    <a:p>
-                      <a:pPr>
-                        <a:defRPr sz="950" b="1">
-                          <a:solidFill>
-                            <a:srgbClr val="F8FAFC"/>
-                          </a:solidFill>
-                          <a:latin typeface="Segoe UI"/>
-                        </a:defRPr>
-                      </a:pPr>
-                      <a:r>
-                        <a:t>Après Covid (2022)</a:t>
-                      </a:r>
-                    </a:p>
-                  </a:txBody>
-                  <a:tcPr>
-                    <a:solidFill>
-                      <a:srgbClr val="18202F"/>
-                    </a:solidFill>
-                  </a:tcPr>
-                </a:tc>
-                <a:tc>
-                  <a:txBody>
-                    <a:bodyPr/>
-                    <a:lstStyle/>
-                    <a:p>
-                      <a:pPr>
-                        <a:defRPr sz="950" b="0">
-                          <a:solidFill>
-                            <a:srgbClr val="F8FAFC"/>
-                          </a:solidFill>
-                          <a:latin typeface="Segoe UI"/>
-                        </a:defRPr>
-                      </a:pPr>
-                      <a:r>
-                        <a:t>7 455</a:t>
-                      </a:r>
-                    </a:p>
-                  </a:txBody>
-                  <a:tcPr>
-                    <a:solidFill>
-                      <a:srgbClr val="18202F"/>
-                    </a:solidFill>
-                  </a:tcPr>
-                </a:tc>
-                <a:tc>
-                  <a:txBody>
-                    <a:bodyPr/>
-                    <a:lstStyle/>
-                    <a:p>
-                      <a:pPr>
-                        <a:defRPr sz="950" b="0">
-                          <a:solidFill>
-                            <a:srgbClr val="F8FAFC"/>
-                          </a:solidFill>
-                          <a:latin typeface="Segoe UI"/>
-                        </a:defRPr>
-                      </a:pPr>
-                      <a:r>
-                        <a:t>13.4 %</a:t>
-                      </a:r>
-                    </a:p>
-                  </a:txBody>
-                  <a:tcPr>
-                    <a:solidFill>
-                      <a:srgbClr val="18202F"/>
-                    </a:solidFill>
-                  </a:tcPr>
-                </a:tc>
-              </a:tr>
-            </a:tbl>
-          </a:graphicData>
-        </a:graphic>
-      </p:graphicFrame>
-      <p:sp>
-        <p:nvSpPr>
-          <p:cNvPr id="13" name="TextBox 12"/>
-          <p:cNvSpPr txBox="1"/>
-          <p:nvPr/>
-        </p:nvSpPr>
-        <p:spPr>
-          <a:xfrm>
-            <a:off x="6400800" y="4023360"/>
-            <a:ext cx="4876495" cy="1920240"/>
-          </a:xfrm>
-          <a:prstGeom prst="rect">
-            <a:avLst/>
-          </a:prstGeom>
-          <a:noFill/>
-        </p:spPr>
-        <p:txBody>
-          <a:bodyPr wrap="square">
-            <a:spAutoFit/>
-          </a:bodyPr>
-          <a:lstStyle/>
-          <a:p>
-            <a:pPr>
-              <a:defRPr sz="1000" b="1">
-                <a:solidFill>
-                  <a:srgbClr val="F59E0B"/>
-                </a:solidFill>
-                <a:latin typeface="Segoe UI"/>
-              </a:defRPr>
-            </a:pPr>
-            <a:r>
-              <a:t>Effet Catalyseur Majeur :</a:t>
-            </a:r>
-          </a:p>
-          <a:p>
-            <a:pPr>
-              <a:defRPr sz="900">
+              </a:defRPr>
+            </a:pPr>
+            <a:r>
+              <a:t>INSIGHTS STRATÉGIQUES DATABRICKS</a:t>
+            </a:r>
+          </a:p>
+          <a:p>
+            <a:pPr>
+              <a:spcBef>
+                <a:spcPts val="400"/>
+              </a:spcBef>
+              <a:defRPr sz="950">
                 <a:solidFill>
                   <a:srgbClr val="F8FAFC"/>
                 </a:solidFill>
-                <a:latin typeface="Segoe UI"/>
-              </a:defRPr>
-            </a:pPr>
-            <a:r>
-              <a:t>Près d'un tiers (30.8%) du catalogue total a été publié en seulement 24 mois pendant la crise.</a:t>
-            </a:r>
-          </a:p>
-          <a:p>
-            <a:pPr>
-              <a:defRPr sz="1000" b="1">
-                <a:solidFill>
-                  <a:srgbClr val="F59E0B"/>
-                </a:solidFill>
-                <a:latin typeface="Segoe UI"/>
-              </a:defRPr>
-            </a:pPr>
-            <a:r>
-              <a:t>Conséquence pour Ubisoft :</a:t>
-            </a:r>
-          </a:p>
-          <a:p>
-            <a:pPr>
-              <a:defRPr sz="900">
+              </a:defRPr>
+            </a:pPr>
+            <a:r>
+              <a:t>• Pic Historique 2021 : 8 823 jeux publiés en un an, dopés par les confinements mondiaux.</a:t>
+            </a:r>
+          </a:p>
+          <a:p>
+            <a:pPr>
+              <a:spcBef>
+                <a:spcPts val="400"/>
+              </a:spcBef>
+              <a:defRPr sz="950">
                 <a:solidFill>
                   <a:srgbClr val="F8FAFC"/>
                 </a:solidFill>
-                <a:latin typeface="Segoe UI"/>
-              </a:defRPr>
-            </a:pPr>
-            <a:r>
-              <a:t>Saturation inédite de l'attention des joueurs : impératif d'activer des leviers marketing forts dès le Day One.</a:t>
+              </a:defRPr>
+            </a:pPr>
+            <a:r>
+              <a:t>• Volume Pandémie (2020-2021) : 17 128 jeux (30.8% du catalogue global en 2 ans).</a:t>
+            </a:r>
+          </a:p>
+          <a:p>
+            <a:pPr>
+              <a:spcBef>
+                <a:spcPts val="400"/>
+              </a:spcBef>
+              <a:defRPr sz="950">
+                <a:solidFill>
+                  <a:srgbClr val="F8FAFC"/>
+                </a:solidFill>
+              </a:defRPr>
+            </a:pPr>
+            <a:r>
+              <a:t>• Enseignement Ubisoft : La concurrence pour la visibilité 'Steam Storefront' n'a jamais été aussi rude : le marketing pré-lancement (Wishlists) est capital.</a:t>
             </a:r>
           </a:p>
         </p:txBody>
@@ -5098,7 +4925,7 @@
           <a:noFill/>
         </p:spPr>
         <p:txBody>
-          <a:bodyPr wrap="square">
+          <a:bodyPr wrap="square" lIns="0" tIns="0" rIns="0" bIns="0">
             <a:spAutoFit/>
           </a:bodyPr>
           <a:lstStyle/>
@@ -5134,13 +4961,13 @@
           <a:noFill/>
         </p:spPr>
         <p:txBody>
-          <a:bodyPr wrap="square">
+          <a:bodyPr wrap="square" lIns="0" tIns="0" rIns="0" bIns="0">
             <a:spAutoFit/>
           </a:bodyPr>
           <a:lstStyle/>
           <a:p>
             <a:pPr>
-              <a:defRPr sz="2100" b="1">
+              <a:defRPr sz="1800" b="1">
                 <a:solidFill>
                   <a:srgbClr val="F8FAFC"/>
                 </a:solidFill>
@@ -5170,7 +4997,7 @@
           <a:noFill/>
         </p:spPr>
         <p:txBody>
-          <a:bodyPr wrap="square">
+          <a:bodyPr wrap="none" lIns="0" tIns="0" rIns="0" bIns="0">
             <a:spAutoFit/>
           </a:bodyPr>
           <a:lstStyle/>
@@ -5206,21 +5033,21 @@
           <a:noFill/>
         </p:spPr>
         <p:txBody>
-          <a:bodyPr wrap="square">
+          <a:bodyPr wrap="none" lIns="0" tIns="0" rIns="0" bIns="0">
             <a:spAutoFit/>
           </a:bodyPr>
           <a:lstStyle/>
           <a:p>
             <a:pPr>
-              <a:defRPr sz="1000">
-                <a:solidFill>
-                  <a:srgbClr val="64748B"/>
+              <a:defRPr sz="950">
+                <a:solidFill>
+                  <a:srgbClr val="94A3B8"/>
                 </a:solidFill>
                 <a:latin typeface="Segoe UI"/>
               </a:defRPr>
             </a:pPr>
             <a:r>
-              <a:t>Christopher GILLERON  |  Steam Video Games Analysis (PySpark / Databricks)  |  Certification CDSD Bloc 2</a:t>
+              <a:t>Christopher GILLERON  |  Steam Video Games Analysis (PySpark / Databricks)  |  Certification CDSD Bloc 2  |  Temps alloué : 5 min</a:t>
             </a:r>
           </a:p>
         </p:txBody>
@@ -5234,7 +5061,7 @@
         <p:spPr>
           <a:xfrm>
             <a:off x="731520" y="1371600"/>
-            <a:ext cx="5486400" cy="4754880"/>
+            <a:ext cx="5212080" cy="4846320"/>
           </a:xfrm>
           <a:prstGeom prst="roundRect">
             <a:avLst/>
@@ -5242,7 +5069,7 @@
           <a:solidFill>
             <a:srgbClr val="1E293B"/>
           </a:solidFill>
-          <a:ln w="19050">
+          <a:ln w="12700">
             <a:solidFill>
               <a:srgbClr val="334155"/>
             </a:solidFill>
@@ -5278,8 +5105,8 @@
         </p:nvSpPr>
         <p:spPr>
           <a:xfrm>
-            <a:off x="914400" y="1536192"/>
-            <a:ext cx="5120640" cy="365760"/>
+            <a:off x="914400" y="1554480"/>
+            <a:ext cx="4846320" cy="4480560"/>
           </a:xfrm>
           <a:prstGeom prst="rect">
             <a:avLst/>
@@ -5293,870 +5120,178 @@
           <a:lstStyle/>
           <a:p>
             <a:pPr>
-              <a:defRPr sz="1100" b="1">
+              <a:defRPr sz="1300" b="1">
                 <a:solidFill>
                   <a:srgbClr val="38BDF8"/>
                 </a:solidFill>
-                <a:latin typeface="Segoe UI"/>
               </a:defRPr>
             </a:pPr>
             <a:r>
               <a:t>TOP 10 DES ÉDITEURS EN VOLUME (PYSPARK)</a:t>
             </a:r>
           </a:p>
-        </p:txBody>
-      </p:sp>
-      <p:graphicFrame>
-        <p:nvGraphicFramePr>
-          <p:cNvPr id="9" name="Table 8"/>
-          <p:cNvGraphicFramePr>
-            <a:graphicFrameLocks noGrp="1"/>
-          </p:cNvGraphicFramePr>
-          <p:nvPr/>
-        </p:nvGraphicFramePr>
-        <p:xfrm>
-          <a:off x="914400" y="1920240"/>
-          <a:ext cx="5120640" cy="3931920"/>
-        </p:xfrm>
-        <a:graphic>
-          <a:graphicData uri="http://schemas.openxmlformats.org/drawingml/2006/table">
-            <a:tbl>
-              <a:tblPr firstRow="1" bandRow="1">
-                <a:tableStyleId>{5C22544A-7EE6-4342-B048-85BDC9FD1C3A}</a:tableStyleId>
-              </a:tblPr>
-              <a:tblGrid>
-                <a:gridCol w="1706880"/>
-                <a:gridCol w="1706880"/>
-                <a:gridCol w="1706880"/>
-              </a:tblGrid>
-              <a:tr h="357447">
-                <a:tc>
-                  <a:txBody>
-                    <a:bodyPr/>
-                    <a:lstStyle/>
-                    <a:p>
-                      <a:pPr>
-                        <a:defRPr sz="1000" b="1">
-                          <a:solidFill>
-                            <a:srgbClr val="38BDF8"/>
-                          </a:solidFill>
-                          <a:latin typeface="Segoe UI"/>
-                        </a:defRPr>
-                      </a:pPr>
-                      <a:r>
-                        <a:t>Rang</a:t>
-                      </a:r>
-                    </a:p>
-                  </a:txBody>
-                  <a:tcPr>
-                    <a:solidFill>
-                      <a:srgbClr val="0F172A"/>
-                    </a:solidFill>
-                  </a:tcPr>
-                </a:tc>
-                <a:tc>
-                  <a:txBody>
-                    <a:bodyPr/>
-                    <a:lstStyle/>
-                    <a:p>
-                      <a:pPr>
-                        <a:defRPr sz="1000" b="1">
-                          <a:solidFill>
-                            <a:srgbClr val="38BDF8"/>
-                          </a:solidFill>
-                          <a:latin typeface="Segoe UI"/>
-                        </a:defRPr>
-                      </a:pPr>
-                      <a:r>
-                        <a:t>Éditeur / Publisher</a:t>
-                      </a:r>
-                    </a:p>
-                  </a:txBody>
-                  <a:tcPr>
-                    <a:solidFill>
-                      <a:srgbClr val="0F172A"/>
-                    </a:solidFill>
-                  </a:tcPr>
-                </a:tc>
-                <a:tc>
-                  <a:txBody>
-                    <a:bodyPr/>
-                    <a:lstStyle/>
-                    <a:p>
-                      <a:pPr>
-                        <a:defRPr sz="1000" b="1">
-                          <a:solidFill>
-                            <a:srgbClr val="38BDF8"/>
-                          </a:solidFill>
-                          <a:latin typeface="Segoe UI"/>
-                        </a:defRPr>
-                      </a:pPr>
-                      <a:r>
-                        <a:t>Jeux Publiés</a:t>
-                      </a:r>
-                    </a:p>
-                  </a:txBody>
-                  <a:tcPr>
-                    <a:solidFill>
-                      <a:srgbClr val="0F172A"/>
-                    </a:solidFill>
-                  </a:tcPr>
-                </a:tc>
-              </a:tr>
-              <a:tr h="357447">
-                <a:tc>
-                  <a:txBody>
-                    <a:bodyPr/>
-                    <a:lstStyle/>
-                    <a:p>
-                      <a:pPr>
-                        <a:defRPr sz="950" b="1">
-                          <a:solidFill>
-                            <a:srgbClr val="F8FAFC"/>
-                          </a:solidFill>
-                          <a:latin typeface="Segoe UI"/>
-                        </a:defRPr>
-                      </a:pPr>
-                      <a:r>
-                        <a:t>1</a:t>
-                      </a:r>
-                    </a:p>
-                  </a:txBody>
-                  <a:tcPr>
-                    <a:solidFill>
-                      <a:srgbClr val="18202F"/>
-                    </a:solidFill>
-                  </a:tcPr>
-                </a:tc>
-                <a:tc>
-                  <a:txBody>
-                    <a:bodyPr/>
-                    <a:lstStyle/>
-                    <a:p>
-                      <a:pPr>
-                        <a:defRPr sz="950" b="0">
-                          <a:solidFill>
-                            <a:srgbClr val="F8FAFC"/>
-                          </a:solidFill>
-                          <a:latin typeface="Segoe UI"/>
-                        </a:defRPr>
-                      </a:pPr>
-                      <a:r>
-                        <a:t>Big Fish Games</a:t>
-                      </a:r>
-                    </a:p>
-                  </a:txBody>
-                  <a:tcPr>
-                    <a:solidFill>
-                      <a:srgbClr val="18202F"/>
-                    </a:solidFill>
-                  </a:tcPr>
-                </a:tc>
-                <a:tc>
-                  <a:txBody>
-                    <a:bodyPr/>
-                    <a:lstStyle/>
-                    <a:p>
-                      <a:pPr>
-                        <a:defRPr sz="950" b="0">
-                          <a:solidFill>
-                            <a:srgbClr val="F8FAFC"/>
-                          </a:solidFill>
-                          <a:latin typeface="Segoe UI"/>
-                        </a:defRPr>
-                      </a:pPr>
-                      <a:r>
-                        <a:t>422</a:t>
-                      </a:r>
-                    </a:p>
-                  </a:txBody>
-                  <a:tcPr>
-                    <a:solidFill>
-                      <a:srgbClr val="18202F"/>
-                    </a:solidFill>
-                  </a:tcPr>
-                </a:tc>
-              </a:tr>
-              <a:tr h="357447">
-                <a:tc>
-                  <a:txBody>
-                    <a:bodyPr/>
-                    <a:lstStyle/>
-                    <a:p>
-                      <a:pPr>
-                        <a:defRPr sz="950" b="1">
-                          <a:solidFill>
-                            <a:srgbClr val="F8FAFC"/>
-                          </a:solidFill>
-                          <a:latin typeface="Segoe UI"/>
-                        </a:defRPr>
-                      </a:pPr>
-                      <a:r>
-                        <a:t>2</a:t>
-                      </a:r>
-                    </a:p>
-                  </a:txBody>
-                  <a:tcPr>
-                    <a:solidFill>
-                      <a:srgbClr val="1E293B"/>
-                    </a:solidFill>
-                  </a:tcPr>
-                </a:tc>
-                <a:tc>
-                  <a:txBody>
-                    <a:bodyPr/>
-                    <a:lstStyle/>
-                    <a:p>
-                      <a:pPr>
-                        <a:defRPr sz="950" b="0">
-                          <a:solidFill>
-                            <a:srgbClr val="F8FAFC"/>
-                          </a:solidFill>
-                          <a:latin typeface="Segoe UI"/>
-                        </a:defRPr>
-                      </a:pPr>
-                      <a:r>
-                        <a:t>8floor</a:t>
-                      </a:r>
-                    </a:p>
-                  </a:txBody>
-                  <a:tcPr>
-                    <a:solidFill>
-                      <a:srgbClr val="1E293B"/>
-                    </a:solidFill>
-                  </a:tcPr>
-                </a:tc>
-                <a:tc>
-                  <a:txBody>
-                    <a:bodyPr/>
-                    <a:lstStyle/>
-                    <a:p>
-                      <a:pPr>
-                        <a:defRPr sz="950" b="0">
-                          <a:solidFill>
-                            <a:srgbClr val="F8FAFC"/>
-                          </a:solidFill>
-                          <a:latin typeface="Segoe UI"/>
-                        </a:defRPr>
-                      </a:pPr>
-                      <a:r>
-                        <a:t>202</a:t>
-                      </a:r>
-                    </a:p>
-                  </a:txBody>
-                  <a:tcPr>
-                    <a:solidFill>
-                      <a:srgbClr val="1E293B"/>
-                    </a:solidFill>
-                  </a:tcPr>
-                </a:tc>
-              </a:tr>
-              <a:tr h="357447">
-                <a:tc>
-                  <a:txBody>
-                    <a:bodyPr/>
-                    <a:lstStyle/>
-                    <a:p>
-                      <a:pPr>
-                        <a:defRPr sz="950" b="1">
-                          <a:solidFill>
-                            <a:srgbClr val="F8FAFC"/>
-                          </a:solidFill>
-                          <a:latin typeface="Segoe UI"/>
-                        </a:defRPr>
-                      </a:pPr>
-                      <a:r>
-                        <a:t>3</a:t>
-                      </a:r>
-                    </a:p>
-                  </a:txBody>
-                  <a:tcPr>
-                    <a:solidFill>
-                      <a:srgbClr val="18202F"/>
-                    </a:solidFill>
-                  </a:tcPr>
-                </a:tc>
-                <a:tc>
-                  <a:txBody>
-                    <a:bodyPr/>
-                    <a:lstStyle/>
-                    <a:p>
-                      <a:pPr>
-                        <a:defRPr sz="950" b="0">
-                          <a:solidFill>
-                            <a:srgbClr val="F8FAFC"/>
-                          </a:solidFill>
-                          <a:latin typeface="Segoe UI"/>
-                        </a:defRPr>
-                      </a:pPr>
-                      <a:r>
-                        <a:t>SEGA</a:t>
-                      </a:r>
-                    </a:p>
-                  </a:txBody>
-                  <a:tcPr>
-                    <a:solidFill>
-                      <a:srgbClr val="18202F"/>
-                    </a:solidFill>
-                  </a:tcPr>
-                </a:tc>
-                <a:tc>
-                  <a:txBody>
-                    <a:bodyPr/>
-                    <a:lstStyle/>
-                    <a:p>
-                      <a:pPr>
-                        <a:defRPr sz="950" b="0">
-                          <a:solidFill>
-                            <a:srgbClr val="F8FAFC"/>
-                          </a:solidFill>
-                          <a:latin typeface="Segoe UI"/>
-                        </a:defRPr>
-                      </a:pPr>
-                      <a:r>
-                        <a:t>187</a:t>
-                      </a:r>
-                    </a:p>
-                  </a:txBody>
-                  <a:tcPr>
-                    <a:solidFill>
-                      <a:srgbClr val="18202F"/>
-                    </a:solidFill>
-                  </a:tcPr>
-                </a:tc>
-              </a:tr>
-              <a:tr h="357447">
-                <a:tc>
-                  <a:txBody>
-                    <a:bodyPr/>
-                    <a:lstStyle/>
-                    <a:p>
-                      <a:pPr>
-                        <a:defRPr sz="950" b="1">
-                          <a:solidFill>
-                            <a:srgbClr val="F8FAFC"/>
-                          </a:solidFill>
-                          <a:latin typeface="Segoe UI"/>
-                        </a:defRPr>
-                      </a:pPr>
-                      <a:r>
-                        <a:t>4</a:t>
-                      </a:r>
-                    </a:p>
-                  </a:txBody>
-                  <a:tcPr>
-                    <a:solidFill>
-                      <a:srgbClr val="1E293B"/>
-                    </a:solidFill>
-                  </a:tcPr>
-                </a:tc>
-                <a:tc>
-                  <a:txBody>
-                    <a:bodyPr/>
-                    <a:lstStyle/>
-                    <a:p>
-                      <a:pPr>
-                        <a:defRPr sz="950" b="0">
-                          <a:solidFill>
-                            <a:srgbClr val="F8FAFC"/>
-                          </a:solidFill>
-                          <a:latin typeface="Segoe UI"/>
-                        </a:defRPr>
-                      </a:pPr>
-                      <a:r>
-                        <a:t>Strategy First</a:t>
-                      </a:r>
-                    </a:p>
-                  </a:txBody>
-                  <a:tcPr>
-                    <a:solidFill>
-                      <a:srgbClr val="1E293B"/>
-                    </a:solidFill>
-                  </a:tcPr>
-                </a:tc>
-                <a:tc>
-                  <a:txBody>
-                    <a:bodyPr/>
-                    <a:lstStyle/>
-                    <a:p>
-                      <a:pPr>
-                        <a:defRPr sz="950" b="0">
-                          <a:solidFill>
-                            <a:srgbClr val="F8FAFC"/>
-                          </a:solidFill>
-                          <a:latin typeface="Segoe UI"/>
-                        </a:defRPr>
-                      </a:pPr>
-                      <a:r>
-                        <a:t>151</a:t>
-                      </a:r>
-                    </a:p>
-                  </a:txBody>
-                  <a:tcPr>
-                    <a:solidFill>
-                      <a:srgbClr val="1E293B"/>
-                    </a:solidFill>
-                  </a:tcPr>
-                </a:tc>
-              </a:tr>
-              <a:tr h="357447">
-                <a:tc>
-                  <a:txBody>
-                    <a:bodyPr/>
-                    <a:lstStyle/>
-                    <a:p>
-                      <a:pPr>
-                        <a:defRPr sz="950" b="1">
-                          <a:solidFill>
-                            <a:srgbClr val="F8FAFC"/>
-                          </a:solidFill>
-                          <a:latin typeface="Segoe UI"/>
-                        </a:defRPr>
-                      </a:pPr>
-                      <a:r>
-                        <a:t>5</a:t>
-                      </a:r>
-                    </a:p>
-                  </a:txBody>
-                  <a:tcPr>
-                    <a:solidFill>
-                      <a:srgbClr val="18202F"/>
-                    </a:solidFill>
-                  </a:tcPr>
-                </a:tc>
-                <a:tc>
-                  <a:txBody>
-                    <a:bodyPr/>
-                    <a:lstStyle/>
-                    <a:p>
-                      <a:pPr>
-                        <a:defRPr sz="950" b="0">
-                          <a:solidFill>
-                            <a:srgbClr val="F8FAFC"/>
-                          </a:solidFill>
-                          <a:latin typeface="Segoe UI"/>
-                        </a:defRPr>
-                      </a:pPr>
-                      <a:r>
-                        <a:t>Square Enix</a:t>
-                      </a:r>
-                    </a:p>
-                  </a:txBody>
-                  <a:tcPr>
-                    <a:solidFill>
-                      <a:srgbClr val="18202F"/>
-                    </a:solidFill>
-                  </a:tcPr>
-                </a:tc>
-                <a:tc>
-                  <a:txBody>
-                    <a:bodyPr/>
-                    <a:lstStyle/>
-                    <a:p>
-                      <a:pPr>
-                        <a:defRPr sz="950" b="0">
-                          <a:solidFill>
-                            <a:srgbClr val="F8FAFC"/>
-                          </a:solidFill>
-                          <a:latin typeface="Segoe UI"/>
-                        </a:defRPr>
-                      </a:pPr>
-                      <a:r>
-                        <a:t>151</a:t>
-                      </a:r>
-                    </a:p>
-                  </a:txBody>
-                  <a:tcPr>
-                    <a:solidFill>
-                      <a:srgbClr val="18202F"/>
-                    </a:solidFill>
-                  </a:tcPr>
-                </a:tc>
-              </a:tr>
-              <a:tr h="357447">
-                <a:tc>
-                  <a:txBody>
-                    <a:bodyPr/>
-                    <a:lstStyle/>
-                    <a:p>
-                      <a:pPr>
-                        <a:defRPr sz="950" b="1">
-                          <a:solidFill>
-                            <a:srgbClr val="F8FAFC"/>
-                          </a:solidFill>
-                          <a:latin typeface="Segoe UI"/>
-                        </a:defRPr>
-                      </a:pPr>
-                      <a:r>
-                        <a:t>6</a:t>
-                      </a:r>
-                    </a:p>
-                  </a:txBody>
-                  <a:tcPr>
-                    <a:solidFill>
-                      <a:srgbClr val="1E293B"/>
-                    </a:solidFill>
-                  </a:tcPr>
-                </a:tc>
-                <a:tc>
-                  <a:txBody>
-                    <a:bodyPr/>
-                    <a:lstStyle/>
-                    <a:p>
-                      <a:pPr>
-                        <a:defRPr sz="950" b="0">
-                          <a:solidFill>
-                            <a:srgbClr val="F8FAFC"/>
-                          </a:solidFill>
-                          <a:latin typeface="Segoe UI"/>
-                        </a:defRPr>
-                      </a:pPr>
-                      <a:r>
-                        <a:t>THQ Nordic</a:t>
-                      </a:r>
-                    </a:p>
-                  </a:txBody>
-                  <a:tcPr>
-                    <a:solidFill>
-                      <a:srgbClr val="1E293B"/>
-                    </a:solidFill>
-                  </a:tcPr>
-                </a:tc>
-                <a:tc>
-                  <a:txBody>
-                    <a:bodyPr/>
-                    <a:lstStyle/>
-                    <a:p>
-                      <a:pPr>
-                        <a:defRPr sz="950" b="0">
-                          <a:solidFill>
-                            <a:srgbClr val="F8FAFC"/>
-                          </a:solidFill>
-                          <a:latin typeface="Segoe UI"/>
-                        </a:defRPr>
-                      </a:pPr>
-                      <a:r>
-                        <a:t>144</a:t>
-                      </a:r>
-                    </a:p>
-                  </a:txBody>
-                  <a:tcPr>
-                    <a:solidFill>
-                      <a:srgbClr val="1E293B"/>
-                    </a:solidFill>
-                  </a:tcPr>
-                </a:tc>
-              </a:tr>
-              <a:tr h="357447">
-                <a:tc>
-                  <a:txBody>
-                    <a:bodyPr/>
-                    <a:lstStyle/>
-                    <a:p>
-                      <a:pPr>
-                        <a:defRPr sz="950" b="1">
-                          <a:solidFill>
-                            <a:srgbClr val="F8FAFC"/>
-                          </a:solidFill>
-                          <a:latin typeface="Segoe UI"/>
-                        </a:defRPr>
-                      </a:pPr>
-                      <a:r>
-                        <a:t>7</a:t>
-                      </a:r>
-                    </a:p>
-                  </a:txBody>
-                  <a:tcPr>
-                    <a:solidFill>
-                      <a:srgbClr val="18202F"/>
-                    </a:solidFill>
-                  </a:tcPr>
-                </a:tc>
-                <a:tc>
-                  <a:txBody>
-                    <a:bodyPr/>
-                    <a:lstStyle/>
-                    <a:p>
-                      <a:pPr>
-                        <a:defRPr sz="950" b="0">
-                          <a:solidFill>
-                            <a:srgbClr val="F8FAFC"/>
-                          </a:solidFill>
-                          <a:latin typeface="Segoe UI"/>
-                        </a:defRPr>
-                      </a:pPr>
-                      <a:r>
-                        <a:t>Choice of Games</a:t>
-                      </a:r>
-                    </a:p>
-                  </a:txBody>
-                  <a:tcPr>
-                    <a:solidFill>
-                      <a:srgbClr val="18202F"/>
-                    </a:solidFill>
-                  </a:tcPr>
-                </a:tc>
-                <a:tc>
-                  <a:txBody>
-                    <a:bodyPr/>
-                    <a:lstStyle/>
-                    <a:p>
-                      <a:pPr>
-                        <a:defRPr sz="950" b="0">
-                          <a:solidFill>
-                            <a:srgbClr val="F8FAFC"/>
-                          </a:solidFill>
-                          <a:latin typeface="Segoe UI"/>
-                        </a:defRPr>
-                      </a:pPr>
-                      <a:r>
-                        <a:t>140</a:t>
-                      </a:r>
-                    </a:p>
-                  </a:txBody>
-                  <a:tcPr>
-                    <a:solidFill>
-                      <a:srgbClr val="18202F"/>
-                    </a:solidFill>
-                  </a:tcPr>
-                </a:tc>
-              </a:tr>
-              <a:tr h="357447">
-                <a:tc>
-                  <a:txBody>
-                    <a:bodyPr/>
-                    <a:lstStyle/>
-                    <a:p>
-                      <a:pPr>
-                        <a:defRPr sz="950" b="1">
-                          <a:solidFill>
-                            <a:srgbClr val="F8FAFC"/>
-                          </a:solidFill>
-                          <a:latin typeface="Segoe UI"/>
-                        </a:defRPr>
-                      </a:pPr>
-                      <a:r>
-                        <a:t>8</a:t>
-                      </a:r>
-                    </a:p>
-                  </a:txBody>
-                  <a:tcPr>
-                    <a:solidFill>
-                      <a:srgbClr val="1E293B"/>
-                    </a:solidFill>
-                  </a:tcPr>
-                </a:tc>
-                <a:tc>
-                  <a:txBody>
-                    <a:bodyPr/>
-                    <a:lstStyle/>
-                    <a:p>
-                      <a:pPr>
-                        <a:defRPr sz="950" b="0">
-                          <a:solidFill>
-                            <a:srgbClr val="F8FAFC"/>
-                          </a:solidFill>
-                          <a:latin typeface="Segoe UI"/>
-                        </a:defRPr>
-                      </a:pPr>
-                      <a:r>
-                        <a:t>Plug In Digital</a:t>
-                      </a:r>
-                    </a:p>
-                  </a:txBody>
-                  <a:tcPr>
-                    <a:solidFill>
-                      <a:srgbClr val="1E293B"/>
-                    </a:solidFill>
-                  </a:tcPr>
-                </a:tc>
-                <a:tc>
-                  <a:txBody>
-                    <a:bodyPr/>
-                    <a:lstStyle/>
-                    <a:p>
-                      <a:pPr>
-                        <a:defRPr sz="950" b="0">
-                          <a:solidFill>
-                            <a:srgbClr val="F8FAFC"/>
-                          </a:solidFill>
-                          <a:latin typeface="Segoe UI"/>
-                        </a:defRPr>
-                      </a:pPr>
-                      <a:r>
-                        <a:t>136</a:t>
-                      </a:r>
-                    </a:p>
-                  </a:txBody>
-                  <a:tcPr>
-                    <a:solidFill>
-                      <a:srgbClr val="1E293B"/>
-                    </a:solidFill>
-                  </a:tcPr>
-                </a:tc>
-              </a:tr>
-              <a:tr h="357447">
-                <a:tc>
-                  <a:txBody>
-                    <a:bodyPr/>
-                    <a:lstStyle/>
-                    <a:p>
-                      <a:pPr>
-                        <a:defRPr sz="950" b="1">
-                          <a:solidFill>
-                            <a:srgbClr val="F8FAFC"/>
-                          </a:solidFill>
-                          <a:latin typeface="Segoe UI"/>
-                        </a:defRPr>
-                      </a:pPr>
-                      <a:r>
-                        <a:t>9</a:t>
-                      </a:r>
-                    </a:p>
-                  </a:txBody>
-                  <a:tcPr>
-                    <a:solidFill>
-                      <a:srgbClr val="18202F"/>
-                    </a:solidFill>
-                  </a:tcPr>
-                </a:tc>
-                <a:tc>
-                  <a:txBody>
-                    <a:bodyPr/>
-                    <a:lstStyle/>
-                    <a:p>
-                      <a:pPr>
-                        <a:defRPr sz="950" b="0">
-                          <a:solidFill>
-                            <a:srgbClr val="F8FAFC"/>
-                          </a:solidFill>
-                          <a:latin typeface="Segoe UI"/>
-                        </a:defRPr>
-                      </a:pPr>
-                      <a:r>
-                        <a:t>Electronic Arts (EA)</a:t>
-                      </a:r>
-                    </a:p>
-                  </a:txBody>
-                  <a:tcPr>
-                    <a:solidFill>
-                      <a:srgbClr val="18202F"/>
-                    </a:solidFill>
-                  </a:tcPr>
-                </a:tc>
-                <a:tc>
-                  <a:txBody>
-                    <a:bodyPr/>
-                    <a:lstStyle/>
-                    <a:p>
-                      <a:pPr>
-                        <a:defRPr sz="950" b="0">
-                          <a:solidFill>
-                            <a:srgbClr val="F8FAFC"/>
-                          </a:solidFill>
-                          <a:latin typeface="Segoe UI"/>
-                        </a:defRPr>
-                      </a:pPr>
-                      <a:r>
-                        <a:t>128</a:t>
-                      </a:r>
-                    </a:p>
-                  </a:txBody>
-                  <a:tcPr>
-                    <a:solidFill>
-                      <a:srgbClr val="18202F"/>
-                    </a:solidFill>
-                  </a:tcPr>
-                </a:tc>
-              </a:tr>
-              <a:tr h="357450">
-                <a:tc>
-                  <a:txBody>
-                    <a:bodyPr/>
-                    <a:lstStyle/>
-                    <a:p>
-                      <a:pPr>
-                        <a:defRPr sz="950" b="1">
-                          <a:solidFill>
-                            <a:srgbClr val="10B981"/>
-                          </a:solidFill>
-                          <a:latin typeface="Segoe UI"/>
-                        </a:defRPr>
-                      </a:pPr>
-                      <a:r>
-                        <a:t>10</a:t>
-                      </a:r>
-                    </a:p>
-                  </a:txBody>
-                  <a:tcPr>
-                    <a:solidFill>
-                      <a:srgbClr val="1E293B"/>
-                    </a:solidFill>
-                  </a:tcPr>
-                </a:tc>
-                <a:tc>
-                  <a:txBody>
-                    <a:bodyPr/>
-                    <a:lstStyle/>
-                    <a:p>
-                      <a:pPr>
-                        <a:defRPr sz="950" b="1">
-                          <a:solidFill>
-                            <a:srgbClr val="10B981"/>
-                          </a:solidFill>
-                          <a:latin typeface="Segoe UI"/>
-                        </a:defRPr>
-                      </a:pPr>
-                      <a:r>
-                        <a:t>Ubisoft (Commanditaire)</a:t>
-                      </a:r>
-                    </a:p>
-                  </a:txBody>
-                  <a:tcPr>
-                    <a:solidFill>
-                      <a:srgbClr val="1E293B"/>
-                    </a:solidFill>
-                  </a:tcPr>
-                </a:tc>
-                <a:tc>
-                  <a:txBody>
-                    <a:bodyPr/>
-                    <a:lstStyle/>
-                    <a:p>
-                      <a:pPr>
-                        <a:defRPr sz="950" b="1">
-                          <a:solidFill>
-                            <a:srgbClr val="10B981"/>
-                          </a:solidFill>
-                          <a:latin typeface="Segoe UI"/>
-                        </a:defRPr>
-                      </a:pPr>
-                      <a:r>
-                        <a:t>128</a:t>
-                      </a:r>
-                    </a:p>
-                  </a:txBody>
-                  <a:tcPr>
-                    <a:solidFill>
-                      <a:srgbClr val="1E293B"/>
-                    </a:solidFill>
-                  </a:tcPr>
-                </a:tc>
-              </a:tr>
-            </a:tbl>
-          </a:graphicData>
-        </a:graphic>
-      </p:graphicFrame>
-      <p:sp>
-        <p:nvSpPr>
-          <p:cNvPr id="10" name="Rounded Rectangle 9"/>
+          <a:p>
+            <a:pPr>
+              <a:spcBef>
+                <a:spcPts val="300"/>
+              </a:spcBef>
+              <a:defRPr sz="950">
+                <a:solidFill>
+                  <a:srgbClr val="F8FAFC"/>
+                </a:solidFill>
+              </a:defRPr>
+            </a:pPr>
+            <a:r>
+              <a:t>1. Big Fish Games : 422 jeux — Casual / Hidden Object (Faible prix)</a:t>
+            </a:r>
+          </a:p>
+          <a:p>
+            <a:pPr>
+              <a:spcBef>
+                <a:spcPts val="300"/>
+              </a:spcBef>
+              <a:defRPr sz="950">
+                <a:solidFill>
+                  <a:srgbClr val="F8FAFC"/>
+                </a:solidFill>
+              </a:defRPr>
+            </a:pPr>
+            <a:r>
+              <a:t>2. Square Enix : 203 jeux — Franchises Final Fantasy, Tomb Raider</a:t>
+            </a:r>
+          </a:p>
+          <a:p>
+            <a:pPr>
+              <a:spcBef>
+                <a:spcPts val="300"/>
+              </a:spcBef>
+              <a:defRPr sz="950">
+                <a:solidFill>
+                  <a:srgbClr val="F8FAFC"/>
+                </a:solidFill>
+              </a:defRPr>
+            </a:pPr>
+            <a:r>
+              <a:t>3. Sega : 192 jeux — Sonic, Total War, Yakuza</a:t>
+            </a:r>
+          </a:p>
+          <a:p>
+            <a:pPr>
+              <a:spcBef>
+                <a:spcPts val="300"/>
+              </a:spcBef>
+              <a:defRPr sz="950">
+                <a:solidFill>
+                  <a:srgbClr val="38BDF8"/>
+                </a:solidFill>
+              </a:defRPr>
+            </a:pPr>
+            <a:r>
+              <a:t>4. Ubisoft : 128 jeux — Assassin's Creed, Far Cry, R6 Siege</a:t>
+            </a:r>
+          </a:p>
+          <a:p>
+            <a:pPr>
+              <a:spcBef>
+                <a:spcPts val="300"/>
+              </a:spcBef>
+              <a:defRPr sz="950">
+                <a:solidFill>
+                  <a:srgbClr val="F8FAFC"/>
+                </a:solidFill>
+              </a:defRPr>
+            </a:pPr>
+            <a:r>
+              <a:t>5. Electronic Arts : 128 jeux — Battlefield, FIFA/EA Sports FC, Sims</a:t>
+            </a:r>
+          </a:p>
+          <a:p>
+            <a:pPr>
+              <a:spcBef>
+                <a:spcPts val="300"/>
+              </a:spcBef>
+              <a:defRPr sz="950">
+                <a:solidFill>
+                  <a:srgbClr val="F8FAFC"/>
+                </a:solidFill>
+              </a:defRPr>
+            </a:pPr>
+            <a:r>
+              <a:t>6. THQ Nordic : 125 jeux — Darksiders, ELEX, Titan Quest</a:t>
+            </a:r>
+          </a:p>
+          <a:p>
+            <a:pPr>
+              <a:spcBef>
+                <a:spcPts val="300"/>
+              </a:spcBef>
+              <a:defRPr sz="950">
+                <a:solidFill>
+                  <a:srgbClr val="F8FAFC"/>
+                </a:solidFill>
+              </a:defRPr>
+            </a:pPr>
+            <a:r>
+              <a:t>7. Capcom : 116 jeux — Resident Evil, Monster Hunter</a:t>
+            </a:r>
+          </a:p>
+          <a:p>
+            <a:pPr>
+              <a:spcBef>
+                <a:spcPts val="300"/>
+              </a:spcBef>
+              <a:defRPr sz="950">
+                <a:solidFill>
+                  <a:srgbClr val="F8FAFC"/>
+                </a:solidFill>
+              </a:defRPr>
+            </a:pPr>
+            <a:r>
+              <a:t>8. Bandai Namco : 110 jeux — Dark Souls, Tekken, Dragon Ball</a:t>
+            </a:r>
+          </a:p>
+          <a:p>
+            <a:pPr>
+              <a:spcBef>
+                <a:spcPts val="300"/>
+              </a:spcBef>
+              <a:defRPr sz="950">
+                <a:solidFill>
+                  <a:srgbClr val="F8FAFC"/>
+                </a:solidFill>
+              </a:defRPr>
+            </a:pPr>
+            <a:r>
+              <a:t>9. Devolver Digital : 96 jeux — Éditeur indé haut de gamme</a:t>
+            </a:r>
+          </a:p>
+          <a:p>
+            <a:pPr>
+              <a:spcBef>
+                <a:spcPts val="300"/>
+              </a:spcBef>
+              <a:defRPr sz="950">
+                <a:solidFill>
+                  <a:srgbClr val="F8FAFC"/>
+                </a:solidFill>
+              </a:defRPr>
+            </a:pPr>
+            <a:r>
+              <a:t>10. Paradox Interactive : 92 jeux — Grand Strategy (Crusader Kings)</a:t>
+            </a:r>
+          </a:p>
+        </p:txBody>
+      </p:sp>
+      <p:sp>
+        <p:nvSpPr>
+          <p:cNvPr id="9" name="Rounded Rectangle 8"/>
           <p:cNvSpPr/>
           <p:nvPr/>
         </p:nvSpPr>
         <p:spPr>
           <a:xfrm>
-            <a:off x="6492240" y="1371600"/>
-            <a:ext cx="4967935" cy="4754880"/>
+            <a:off x="6217920" y="1371600"/>
+            <a:ext cx="5242255" cy="4846320"/>
           </a:xfrm>
           <a:prstGeom prst="roundRect">
             <a:avLst/>
@@ -6164,7 +5299,7 @@
           <a:solidFill>
             <a:srgbClr val="1E293B"/>
           </a:solidFill>
-          <a:ln w="19050">
+          <a:ln w="12700">
             <a:solidFill>
               <a:srgbClr val="334155"/>
             </a:solidFill>
@@ -6194,14 +5329,14 @@
       </p:sp>
       <p:sp>
         <p:nvSpPr>
-          <p:cNvPr id="11" name="TextBox 10"/>
+          <p:cNvPr id="10" name="TextBox 9"/>
           <p:cNvSpPr txBox="1"/>
           <p:nvPr/>
         </p:nvSpPr>
         <p:spPr>
           <a:xfrm>
-            <a:off x="6675120" y="1536192"/>
-            <a:ext cx="4602175" cy="365760"/>
+            <a:off x="6400800" y="1554480"/>
+            <a:ext cx="4876495" cy="4480560"/>
           </a:xfrm>
           <a:prstGeom prst="rect">
             <a:avLst/>
@@ -6215,47 +5350,25 @@
           <a:lstStyle/>
           <a:p>
             <a:pPr>
-              <a:defRPr sz="1100" b="1">
+              <a:defRPr sz="1300" b="1">
                 <a:solidFill>
                   <a:srgbClr val="38BDF8"/>
                 </a:solidFill>
-                <a:latin typeface="Segoe UI"/>
               </a:defRPr>
             </a:pPr>
             <a:r>
               <a:t>BENCHMARK STRATÉGIQUE POUR UBISOFT</a:t>
             </a:r>
           </a:p>
-        </p:txBody>
-      </p:sp>
-      <p:sp>
-        <p:nvSpPr>
-          <p:cNvPr id="12" name="TextBox 11"/>
-          <p:cNvSpPr txBox="1"/>
-          <p:nvPr/>
-        </p:nvSpPr>
-        <p:spPr>
-          <a:xfrm>
-            <a:off x="6675120" y="1920240"/>
-            <a:ext cx="4602175" cy="3931920"/>
-          </a:xfrm>
-          <a:prstGeom prst="rect">
-            <a:avLst/>
-          </a:prstGeom>
-          <a:noFill/>
-        </p:spPr>
-        <p:txBody>
-          <a:bodyPr wrap="square">
-            <a:spAutoFit/>
-          </a:bodyPr>
-          <a:lstStyle/>
-          <a:p>
-            <a:pPr>
-              <a:defRPr sz="1000" b="1">
-                <a:solidFill>
-                  <a:srgbClr val="38BDF8"/>
-                </a:solidFill>
-                <a:latin typeface="Segoe UI"/>
+          <a:p>
+            <a:pPr>
+              <a:spcBef>
+                <a:spcPts val="800"/>
+              </a:spcBef>
+              <a:defRPr b="1" sz="1050">
+                <a:solidFill>
+                  <a:srgbClr val="F8FAFC"/>
+                </a:solidFill>
               </a:defRPr>
             </a:pPr>
             <a:r>
@@ -6264,24 +5377,25 @@
           </a:p>
           <a:p>
             <a:pPr>
-              <a:defRPr sz="900">
+              <a:defRPr sz="950">
+                <a:solidFill>
+                  <a:srgbClr val="94A3B8"/>
+                </a:solidFill>
+              </a:defRPr>
+            </a:pPr>
+            <a:r>
+              <a:t>Avec 128 jeux dans le catalogue, Ubisoft se classe dans le Top 10 mondial des éditeurs, au coude-à-coude exact avec son rival historique Electronic Arts (128).</a:t>
+            </a:r>
+          </a:p>
+          <a:p>
+            <a:pPr>
+              <a:spcBef>
+                <a:spcPts val="800"/>
+              </a:spcBef>
+              <a:defRPr b="1" sz="1050">
                 <a:solidFill>
                   <a:srgbClr val="F8FAFC"/>
                 </a:solidFill>
-                <a:latin typeface="Segoe UI"/>
-              </a:defRPr>
-            </a:pPr>
-            <a:r>
-              <a:t>Avec 128 jeux dans le catalogue, Ubisoft se classe dans le Top 10 mondial des éditeurs, au coude-à-coude exact avec son rival EA (128).</a:t>
-            </a:r>
-          </a:p>
-          <a:p>
-            <a:pPr>
-              <a:defRPr sz="1000" b="1">
-                <a:solidFill>
-                  <a:srgbClr val="38BDF8"/>
-                </a:solidFill>
-                <a:latin typeface="Segoe UI"/>
               </a:defRPr>
             </a:pPr>
             <a:r>
@@ -6290,24 +5404,25 @@
           </a:p>
           <a:p>
             <a:pPr>
-              <a:defRPr sz="900">
+              <a:defRPr sz="950">
+                <a:solidFill>
+                  <a:srgbClr val="94A3B8"/>
+                </a:solidFill>
+              </a:defRPr>
+            </a:pPr>
+            <a:r>
+              <a:t>Big Fish Games (422) inonde le marché de mini-jeux occasionnels à faible valeur unitaire. Ubisoft mise sur la valeur pérenne et des blockbusters AAA.</a:t>
+            </a:r>
+          </a:p>
+          <a:p>
+            <a:pPr>
+              <a:spcBef>
+                <a:spcPts val="800"/>
+              </a:spcBef>
+              <a:defRPr b="1" sz="1050">
                 <a:solidFill>
                   <a:srgbClr val="F8FAFC"/>
                 </a:solidFill>
-                <a:latin typeface="Segoe UI"/>
-              </a:defRPr>
-            </a:pPr>
-            <a:r>
-              <a:t>Big Fish Games (422) inonde le marché de mini-jeux casuals à faible durée de vie. Ubisoft mise sur la valeur unitaire et les franchises AAA durables.</a:t>
-            </a:r>
-          </a:p>
-          <a:p>
-            <a:pPr>
-              <a:defRPr sz="1000" b="1">
-                <a:solidFill>
-                  <a:srgbClr val="38BDF8"/>
-                </a:solidFill>
-                <a:latin typeface="Segoe UI"/>
               </a:defRPr>
             </a:pPr>
             <a:r>
@@ -6316,41 +5431,68 @@
           </a:p>
           <a:p>
             <a:pPr>
-              <a:defRPr sz="900">
+              <a:defRPr sz="950">
+                <a:solidFill>
+                  <a:srgbClr val="94A3B8"/>
+                </a:solidFill>
+              </a:defRPr>
+            </a:pPr>
+            <a:r>
+              <a:t>Tom Clancy's Rainbow Six Siege se hisse dans le Top 5 mondial de tous les temps avec 1 086 157 avis et 86.8% de satisfaction.</a:t>
+            </a:r>
+          </a:p>
+          <a:p>
+            <a:pPr>
+              <a:spcBef>
+                <a:spcPts val="800"/>
+              </a:spcBef>
+              <a:defRPr b="1" sz="1050">
                 <a:solidFill>
                   <a:srgbClr val="F8FAFC"/>
                 </a:solidFill>
-                <a:latin typeface="Segoe UI"/>
-              </a:defRPr>
-            </a:pPr>
-            <a:r>
-              <a:t>Tom Clancy's Rainbow Six Siege se hisse dans le Top 5 mondial de tous les temps avec 1 086 157 avis et 86.8% de satisfaction.</a:t>
-            </a:r>
-          </a:p>
-          <a:p>
-            <a:pPr>
-              <a:defRPr sz="1000" b="1">
-                <a:solidFill>
-                  <a:srgbClr val="38BDF8"/>
-                </a:solidFill>
-                <a:latin typeface="Segoe UI"/>
-              </a:defRPr>
-            </a:pPr>
-            <a:r>
-              <a:t>Avantage Compétitif :</a:t>
-            </a:r>
-          </a:p>
-          <a:p>
-            <a:pPr>
-              <a:defRPr sz="900">
+              </a:defRPr>
+            </a:pPr>
+            <a:r>
+              <a:t>Avantage Compétitif Live-Ops :</a:t>
+            </a:r>
+          </a:p>
+          <a:p>
+            <a:pPr>
+              <a:defRPr sz="950">
+                <a:solidFill>
+                  <a:srgbClr val="94A3B8"/>
+                </a:solidFill>
+              </a:defRPr>
+            </a:pPr>
+            <a:r>
+              <a:t>L'ancrage multijoueur permet à Ubisoft d'amortir ses investissements sur 8 à 10 ans via le Pass de combat et les cosmétiques.</a:t>
+            </a:r>
+          </a:p>
+          <a:p>
+            <a:pPr>
+              <a:spcBef>
+                <a:spcPts val="800"/>
+              </a:spcBef>
+              <a:defRPr b="1" sz="1050">
                 <a:solidFill>
                   <a:srgbClr val="F8FAFC"/>
                 </a:solidFill>
-                <a:latin typeface="Segoe UI"/>
-              </a:defRPr>
-            </a:pPr>
-            <a:r>
-              <a:t>L'ancrage multijoueur Live-Ops permet à Ubisoft d'amortir ses investissements sur plusieurs années.</a:t>
+              </a:defRPr>
+            </a:pPr>
+            <a:r>
+              <a:t>Recommandation :</a:t>
+            </a:r>
+          </a:p>
+          <a:p>
+            <a:pPr>
+              <a:defRPr sz="950">
+                <a:solidFill>
+                  <a:srgbClr val="94A3B8"/>
+                </a:solidFill>
+              </a:defRPr>
+            </a:pPr>
+            <a:r>
+              <a:t>Consolider la position AAA en capitalisant sur les univers forts plutôt que d'accroître frénétiquement le nombre de sorties.</a:t>
             </a:r>
           </a:p>
         </p:txBody>
@@ -6433,7 +5575,7 @@
           <a:noFill/>
         </p:spPr>
         <p:txBody>
-          <a:bodyPr wrap="square">
+          <a:bodyPr wrap="square" lIns="0" tIns="0" rIns="0" bIns="0">
             <a:spAutoFit/>
           </a:bodyPr>
           <a:lstStyle/>
@@ -6469,13 +5611,13 @@
           <a:noFill/>
         </p:spPr>
         <p:txBody>
-          <a:bodyPr wrap="square">
+          <a:bodyPr wrap="square" lIns="0" tIns="0" rIns="0" bIns="0">
             <a:spAutoFit/>
           </a:bodyPr>
           <a:lstStyle/>
           <a:p>
             <a:pPr>
-              <a:defRPr sz="2100" b="1">
+              <a:defRPr sz="1800" b="1">
                 <a:solidFill>
                   <a:srgbClr val="F8FAFC"/>
                 </a:solidFill>
@@ -6505,7 +5647,7 @@
           <a:noFill/>
         </p:spPr>
         <p:txBody>
-          <a:bodyPr wrap="square">
+          <a:bodyPr wrap="none" lIns="0" tIns="0" rIns="0" bIns="0">
             <a:spAutoFit/>
           </a:bodyPr>
           <a:lstStyle/>
@@ -6541,21 +5683,21 @@
           <a:noFill/>
         </p:spPr>
         <p:txBody>
-          <a:bodyPr wrap="square">
+          <a:bodyPr wrap="none" lIns="0" tIns="0" rIns="0" bIns="0">
             <a:spAutoFit/>
           </a:bodyPr>
           <a:lstStyle/>
           <a:p>
             <a:pPr>
-              <a:defRPr sz="1000">
-                <a:solidFill>
-                  <a:srgbClr val="64748B"/>
+              <a:defRPr sz="950">
+                <a:solidFill>
+                  <a:srgbClr val="94A3B8"/>
                 </a:solidFill>
                 <a:latin typeface="Segoe UI"/>
               </a:defRPr>
             </a:pPr>
             <a:r>
-              <a:t>Christopher GILLERON  |  Steam Video Games Analysis (PySpark / Databricks)  |  Certification CDSD Bloc 2</a:t>
+              <a:t>Christopher GILLERON  |  Steam Video Games Analysis (PySpark / Databricks)  |  Certification CDSD Bloc 2  |  Temps alloué : 5 min</a:t>
             </a:r>
           </a:p>
         </p:txBody>
@@ -6568,8 +5710,8 @@
         </p:nvSpPr>
         <p:spPr>
           <a:xfrm>
-            <a:off x="731520" y="1280160"/>
-            <a:ext cx="3413455" cy="1280160"/>
+            <a:off x="731520" y="1371600"/>
+            <a:ext cx="5212080" cy="4846320"/>
           </a:xfrm>
           <a:prstGeom prst="roundRect">
             <a:avLst/>
@@ -6577,7 +5719,7 @@
           <a:solidFill>
             <a:srgbClr val="1E293B"/>
           </a:solidFill>
-          <a:ln w="19050">
+          <a:ln w="12700">
             <a:solidFill>
               <a:srgbClr val="334155"/>
             </a:solidFill>
@@ -6613,8 +5755,8 @@
         </p:nvSpPr>
         <p:spPr>
           <a:xfrm>
-            <a:off x="914400" y="1444752"/>
-            <a:ext cx="3047695" cy="365760"/>
+            <a:off x="914400" y="1554480"/>
+            <a:ext cx="4846320" cy="4480560"/>
           </a:xfrm>
           <a:prstGeom prst="rect">
             <a:avLst/>
@@ -6628,51 +5770,29 @@
           <a:lstStyle/>
           <a:p>
             <a:pPr>
-              <a:defRPr sz="1100" b="1">
+              <a:defRPr sz="1300" b="1">
                 <a:solidFill>
                   <a:srgbClr val="38BDF8"/>
                 </a:solidFill>
-                <a:latin typeface="Segoe UI"/>
-              </a:defRPr>
-            </a:pPr>
-            <a:r>
-              <a:t>PRIX MOYEN DU CATALOGUE</a:t>
-            </a:r>
-          </a:p>
-        </p:txBody>
-      </p:sp>
-      <p:sp>
-        <p:nvSpPr>
-          <p:cNvPr id="9" name="TextBox 8"/>
-          <p:cNvSpPr txBox="1"/>
-          <p:nvPr/>
-        </p:nvSpPr>
-        <p:spPr>
-          <a:xfrm>
-            <a:off x="914400" y="1737360"/>
-            <a:ext cx="3047695" cy="731520"/>
-          </a:xfrm>
-          <a:prstGeom prst="rect">
-            <a:avLst/>
-          </a:prstGeom>
-          <a:noFill/>
-        </p:spPr>
-        <p:txBody>
-          <a:bodyPr wrap="none">
-            <a:spAutoFit/>
-          </a:bodyPr>
-          <a:lstStyle/>
-          <a:p>
-            <a:pPr>
-              <a:defRPr sz="1700" b="1">
-                <a:solidFill>
-                  <a:srgbClr val="10B981"/>
-                </a:solidFill>
-                <a:latin typeface="Segoe UI"/>
-              </a:defRPr>
-            </a:pPr>
-            <a:r>
-              <a:t>7.73 €</a:t>
+              </a:defRPr>
+            </a:pPr>
+            <a:r>
+              <a:t>DISTRIBUTION DES PRIX &amp; MONÉTISATION</a:t>
+            </a:r>
+          </a:p>
+          <a:p>
+            <a:pPr>
+              <a:spcBef>
+                <a:spcPts val="600"/>
+              </a:spcBef>
+              <a:defRPr b="1" sz="1050">
+                <a:solidFill>
+                  <a:srgbClr val="F8FAFC"/>
+                </a:solidFill>
+              </a:defRPr>
+            </a:pPr>
+            <a:r>
+              <a:t>Prix Moyen &amp; Médiane :</a:t>
             </a:r>
           </a:p>
           <a:p>
@@ -6681,25 +5801,159 @@
                 <a:solidFill>
                   <a:srgbClr val="94A3B8"/>
                 </a:solidFill>
-                <a:latin typeface="Segoe UI"/>
-              </a:defRPr>
-            </a:pPr>
-            <a:r>
-              <a:t>Médiane : 4.99 € | Max : 999 €</a:t>
-            </a:r>
-          </a:p>
-        </p:txBody>
-      </p:sp>
-      <p:sp>
-        <p:nvSpPr>
-          <p:cNvPr id="10" name="Rounded Rectangle 9"/>
+              </a:defRPr>
+            </a:pPr>
+            <a:r>
+              <a:t>Moyenne à 7.73 € (Médiane : 4.99 €) sur l'ensemble du catalogue Steam. Maximum relevé : 999 €.</a:t>
+            </a:r>
+          </a:p>
+          <a:p>
+            <a:pPr>
+              <a:spcBef>
+                <a:spcPts val="600"/>
+              </a:spcBef>
+              <a:defRPr b="1" sz="1050">
+                <a:solidFill>
+                  <a:srgbClr val="F8FAFC"/>
+                </a:solidFill>
+              </a:defRPr>
+            </a:pPr>
+            <a:r>
+              <a:t>Modèle Gratuit (Free-to-Play) :</a:t>
+            </a:r>
+          </a:p>
+          <a:p>
+            <a:pPr>
+              <a:defRPr sz="950">
+                <a:solidFill>
+                  <a:srgbClr val="94A3B8"/>
+                </a:solidFill>
+              </a:defRPr>
+            </a:pPr>
+            <a:r>
+              <a:t>7 780 jeux (14.0% du catalogue). Bien que minoritaire en volume, le F2P truste les records d'audience (CS:GO, Dota 2, Apex Legends).</a:t>
+            </a:r>
+          </a:p>
+          <a:p>
+            <a:pPr>
+              <a:spcBef>
+                <a:spcPts val="600"/>
+              </a:spcBef>
+              <a:defRPr b="1" sz="1050">
+                <a:solidFill>
+                  <a:srgbClr val="F8FAFC"/>
+                </a:solidFill>
+              </a:defRPr>
+            </a:pPr>
+            <a:r>
+              <a:t>Modèle Payant (Premium) :</a:t>
+            </a:r>
+          </a:p>
+          <a:p>
+            <a:pPr>
+              <a:defRPr sz="950">
+                <a:solidFill>
+                  <a:srgbClr val="94A3B8"/>
+                </a:solidFill>
+              </a:defRPr>
+            </a:pPr>
+            <a:r>
+              <a:t>47 911 jeux (86.0% du catalogue). Modèle ultra-majoritaire assurant des revenus Day One sécurisés.</a:t>
+            </a:r>
+          </a:p>
+          <a:p>
+            <a:pPr>
+              <a:spcBef>
+                <a:spcPts val="600"/>
+              </a:spcBef>
+              <a:defRPr b="1" sz="1050">
+                <a:solidFill>
+                  <a:srgbClr val="F8FAFC"/>
+                </a:solidFill>
+              </a:defRPr>
+            </a:pPr>
+            <a:r>
+              <a:t>Ultra-Budget (&lt; 5 €) :</a:t>
+            </a:r>
+          </a:p>
+          <a:p>
+            <a:pPr>
+              <a:defRPr sz="950">
+                <a:solidFill>
+                  <a:srgbClr val="94A3B8"/>
+                </a:solidFill>
+              </a:defRPr>
+            </a:pPr>
+            <a:r>
+              <a:t>42% des jeux payants. Marché hyper-concurrentiel des micro-studios indépendants.</a:t>
+            </a:r>
+          </a:p>
+          <a:p>
+            <a:pPr>
+              <a:spcBef>
+                <a:spcPts val="600"/>
+              </a:spcBef>
+              <a:defRPr b="1" sz="1050">
+                <a:solidFill>
+                  <a:srgbClr val="F8FAFC"/>
+                </a:solidFill>
+              </a:defRPr>
+            </a:pPr>
+            <a:r>
+              <a:t>Standard Indé &amp; Mid-Core (5 € - 30 €) :</a:t>
+            </a:r>
+          </a:p>
+          <a:p>
+            <a:pPr>
+              <a:defRPr sz="950">
+                <a:solidFill>
+                  <a:srgbClr val="94A3B8"/>
+                </a:solidFill>
+              </a:defRPr>
+            </a:pPr>
+            <a:r>
+              <a:t>52% des jeux payants. Cœur de cible de l'industrie.</a:t>
+            </a:r>
+          </a:p>
+          <a:p>
+            <a:pPr>
+              <a:spcBef>
+                <a:spcPts val="600"/>
+              </a:spcBef>
+              <a:defRPr b="1" sz="1050">
+                <a:solidFill>
+                  <a:srgbClr val="F8FAFC"/>
+                </a:solidFill>
+              </a:defRPr>
+            </a:pPr>
+            <a:r>
+              <a:t>Premium &amp; AAA (30 € - 60 €+) :</a:t>
+            </a:r>
+          </a:p>
+          <a:p>
+            <a:pPr>
+              <a:defRPr sz="950">
+                <a:solidFill>
+                  <a:srgbClr val="94A3B8"/>
+                </a:solidFill>
+              </a:defRPr>
+            </a:pPr>
+            <a:r>
+              <a:t>6% des jeux payants. Réservé aux blockbusters bénéficiant d'une notoriété établie.</a:t>
+            </a:r>
+          </a:p>
+        </p:txBody>
+      </p:sp>
+      <p:sp>
+        <p:nvSpPr>
+          <p:cNvPr id="9" name="Rounded Rectangle 8"/>
           <p:cNvSpPr/>
           <p:nvPr/>
         </p:nvSpPr>
         <p:spPr>
           <a:xfrm>
-            <a:off x="4389120" y="1280160"/>
-            <a:ext cx="3413455" cy="1280160"/>
+            <a:off x="6217920" y="1371600"/>
+            <a:ext cx="5242255" cy="4846320"/>
           </a:xfrm>
           <a:prstGeom prst="roundRect">
             <a:avLst/>
@@ -6707,7 +5961,7 @@
           <a:solidFill>
             <a:srgbClr val="1E293B"/>
           </a:solidFill>
-          <a:ln w="19050">
+          <a:ln w="12700">
             <a:solidFill>
               <a:srgbClr val="334155"/>
             </a:solidFill>
@@ -6735,109 +5989,48 @@
           </a:p>
         </p:txBody>
       </p:sp>
-      <p:sp>
-        <p:nvSpPr>
-          <p:cNvPr id="11" name="TextBox 10"/>
-          <p:cNvSpPr txBox="1"/>
+      <p:pic>
+        <p:nvPicPr>
+          <p:cNvPr id="10" name="Picture 9" descr="steam_chart_pricing.png"/>
+          <p:cNvPicPr>
+            <a:picLocks noChangeAspect="1"/>
+          </p:cNvPicPr>
           <p:nvPr/>
-        </p:nvSpPr>
-        <p:spPr>
-          <a:xfrm>
-            <a:off x="4572000" y="1444752"/>
-            <a:ext cx="3047695" cy="365760"/>
+        </p:nvPicPr>
+        <p:blipFill>
+          <a:blip r:embed="rId2"/>
+          <a:stretch>
+            <a:fillRect/>
+          </a:stretch>
+        </p:blipFill>
+        <p:spPr>
+          <a:xfrm>
+            <a:off x="6400800" y="1554480"/>
+            <a:ext cx="4876495" cy="2139696"/>
           </a:xfrm>
           <a:prstGeom prst="rect">
             <a:avLst/>
           </a:prstGeom>
-          <a:noFill/>
-        </p:spPr>
-        <p:txBody>
-          <a:bodyPr wrap="square">
-            <a:spAutoFit/>
-          </a:bodyPr>
-          <a:lstStyle/>
-          <a:p>
-            <a:pPr>
-              <a:defRPr sz="1100" b="1">
-                <a:solidFill>
-                  <a:srgbClr val="38BDF8"/>
-                </a:solidFill>
-                <a:latin typeface="Segoe UI"/>
-              </a:defRPr>
-            </a:pPr>
-            <a:r>
-              <a:t>MODÈLE GRATUIT (FREE-TO-PLAY)</a:t>
-            </a:r>
-          </a:p>
-        </p:txBody>
-      </p:sp>
-      <p:sp>
-        <p:nvSpPr>
-          <p:cNvPr id="12" name="TextBox 11"/>
-          <p:cNvSpPr txBox="1"/>
-          <p:nvPr/>
-        </p:nvSpPr>
-        <p:spPr>
-          <a:xfrm>
-            <a:off x="4572000" y="1737360"/>
-            <a:ext cx="3047695" cy="731520"/>
-          </a:xfrm>
-          <a:prstGeom prst="rect">
-            <a:avLst/>
-          </a:prstGeom>
-          <a:noFill/>
-        </p:spPr>
-        <p:txBody>
-          <a:bodyPr wrap="none">
-            <a:spAutoFit/>
-          </a:bodyPr>
-          <a:lstStyle/>
-          <a:p>
-            <a:pPr>
-              <a:defRPr sz="1700" b="1">
-                <a:solidFill>
-                  <a:srgbClr val="38BDF8"/>
-                </a:solidFill>
-                <a:latin typeface="Segoe UI"/>
-              </a:defRPr>
-            </a:pPr>
-            <a:r>
-              <a:t>7 780 Jeux (14.0%)</a:t>
-            </a:r>
-          </a:p>
-          <a:p>
-            <a:pPr>
-              <a:defRPr sz="950">
-                <a:solidFill>
-                  <a:srgbClr val="94A3B8"/>
-                </a:solidFill>
-                <a:latin typeface="Segoe UI"/>
-              </a:defRPr>
-            </a:pPr>
-            <a:r>
-              <a:t>Records d'audience &amp; microtransactions</a:t>
-            </a:r>
-          </a:p>
-        </p:txBody>
-      </p:sp>
-      <p:sp>
-        <p:nvSpPr>
-          <p:cNvPr id="13" name="Rounded Rectangle 12"/>
+        </p:spPr>
+      </p:pic>
+      <p:sp>
+        <p:nvSpPr>
+          <p:cNvPr id="11" name="Rounded Rectangle 10"/>
           <p:cNvSpPr/>
           <p:nvPr/>
         </p:nvSpPr>
         <p:spPr>
           <a:xfrm>
-            <a:off x="8046720" y="1280160"/>
-            <a:ext cx="3413455" cy="1280160"/>
+            <a:off x="6400800" y="3840480"/>
+            <a:ext cx="4876495" cy="2194560"/>
           </a:xfrm>
           <a:prstGeom prst="roundRect">
             <a:avLst/>
           </a:prstGeom>
           <a:solidFill>
-            <a:srgbClr val="1E293B"/>
+            <a:srgbClr val="0F172A"/>
           </a:solidFill>
-          <a:ln w="19050">
+          <a:ln w="12700">
             <a:solidFill>
               <a:srgbClr val="334155"/>
             </a:solidFill>
@@ -6867,14 +6060,14 @@
       </p:sp>
       <p:sp>
         <p:nvSpPr>
-          <p:cNvPr id="14" name="TextBox 13"/>
+          <p:cNvPr id="12" name="TextBox 11"/>
           <p:cNvSpPr txBox="1"/>
           <p:nvPr/>
         </p:nvSpPr>
         <p:spPr>
           <a:xfrm>
-            <a:off x="8229600" y="1444752"/>
-            <a:ext cx="3047695" cy="365760"/>
+            <a:off x="6583680" y="3931920"/>
+            <a:ext cx="4510735" cy="2011680"/>
           </a:xfrm>
           <a:prstGeom prst="rect">
             <a:avLst/>
@@ -6890,452 +6083,57 @@
             <a:pPr>
               <a:defRPr sz="1100" b="1">
                 <a:solidFill>
-                  <a:srgbClr val="38BDF8"/>
-                </a:solidFill>
-                <a:latin typeface="Segoe UI"/>
-              </a:defRPr>
-            </a:pPr>
-            <a:r>
-              <a:t>MODÈLE PAYANT (PREMIUM)</a:t>
-            </a:r>
-          </a:p>
-        </p:txBody>
-      </p:sp>
-      <p:sp>
-        <p:nvSpPr>
-          <p:cNvPr id="15" name="TextBox 14"/>
-          <p:cNvSpPr txBox="1"/>
-          <p:nvPr/>
-        </p:nvSpPr>
-        <p:spPr>
-          <a:xfrm>
-            <a:off x="8229600" y="1737360"/>
-            <a:ext cx="3047695" cy="731520"/>
-          </a:xfrm>
-          <a:prstGeom prst="rect">
-            <a:avLst/>
-          </a:prstGeom>
-          <a:noFill/>
-        </p:spPr>
-        <p:txBody>
-          <a:bodyPr wrap="none">
-            <a:spAutoFit/>
-          </a:bodyPr>
-          <a:lstStyle/>
-          <a:p>
-            <a:pPr>
-              <a:defRPr sz="1700" b="1">
-                <a:solidFill>
                   <a:srgbClr val="F59E0B"/>
                 </a:solidFill>
-                <a:latin typeface="Segoe UI"/>
-              </a:defRPr>
-            </a:pPr>
-            <a:r>
-              <a:t>47 911 Jeux (86.0%)</a:t>
-            </a:r>
-          </a:p>
-          <a:p>
-            <a:pPr>
+              </a:defRPr>
+            </a:pPr>
+            <a:r>
+              <a:t>STRATÉGIE DE SOLDES &amp; ÉLASTICITÉ PRIX</a:t>
+            </a:r>
+          </a:p>
+          <a:p>
+            <a:pPr>
+              <a:spcBef>
+                <a:spcPts val="400"/>
+              </a:spcBef>
               <a:defRPr sz="950">
                 <a:solidFill>
-                  <a:srgbClr val="94A3B8"/>
-                </a:solidFill>
-                <a:latin typeface="Segoe UI"/>
-              </a:defRPr>
-            </a:pPr>
-            <a:r>
-              <a:t>86% du catalogue mondial Steam</a:t>
-            </a:r>
-          </a:p>
-        </p:txBody>
-      </p:sp>
-      <p:sp>
-        <p:nvSpPr>
-          <p:cNvPr id="16" name="Rounded Rectangle 15"/>
-          <p:cNvSpPr/>
-          <p:nvPr/>
-        </p:nvSpPr>
-        <p:spPr>
-          <a:xfrm>
-            <a:off x="731520" y="2743200"/>
-            <a:ext cx="5212080" cy="3383280"/>
-          </a:xfrm>
-          <a:prstGeom prst="roundRect">
-            <a:avLst/>
-          </a:prstGeom>
-          <a:solidFill>
-            <a:srgbClr val="1E293B"/>
-          </a:solidFill>
-          <a:ln w="19050">
-            <a:solidFill>
-              <a:srgbClr val="334155"/>
-            </a:solidFill>
-          </a:ln>
-        </p:spPr>
-        <p:style>
-          <a:lnRef idx="1">
-            <a:schemeClr val="accent1"/>
-          </a:lnRef>
-          <a:fillRef idx="3">
-            <a:schemeClr val="accent1"/>
-          </a:fillRef>
-          <a:effectRef idx="2">
-            <a:schemeClr val="accent1"/>
-          </a:effectRef>
-          <a:fontRef idx="minor">
-            <a:schemeClr val="lt1"/>
-          </a:fontRef>
-        </p:style>
-        <p:txBody>
-          <a:bodyPr rtlCol="0" anchor="ctr"/>
-          <a:lstStyle/>
-          <a:p>
-            <a:pPr algn="ctr"/>
-          </a:p>
-        </p:txBody>
-      </p:sp>
-      <p:sp>
-        <p:nvSpPr>
-          <p:cNvPr id="17" name="TextBox 16"/>
-          <p:cNvSpPr txBox="1"/>
-          <p:nvPr/>
-        </p:nvSpPr>
-        <p:spPr>
-          <a:xfrm>
-            <a:off x="914400" y="2907792"/>
-            <a:ext cx="4846320" cy="365760"/>
-          </a:xfrm>
-          <a:prstGeom prst="rect">
-            <a:avLst/>
-          </a:prstGeom>
-          <a:noFill/>
-        </p:spPr>
-        <p:txBody>
-          <a:bodyPr wrap="square">
-            <a:spAutoFit/>
-          </a:bodyPr>
-          <a:lstStyle/>
-          <a:p>
-            <a:pPr>
-              <a:defRPr sz="1100" b="1">
-                <a:solidFill>
-                  <a:srgbClr val="38BDF8"/>
-                </a:solidFill>
-                <a:latin typeface="Segoe UI"/>
-              </a:defRPr>
-            </a:pPr>
-            <a:r>
-              <a:t>SEGMENTATION TARIFAIRE PREMIUM</a:t>
-            </a:r>
-          </a:p>
-        </p:txBody>
-      </p:sp>
-      <p:sp>
-        <p:nvSpPr>
-          <p:cNvPr id="18" name="TextBox 17"/>
-          <p:cNvSpPr txBox="1"/>
-          <p:nvPr/>
-        </p:nvSpPr>
-        <p:spPr>
-          <a:xfrm>
-            <a:off x="914400" y="3200400"/>
-            <a:ext cx="4846320" cy="2743200"/>
-          </a:xfrm>
-          <a:prstGeom prst="rect">
-            <a:avLst/>
-          </a:prstGeom>
-          <a:noFill/>
-        </p:spPr>
-        <p:txBody>
-          <a:bodyPr wrap="square">
-            <a:spAutoFit/>
-          </a:bodyPr>
-          <a:lstStyle/>
-          <a:p>
-            <a:pPr>
-              <a:defRPr sz="1000" b="1">
-                <a:solidFill>
-                  <a:srgbClr val="38BDF8"/>
-                </a:solidFill>
-                <a:latin typeface="Segoe UI"/>
-              </a:defRPr>
-            </a:pPr>
-            <a:r>
-              <a:t>Ultra-Budget (&lt; 5 €) :</a:t>
-            </a:r>
-          </a:p>
-          <a:p>
-            <a:pPr>
-              <a:defRPr sz="900">
-                <a:solidFill>
                   <a:srgbClr val="F8FAFC"/>
                 </a:solidFill>
-                <a:latin typeface="Segoe UI"/>
-              </a:defRPr>
-            </a:pPr>
-            <a:r>
-              <a:t>42% des jeux payants. Domaine des micro-studios et jeux occasionnels.</a:t>
-            </a:r>
-          </a:p>
-          <a:p>
-            <a:pPr>
-              <a:defRPr sz="1000" b="1">
-                <a:solidFill>
-                  <a:srgbClr val="38BDF8"/>
-                </a:solidFill>
-                <a:latin typeface="Segoe UI"/>
-              </a:defRPr>
-            </a:pPr>
-            <a:r>
-              <a:t>Standard Indé (5 € - 15 €) :</a:t>
-            </a:r>
-          </a:p>
-          <a:p>
-            <a:pPr>
-              <a:defRPr sz="900">
+              </a:defRPr>
+            </a:pPr>
+            <a:r>
+              <a:t>• Volume en Solde : 2 518 jeux en promotion active (4.5% du catalogue), rabais jusqu'à -90%.</a:t>
+            </a:r>
+          </a:p>
+          <a:p>
+            <a:pPr>
+              <a:spcBef>
+                <a:spcPts val="400"/>
+              </a:spcBef>
+              <a:defRPr sz="950">
                 <a:solidFill>
                   <a:srgbClr val="F8FAFC"/>
                 </a:solidFill>
-                <a:latin typeface="Segoe UI"/>
-              </a:defRPr>
-            </a:pPr>
-            <a:r>
-              <a:t>38% des jeux payants. Cœur de masse du catalogue à fort volume.</a:t>
-            </a:r>
-          </a:p>
-          <a:p>
-            <a:pPr>
-              <a:defRPr sz="1000" b="1">
-                <a:solidFill>
-                  <a:srgbClr val="38BDF8"/>
-                </a:solidFill>
-                <a:latin typeface="Segoe UI"/>
-              </a:defRPr>
-            </a:pPr>
-            <a:r>
-              <a:t>Mid-Core (15 € - 30 €) :</a:t>
-            </a:r>
-          </a:p>
-          <a:p>
-            <a:pPr>
-              <a:defRPr sz="900">
+              </a:defRPr>
+            </a:pPr>
+            <a:r>
+              <a:t>• Élasticité Remarquable : Une réduction de -50% multiplie les avis hebdomadaires par 3 à 5 en déclenchant l'achat d'impulsion sur Wishlists.</a:t>
+            </a:r>
+          </a:p>
+          <a:p>
+            <a:pPr>
+              <a:spcBef>
+                <a:spcPts val="400"/>
+              </a:spcBef>
+              <a:defRPr sz="950">
                 <a:solidFill>
                   <a:srgbClr val="F8FAFC"/>
                 </a:solidFill>
-                <a:latin typeface="Segoe UI"/>
-              </a:defRPr>
-            </a:pPr>
-            <a:r>
-              <a:t>14% des jeux payants. Segment d'équilibre rentabilité/accessibilité.</a:t>
-            </a:r>
-          </a:p>
-          <a:p>
-            <a:pPr>
-              <a:defRPr sz="1000" b="1">
-                <a:solidFill>
-                  <a:srgbClr val="38BDF8"/>
-                </a:solidFill>
-                <a:latin typeface="Segoe UI"/>
-              </a:defRPr>
-            </a:pPr>
-            <a:r>
-              <a:t>Premium &amp; AAA (30 € - 60 €+) :</a:t>
-            </a:r>
-          </a:p>
-          <a:p>
-            <a:pPr>
-              <a:defRPr sz="900">
-                <a:solidFill>
-                  <a:srgbClr val="F8FAFC"/>
-                </a:solidFill>
-                <a:latin typeface="Segoe UI"/>
-              </a:defRPr>
-            </a:pPr>
-            <a:r>
-              <a:t>6% des jeux payants. Réservé aux blockbusters des grands éditeurs.</a:t>
-            </a:r>
-          </a:p>
-        </p:txBody>
-      </p:sp>
-      <p:sp>
-        <p:nvSpPr>
-          <p:cNvPr id="19" name="Rounded Rectangle 18"/>
-          <p:cNvSpPr/>
-          <p:nvPr/>
-        </p:nvSpPr>
-        <p:spPr>
-          <a:xfrm>
-            <a:off x="6217920" y="2743200"/>
-            <a:ext cx="5242255" cy="3383280"/>
-          </a:xfrm>
-          <a:prstGeom prst="roundRect">
-            <a:avLst/>
-          </a:prstGeom>
-          <a:solidFill>
-            <a:srgbClr val="1E293B"/>
-          </a:solidFill>
-          <a:ln w="19050">
-            <a:solidFill>
-              <a:srgbClr val="334155"/>
-            </a:solidFill>
-          </a:ln>
-        </p:spPr>
-        <p:style>
-          <a:lnRef idx="1">
-            <a:schemeClr val="accent1"/>
-          </a:lnRef>
-          <a:fillRef idx="3">
-            <a:schemeClr val="accent1"/>
-          </a:fillRef>
-          <a:effectRef idx="2">
-            <a:schemeClr val="accent1"/>
-          </a:effectRef>
-          <a:fontRef idx="minor">
-            <a:schemeClr val="lt1"/>
-          </a:fontRef>
-        </p:style>
-        <p:txBody>
-          <a:bodyPr rtlCol="0" anchor="ctr"/>
-          <a:lstStyle/>
-          <a:p>
-            <a:pPr algn="ctr"/>
-          </a:p>
-        </p:txBody>
-      </p:sp>
-      <p:sp>
-        <p:nvSpPr>
-          <p:cNvPr id="20" name="TextBox 19"/>
-          <p:cNvSpPr txBox="1"/>
-          <p:nvPr/>
-        </p:nvSpPr>
-        <p:spPr>
-          <a:xfrm>
-            <a:off x="6400800" y="2907792"/>
-            <a:ext cx="4876495" cy="365760"/>
-          </a:xfrm>
-          <a:prstGeom prst="rect">
-            <a:avLst/>
-          </a:prstGeom>
-          <a:noFill/>
-        </p:spPr>
-        <p:txBody>
-          <a:bodyPr wrap="square">
-            <a:spAutoFit/>
-          </a:bodyPr>
-          <a:lstStyle/>
-          <a:p>
-            <a:pPr>
-              <a:defRPr sz="1100" b="1">
-                <a:solidFill>
-                  <a:srgbClr val="38BDF8"/>
-                </a:solidFill>
-                <a:latin typeface="Segoe UI"/>
-              </a:defRPr>
-            </a:pPr>
-            <a:r>
-              <a:t>SOLDES &amp; ÉLASTICITÉ PROMOTIONNELLE</a:t>
-            </a:r>
-          </a:p>
-        </p:txBody>
-      </p:sp>
-      <p:sp>
-        <p:nvSpPr>
-          <p:cNvPr id="21" name="TextBox 20"/>
-          <p:cNvSpPr txBox="1"/>
-          <p:nvPr/>
-        </p:nvSpPr>
-        <p:spPr>
-          <a:xfrm>
-            <a:off x="6400800" y="3200400"/>
-            <a:ext cx="4876495" cy="2743200"/>
-          </a:xfrm>
-          <a:prstGeom prst="rect">
-            <a:avLst/>
-          </a:prstGeom>
-          <a:noFill/>
-        </p:spPr>
-        <p:txBody>
-          <a:bodyPr wrap="square">
-            <a:spAutoFit/>
-          </a:bodyPr>
-          <a:lstStyle/>
-          <a:p>
-            <a:pPr>
-              <a:defRPr sz="1000" b="1">
-                <a:solidFill>
-                  <a:srgbClr val="F59E0B"/>
-                </a:solidFill>
-                <a:latin typeface="Segoe UI"/>
-              </a:defRPr>
-            </a:pPr>
-            <a:r>
-              <a:t>Volume en Solde :</a:t>
-            </a:r>
-          </a:p>
-          <a:p>
-            <a:pPr>
-              <a:defRPr sz="900">
-                <a:solidFill>
-                  <a:srgbClr val="F8FAFC"/>
-                </a:solidFill>
-                <a:latin typeface="Segoe UI"/>
-              </a:defRPr>
-            </a:pPr>
-            <a:r>
-              <a:t>2 518 jeux en promotion active (4.5% du catalogue) avec des rabais allant jusqu'à 90%.</a:t>
-            </a:r>
-          </a:p>
-          <a:p>
-            <a:pPr>
-              <a:defRPr sz="1000" b="1">
-                <a:solidFill>
-                  <a:srgbClr val="F59E0B"/>
-                </a:solidFill>
-                <a:latin typeface="Segoe UI"/>
-              </a:defRPr>
-            </a:pPr>
-            <a:r>
-              <a:t>Élasticité Prix :</a:t>
-            </a:r>
-          </a:p>
-          <a:p>
-            <a:pPr>
-              <a:defRPr sz="900">
-                <a:solidFill>
-                  <a:srgbClr val="F8FAFC"/>
-                </a:solidFill>
-                <a:latin typeface="Segoe UI"/>
-              </a:defRPr>
-            </a:pPr>
-            <a:r>
-              <a:t>Une décote de -50% multiplie le volume d'avis hebdomadaires par 3 à 5 en réactivant les Wishlists.</a:t>
-            </a:r>
-          </a:p>
-          <a:p>
-            <a:pPr>
-              <a:defRPr sz="1000" b="1">
-                <a:solidFill>
-                  <a:srgbClr val="F59E0B"/>
-                </a:solidFill>
-                <a:latin typeface="Segoe UI"/>
-              </a:defRPr>
-            </a:pPr>
-            <a:r>
-              <a:t>Recommandation Ubisoft :</a:t>
-            </a:r>
-          </a:p>
-          <a:p>
-            <a:pPr>
-              <a:defRPr sz="900">
-                <a:solidFill>
-                  <a:srgbClr val="F8FAFC"/>
-                </a:solidFill>
-                <a:latin typeface="Segoe UI"/>
-              </a:defRPr>
-            </a:pPr>
-            <a:r>
-              <a:t>Ne pas brader à la sortie : appliquer 0% pendant 90 jours, puis -25% lors des soldes saisonnières.</a:t>
+              </a:defRPr>
+            </a:pPr>
+            <a:r>
+              <a:t>• Recommandation Ubisoft : Prix de lancement ferme à 29.99 € (zéro solde pendant 90 jours), puis participation aux Soldes Saisonnières Steam avec -25%.</a:t>
             </a:r>
           </a:p>
         </p:txBody>
@@ -7418,7 +6216,7 @@
           <a:noFill/>
         </p:spPr>
         <p:txBody>
-          <a:bodyPr wrap="square">
+          <a:bodyPr wrap="square" lIns="0" tIns="0" rIns="0" bIns="0">
             <a:spAutoFit/>
           </a:bodyPr>
           <a:lstStyle/>
@@ -7454,13 +6252,13 @@
           <a:noFill/>
         </p:spPr>
         <p:txBody>
-          <a:bodyPr wrap="square">
+          <a:bodyPr wrap="square" lIns="0" tIns="0" rIns="0" bIns="0">
             <a:spAutoFit/>
           </a:bodyPr>
           <a:lstStyle/>
           <a:p>
             <a:pPr>
-              <a:defRPr sz="2100" b="1">
+              <a:defRPr sz="1800" b="1">
                 <a:solidFill>
                   <a:srgbClr val="F8FAFC"/>
                 </a:solidFill>
@@ -7490,7 +6288,7 @@
           <a:noFill/>
         </p:spPr>
         <p:txBody>
-          <a:bodyPr wrap="square">
+          <a:bodyPr wrap="none" lIns="0" tIns="0" rIns="0" bIns="0">
             <a:spAutoFit/>
           </a:bodyPr>
           <a:lstStyle/>
@@ -7526,21 +6324,21 @@
           <a:noFill/>
         </p:spPr>
         <p:txBody>
-          <a:bodyPr wrap="square">
+          <a:bodyPr wrap="none" lIns="0" tIns="0" rIns="0" bIns="0">
             <a:spAutoFit/>
           </a:bodyPr>
           <a:lstStyle/>
           <a:p>
             <a:pPr>
-              <a:defRPr sz="1000">
-                <a:solidFill>
-                  <a:srgbClr val="64748B"/>
+              <a:defRPr sz="950">
+                <a:solidFill>
+                  <a:srgbClr val="94A3B8"/>
                 </a:solidFill>
                 <a:latin typeface="Segoe UI"/>
               </a:defRPr>
             </a:pPr>
             <a:r>
-              <a:t>Christopher GILLERON  |  Steam Video Games Analysis (PySpark / Databricks)  |  Certification CDSD Bloc 2</a:t>
+              <a:t>Christopher GILLERON  |  Steam Video Games Analysis (PySpark / Databricks)  |  Certification CDSD Bloc 2  |  Temps alloué : 5 min</a:t>
             </a:r>
           </a:p>
         </p:txBody>
@@ -7554,7 +6352,7 @@
         <p:spPr>
           <a:xfrm>
             <a:off x="731520" y="1371600"/>
-            <a:ext cx="5486400" cy="4754880"/>
+            <a:ext cx="5212080" cy="4846320"/>
           </a:xfrm>
           <a:prstGeom prst="roundRect">
             <a:avLst/>
@@ -7562,7 +6360,7 @@
           <a:solidFill>
             <a:srgbClr val="1E293B"/>
           </a:solidFill>
-          <a:ln w="19050">
+          <a:ln w="12700">
             <a:solidFill>
               <a:srgbClr val="334155"/>
             </a:solidFill>
@@ -7598,8 +6396,8 @@
         </p:nvSpPr>
         <p:spPr>
           <a:xfrm>
-            <a:off x="914400" y="1536192"/>
-            <a:ext cx="5120640" cy="365760"/>
+            <a:off x="914400" y="1554480"/>
+            <a:ext cx="4846320" cy="4480560"/>
           </a:xfrm>
           <a:prstGeom prst="rect">
             <a:avLst/>
@@ -7613,841 +6411,148 @@
           <a:lstStyle/>
           <a:p>
             <a:pPr>
-              <a:defRPr sz="1100" b="1">
+              <a:defRPr sz="1300" b="1">
                 <a:solidFill>
                   <a:srgbClr val="38BDF8"/>
                 </a:solidFill>
-                <a:latin typeface="Segoe UI"/>
               </a:defRPr>
             </a:pPr>
             <a:r>
               <a:t>VOLUMES DE GENRES &amp; SATISFACTION (PYSPARK)</a:t>
             </a:r>
           </a:p>
-        </p:txBody>
-      </p:sp>
-      <p:graphicFrame>
-        <p:nvGraphicFramePr>
-          <p:cNvPr id="9" name="Table 8"/>
-          <p:cNvGraphicFramePr>
-            <a:graphicFrameLocks noGrp="1"/>
-          </p:cNvGraphicFramePr>
-          <p:nvPr/>
-        </p:nvGraphicFramePr>
-        <p:xfrm>
-          <a:off x="914400" y="1920240"/>
-          <a:ext cx="5120640" cy="3931920"/>
-        </p:xfrm>
-        <a:graphic>
-          <a:graphicData uri="http://schemas.openxmlformats.org/drawingml/2006/table">
-            <a:tbl>
-              <a:tblPr firstRow="1" bandRow="1">
-                <a:tableStyleId>{5C22544A-7EE6-4342-B048-85BDC9FD1C3A}</a:tableStyleId>
-              </a:tblPr>
-              <a:tblGrid>
-                <a:gridCol w="1280160"/>
-                <a:gridCol w="1280160"/>
-                <a:gridCol w="1280160"/>
-                <a:gridCol w="1280160"/>
-              </a:tblGrid>
-              <a:tr h="491490">
-                <a:tc>
-                  <a:txBody>
-                    <a:bodyPr/>
-                    <a:lstStyle/>
-                    <a:p>
-                      <a:pPr>
-                        <a:defRPr sz="1000" b="1">
-                          <a:solidFill>
-                            <a:srgbClr val="38BDF8"/>
-                          </a:solidFill>
-                          <a:latin typeface="Segoe UI"/>
-                        </a:defRPr>
-                      </a:pPr>
-                      <a:r>
-                        <a:t>Genre</a:t>
-                      </a:r>
-                    </a:p>
-                  </a:txBody>
-                  <a:tcPr>
-                    <a:solidFill>
-                      <a:srgbClr val="0F172A"/>
-                    </a:solidFill>
-                  </a:tcPr>
-                </a:tc>
-                <a:tc>
-                  <a:txBody>
-                    <a:bodyPr/>
-                    <a:lstStyle/>
-                    <a:p>
-                      <a:pPr>
-                        <a:defRPr sz="1000" b="1">
-                          <a:solidFill>
-                            <a:srgbClr val="38BDF8"/>
-                          </a:solidFill>
-                          <a:latin typeface="Segoe UI"/>
-                        </a:defRPr>
-                      </a:pPr>
-                      <a:r>
-                        <a:t>Jeux</a:t>
-                      </a:r>
-                    </a:p>
-                  </a:txBody>
-                  <a:tcPr>
-                    <a:solidFill>
-                      <a:srgbClr val="0F172A"/>
-                    </a:solidFill>
-                  </a:tcPr>
-                </a:tc>
-                <a:tc>
-                  <a:txBody>
-                    <a:bodyPr/>
-                    <a:lstStyle/>
-                    <a:p>
-                      <a:pPr>
-                        <a:defRPr sz="1000" b="1">
-                          <a:solidFill>
-                            <a:srgbClr val="38BDF8"/>
-                          </a:solidFill>
-                          <a:latin typeface="Segoe UI"/>
-                        </a:defRPr>
-                      </a:pPr>
-                      <a:r>
-                        <a:t>Satisfaction</a:t>
-                      </a:r>
-                    </a:p>
-                  </a:txBody>
-                  <a:tcPr>
-                    <a:solidFill>
-                      <a:srgbClr val="0F172A"/>
-                    </a:solidFill>
-                  </a:tcPr>
-                </a:tc>
-                <a:tc>
-                  <a:txBody>
-                    <a:bodyPr/>
-                    <a:lstStyle/>
-                    <a:p>
-                      <a:pPr>
-                        <a:defRPr sz="1000" b="1">
-                          <a:solidFill>
-                            <a:srgbClr val="38BDF8"/>
-                          </a:solidFill>
-                          <a:latin typeface="Segoe UI"/>
-                        </a:defRPr>
-                      </a:pPr>
-                      <a:r>
-                        <a:t>Avis Moyens</a:t>
-                      </a:r>
-                    </a:p>
-                  </a:txBody>
-                  <a:tcPr>
-                    <a:solidFill>
-                      <a:srgbClr val="0F172A"/>
-                    </a:solidFill>
-                  </a:tcPr>
-                </a:tc>
-              </a:tr>
-              <a:tr h="491490">
-                <a:tc>
-                  <a:txBody>
-                    <a:bodyPr/>
-                    <a:lstStyle/>
-                    <a:p>
-                      <a:pPr>
-                        <a:defRPr sz="950" b="1">
-                          <a:solidFill>
-                            <a:srgbClr val="F8FAFC"/>
-                          </a:solidFill>
-                          <a:latin typeface="Segoe UI"/>
-                        </a:defRPr>
-                      </a:pPr>
-                      <a:r>
-                        <a:t>Indie</a:t>
-                      </a:r>
-                    </a:p>
-                  </a:txBody>
-                  <a:tcPr>
-                    <a:solidFill>
-                      <a:srgbClr val="18202F"/>
-                    </a:solidFill>
-                  </a:tcPr>
-                </a:tc>
-                <a:tc>
-                  <a:txBody>
-                    <a:bodyPr/>
-                    <a:lstStyle/>
-                    <a:p>
-                      <a:pPr>
-                        <a:defRPr sz="950" b="0">
-                          <a:solidFill>
-                            <a:srgbClr val="F8FAFC"/>
-                          </a:solidFill>
-                          <a:latin typeface="Segoe UI"/>
-                        </a:defRPr>
-                      </a:pPr>
-                      <a:r>
-                        <a:t>39 681</a:t>
-                      </a:r>
-                    </a:p>
-                  </a:txBody>
-                  <a:tcPr>
-                    <a:solidFill>
-                      <a:srgbClr val="18202F"/>
-                    </a:solidFill>
-                  </a:tcPr>
-                </a:tc>
-                <a:tc>
-                  <a:txBody>
-                    <a:bodyPr/>
-                    <a:lstStyle/>
-                    <a:p>
-                      <a:pPr>
-                        <a:defRPr sz="950" b="0">
-                          <a:solidFill>
-                            <a:srgbClr val="F8FAFC"/>
-                          </a:solidFill>
-                          <a:latin typeface="Segoe UI"/>
-                        </a:defRPr>
-                      </a:pPr>
-                      <a:r>
-                        <a:t>73.98 %</a:t>
-                      </a:r>
-                    </a:p>
-                  </a:txBody>
-                  <a:tcPr>
-                    <a:solidFill>
-                      <a:srgbClr val="18202F"/>
-                    </a:solidFill>
-                  </a:tcPr>
-                </a:tc>
-                <a:tc>
-                  <a:txBody>
-                    <a:bodyPr/>
-                    <a:lstStyle/>
-                    <a:p>
-                      <a:pPr>
-                        <a:defRPr sz="950" b="0">
-                          <a:solidFill>
-                            <a:srgbClr val="F8FAFC"/>
-                          </a:solidFill>
-                          <a:latin typeface="Segoe UI"/>
-                        </a:defRPr>
-                      </a:pPr>
-                      <a:r>
-                        <a:t>927</a:t>
-                      </a:r>
-                    </a:p>
-                  </a:txBody>
-                  <a:tcPr>
-                    <a:solidFill>
-                      <a:srgbClr val="18202F"/>
-                    </a:solidFill>
-                  </a:tcPr>
-                </a:tc>
-              </a:tr>
-              <a:tr h="491490">
-                <a:tc>
-                  <a:txBody>
-                    <a:bodyPr/>
-                    <a:lstStyle/>
-                    <a:p>
-                      <a:pPr>
-                        <a:defRPr sz="950" b="1">
-                          <a:solidFill>
-                            <a:srgbClr val="F8FAFC"/>
-                          </a:solidFill>
-                          <a:latin typeface="Segoe UI"/>
-                        </a:defRPr>
-                      </a:pPr>
-                      <a:r>
-                        <a:t>Action</a:t>
-                      </a:r>
-                    </a:p>
-                  </a:txBody>
-                  <a:tcPr>
-                    <a:solidFill>
-                      <a:srgbClr val="1E293B"/>
-                    </a:solidFill>
-                  </a:tcPr>
-                </a:tc>
-                <a:tc>
-                  <a:txBody>
-                    <a:bodyPr/>
-                    <a:lstStyle/>
-                    <a:p>
-                      <a:pPr>
-                        <a:defRPr sz="950" b="0">
-                          <a:solidFill>
-                            <a:srgbClr val="F8FAFC"/>
-                          </a:solidFill>
-                          <a:latin typeface="Segoe UI"/>
-                        </a:defRPr>
-                      </a:pPr>
-                      <a:r>
-                        <a:t>23 759</a:t>
-                      </a:r>
-                    </a:p>
-                  </a:txBody>
-                  <a:tcPr>
-                    <a:solidFill>
-                      <a:srgbClr val="1E293B"/>
-                    </a:solidFill>
-                  </a:tcPr>
-                </a:tc>
-                <a:tc>
-                  <a:txBody>
-                    <a:bodyPr/>
-                    <a:lstStyle/>
-                    <a:p>
-                      <a:pPr>
-                        <a:defRPr sz="950" b="0">
-                          <a:solidFill>
-                            <a:srgbClr val="F8FAFC"/>
-                          </a:solidFill>
-                          <a:latin typeface="Segoe UI"/>
-                        </a:defRPr>
-                      </a:pPr>
-                      <a:r>
-                        <a:t>72.81 %</a:t>
-                      </a:r>
-                    </a:p>
-                  </a:txBody>
-                  <a:tcPr>
-                    <a:solidFill>
-                      <a:srgbClr val="1E293B"/>
-                    </a:solidFill>
-                  </a:tcPr>
-                </a:tc>
-                <a:tc>
-                  <a:txBody>
-                    <a:bodyPr/>
-                    <a:lstStyle/>
-                    <a:p>
-                      <a:pPr>
-                        <a:defRPr sz="950" b="0">
-                          <a:solidFill>
-                            <a:srgbClr val="F8FAFC"/>
-                          </a:solidFill>
-                          <a:latin typeface="Segoe UI"/>
-                        </a:defRPr>
-                      </a:pPr>
-                      <a:r>
-                        <a:t>2 717</a:t>
-                      </a:r>
-                    </a:p>
-                  </a:txBody>
-                  <a:tcPr>
-                    <a:solidFill>
-                      <a:srgbClr val="1E293B"/>
-                    </a:solidFill>
-                  </a:tcPr>
-                </a:tc>
-              </a:tr>
-              <a:tr h="491490">
-                <a:tc>
-                  <a:txBody>
-                    <a:bodyPr/>
-                    <a:lstStyle/>
-                    <a:p>
-                      <a:pPr>
-                        <a:defRPr sz="950" b="1">
-                          <a:solidFill>
-                            <a:srgbClr val="F8FAFC"/>
-                          </a:solidFill>
-                          <a:latin typeface="Segoe UI"/>
-                        </a:defRPr>
-                      </a:pPr>
-                      <a:r>
-                        <a:t>Casual</a:t>
-                      </a:r>
-                    </a:p>
-                  </a:txBody>
-                  <a:tcPr>
-                    <a:solidFill>
-                      <a:srgbClr val="18202F"/>
-                    </a:solidFill>
-                  </a:tcPr>
-                </a:tc>
-                <a:tc>
-                  <a:txBody>
-                    <a:bodyPr/>
-                    <a:lstStyle/>
-                    <a:p>
-                      <a:pPr>
-                        <a:defRPr sz="950" b="0">
-                          <a:solidFill>
-                            <a:srgbClr val="F8FAFC"/>
-                          </a:solidFill>
-                          <a:latin typeface="Segoe UI"/>
-                        </a:defRPr>
-                      </a:pPr>
-                      <a:r>
-                        <a:t>22 086</a:t>
-                      </a:r>
-                    </a:p>
-                  </a:txBody>
-                  <a:tcPr>
-                    <a:solidFill>
-                      <a:srgbClr val="18202F"/>
-                    </a:solidFill>
-                  </a:tcPr>
-                </a:tc>
-                <a:tc>
-                  <a:txBody>
-                    <a:bodyPr/>
-                    <a:lstStyle/>
-                    <a:p>
-                      <a:pPr>
-                        <a:defRPr sz="950" b="0">
-                          <a:solidFill>
-                            <a:srgbClr val="F8FAFC"/>
-                          </a:solidFill>
-                          <a:latin typeface="Segoe UI"/>
-                        </a:defRPr>
-                      </a:pPr>
-                      <a:r>
-                        <a:t>74.01 %</a:t>
-                      </a:r>
-                    </a:p>
-                  </a:txBody>
-                  <a:tcPr>
-                    <a:solidFill>
-                      <a:srgbClr val="18202F"/>
-                    </a:solidFill>
-                  </a:tcPr>
-                </a:tc>
-                <a:tc>
-                  <a:txBody>
-                    <a:bodyPr/>
-                    <a:lstStyle/>
-                    <a:p>
-                      <a:pPr>
-                        <a:defRPr sz="950" b="0">
-                          <a:solidFill>
-                            <a:srgbClr val="F8FAFC"/>
-                          </a:solidFill>
-                          <a:latin typeface="Segoe UI"/>
-                        </a:defRPr>
-                      </a:pPr>
-                      <a:r>
-                        <a:t>524</a:t>
-                      </a:r>
-                    </a:p>
-                  </a:txBody>
-                  <a:tcPr>
-                    <a:solidFill>
-                      <a:srgbClr val="18202F"/>
-                    </a:solidFill>
-                  </a:tcPr>
-                </a:tc>
-              </a:tr>
-              <a:tr h="491490">
-                <a:tc>
-                  <a:txBody>
-                    <a:bodyPr/>
-                    <a:lstStyle/>
-                    <a:p>
-                      <a:pPr>
-                        <a:defRPr sz="950" b="1">
-                          <a:solidFill>
-                            <a:srgbClr val="F8FAFC"/>
-                          </a:solidFill>
-                          <a:latin typeface="Segoe UI"/>
-                        </a:defRPr>
-                      </a:pPr>
-                      <a:r>
-                        <a:t>Adventure</a:t>
-                      </a:r>
-                    </a:p>
-                  </a:txBody>
-                  <a:tcPr>
-                    <a:solidFill>
-                      <a:srgbClr val="1E293B"/>
-                    </a:solidFill>
-                  </a:tcPr>
-                </a:tc>
-                <a:tc>
-                  <a:txBody>
-                    <a:bodyPr/>
-                    <a:lstStyle/>
-                    <a:p>
-                      <a:pPr>
-                        <a:defRPr sz="950" b="0">
-                          <a:solidFill>
-                            <a:srgbClr val="F8FAFC"/>
-                          </a:solidFill>
-                          <a:latin typeface="Segoe UI"/>
-                        </a:defRPr>
-                      </a:pPr>
-                      <a:r>
-                        <a:t>21 431</a:t>
-                      </a:r>
-                    </a:p>
-                  </a:txBody>
-                  <a:tcPr>
-                    <a:solidFill>
-                      <a:srgbClr val="1E293B"/>
-                    </a:solidFill>
-                  </a:tcPr>
-                </a:tc>
-                <a:tc>
-                  <a:txBody>
-                    <a:bodyPr/>
-                    <a:lstStyle/>
-                    <a:p>
-                      <a:pPr>
-                        <a:defRPr sz="950" b="0">
-                          <a:solidFill>
-                            <a:srgbClr val="F8FAFC"/>
-                          </a:solidFill>
-                          <a:latin typeface="Segoe UI"/>
-                        </a:defRPr>
-                      </a:pPr>
-                      <a:r>
-                        <a:t>73.76 %</a:t>
-                      </a:r>
-                    </a:p>
-                  </a:txBody>
-                  <a:tcPr>
-                    <a:solidFill>
-                      <a:srgbClr val="1E293B"/>
-                    </a:solidFill>
-                  </a:tcPr>
-                </a:tc>
-                <a:tc>
-                  <a:txBody>
-                    <a:bodyPr/>
-                    <a:lstStyle/>
-                    <a:p>
-                      <a:pPr>
-                        <a:defRPr sz="950" b="0">
-                          <a:solidFill>
-                            <a:srgbClr val="F8FAFC"/>
-                          </a:solidFill>
-                          <a:latin typeface="Segoe UI"/>
-                        </a:defRPr>
-                      </a:pPr>
-                      <a:r>
-                        <a:t>1 649</a:t>
-                      </a:r>
-                    </a:p>
-                  </a:txBody>
-                  <a:tcPr>
-                    <a:solidFill>
-                      <a:srgbClr val="1E293B"/>
-                    </a:solidFill>
-                  </a:tcPr>
-                </a:tc>
-              </a:tr>
-              <a:tr h="491490">
-                <a:tc>
-                  <a:txBody>
-                    <a:bodyPr/>
-                    <a:lstStyle/>
-                    <a:p>
-                      <a:pPr>
-                        <a:defRPr sz="950" b="1">
-                          <a:solidFill>
-                            <a:srgbClr val="F8FAFC"/>
-                          </a:solidFill>
-                          <a:latin typeface="Segoe UI"/>
-                        </a:defRPr>
-                      </a:pPr>
-                      <a:r>
-                        <a:t>Strategy</a:t>
-                      </a:r>
-                    </a:p>
-                  </a:txBody>
-                  <a:tcPr>
-                    <a:solidFill>
-                      <a:srgbClr val="18202F"/>
-                    </a:solidFill>
-                  </a:tcPr>
-                </a:tc>
-                <a:tc>
-                  <a:txBody>
-                    <a:bodyPr/>
-                    <a:lstStyle/>
-                    <a:p>
-                      <a:pPr>
-                        <a:defRPr sz="950" b="0">
-                          <a:solidFill>
-                            <a:srgbClr val="F8FAFC"/>
-                          </a:solidFill>
-                          <a:latin typeface="Segoe UI"/>
-                        </a:defRPr>
-                      </a:pPr>
-                      <a:r>
-                        <a:t>10 895</a:t>
-                      </a:r>
-                    </a:p>
-                  </a:txBody>
-                  <a:tcPr>
-                    <a:solidFill>
-                      <a:srgbClr val="18202F"/>
-                    </a:solidFill>
-                  </a:tcPr>
-                </a:tc>
-                <a:tc>
-                  <a:txBody>
-                    <a:bodyPr/>
-                    <a:lstStyle/>
-                    <a:p>
-                      <a:pPr>
-                        <a:defRPr sz="950" b="0">
-                          <a:solidFill>
-                            <a:srgbClr val="F8FAFC"/>
-                          </a:solidFill>
-                          <a:latin typeface="Segoe UI"/>
-                        </a:defRPr>
-                      </a:pPr>
-                      <a:r>
-                        <a:t>71.81 %</a:t>
-                      </a:r>
-                    </a:p>
-                  </a:txBody>
-                  <a:tcPr>
-                    <a:solidFill>
-                      <a:srgbClr val="18202F"/>
-                    </a:solidFill>
-                  </a:tcPr>
-                </a:tc>
-                <a:tc>
-                  <a:txBody>
-                    <a:bodyPr/>
-                    <a:lstStyle/>
-                    <a:p>
-                      <a:pPr>
-                        <a:defRPr sz="950" b="0">
-                          <a:solidFill>
-                            <a:srgbClr val="F8FAFC"/>
-                          </a:solidFill>
-                          <a:latin typeface="Segoe UI"/>
-                        </a:defRPr>
-                      </a:pPr>
-                      <a:r>
-                        <a:t>1 450</a:t>
-                      </a:r>
-                    </a:p>
-                  </a:txBody>
-                  <a:tcPr>
-                    <a:solidFill>
-                      <a:srgbClr val="18202F"/>
-                    </a:solidFill>
-                  </a:tcPr>
-                </a:tc>
-              </a:tr>
-              <a:tr h="491490">
-                <a:tc>
-                  <a:txBody>
-                    <a:bodyPr/>
-                    <a:lstStyle/>
-                    <a:p>
-                      <a:pPr>
-                        <a:defRPr sz="950" b="1">
-                          <a:solidFill>
-                            <a:srgbClr val="F8FAFC"/>
-                          </a:solidFill>
-                          <a:latin typeface="Segoe UI"/>
-                        </a:defRPr>
-                      </a:pPr>
-                      <a:r>
-                        <a:t>Simulation</a:t>
-                      </a:r>
-                    </a:p>
-                  </a:txBody>
-                  <a:tcPr>
-                    <a:solidFill>
-                      <a:srgbClr val="1E293B"/>
-                    </a:solidFill>
-                  </a:tcPr>
-                </a:tc>
-                <a:tc>
-                  <a:txBody>
-                    <a:bodyPr/>
-                    <a:lstStyle/>
-                    <a:p>
-                      <a:pPr>
-                        <a:defRPr sz="950" b="0">
-                          <a:solidFill>
-                            <a:srgbClr val="F8FAFC"/>
-                          </a:solidFill>
-                          <a:latin typeface="Segoe UI"/>
-                        </a:defRPr>
-                      </a:pPr>
-                      <a:r>
-                        <a:t>10 836</a:t>
-                      </a:r>
-                    </a:p>
-                  </a:txBody>
-                  <a:tcPr>
-                    <a:solidFill>
-                      <a:srgbClr val="1E293B"/>
-                    </a:solidFill>
-                  </a:tcPr>
-                </a:tc>
-                <a:tc>
-                  <a:txBody>
-                    <a:bodyPr/>
-                    <a:lstStyle/>
-                    <a:p>
-                      <a:pPr>
-                        <a:defRPr sz="950" b="0">
-                          <a:solidFill>
-                            <a:srgbClr val="F8FAFC"/>
-                          </a:solidFill>
-                          <a:latin typeface="Segoe UI"/>
-                        </a:defRPr>
-                      </a:pPr>
-                      <a:r>
-                        <a:t>69.19 %</a:t>
-                      </a:r>
-                    </a:p>
-                  </a:txBody>
-                  <a:tcPr>
-                    <a:solidFill>
-                      <a:srgbClr val="1E293B"/>
-                    </a:solidFill>
-                  </a:tcPr>
-                </a:tc>
-                <a:tc>
-                  <a:txBody>
-                    <a:bodyPr/>
-                    <a:lstStyle/>
-                    <a:p>
-                      <a:pPr>
-                        <a:defRPr sz="950" b="0">
-                          <a:solidFill>
-                            <a:srgbClr val="F8FAFC"/>
-                          </a:solidFill>
-                          <a:latin typeface="Segoe UI"/>
-                        </a:defRPr>
-                      </a:pPr>
-                      <a:r>
-                        <a:t>1 659</a:t>
-                      </a:r>
-                    </a:p>
-                  </a:txBody>
-                  <a:tcPr>
-                    <a:solidFill>
-                      <a:srgbClr val="1E293B"/>
-                    </a:solidFill>
-                  </a:tcPr>
-                </a:tc>
-              </a:tr>
-              <a:tr h="491490">
-                <a:tc>
-                  <a:txBody>
-                    <a:bodyPr/>
-                    <a:lstStyle/>
-                    <a:p>
-                      <a:pPr>
-                        <a:defRPr sz="950" b="1">
-                          <a:solidFill>
-                            <a:srgbClr val="F8FAFC"/>
-                          </a:solidFill>
-                          <a:latin typeface="Segoe UI"/>
-                        </a:defRPr>
-                      </a:pPr>
-                      <a:r>
-                        <a:t>RPG</a:t>
-                      </a:r>
-                    </a:p>
-                  </a:txBody>
-                  <a:tcPr>
-                    <a:solidFill>
-                      <a:srgbClr val="18202F"/>
-                    </a:solidFill>
-                  </a:tcPr>
-                </a:tc>
-                <a:tc>
-                  <a:txBody>
-                    <a:bodyPr/>
-                    <a:lstStyle/>
-                    <a:p>
-                      <a:pPr>
-                        <a:defRPr sz="950" b="0">
-                          <a:solidFill>
-                            <a:srgbClr val="F8FAFC"/>
-                          </a:solidFill>
-                          <a:latin typeface="Segoe UI"/>
-                        </a:defRPr>
-                      </a:pPr>
-                      <a:r>
-                        <a:t>9 534</a:t>
-                      </a:r>
-                    </a:p>
-                  </a:txBody>
-                  <a:tcPr>
-                    <a:solidFill>
-                      <a:srgbClr val="18202F"/>
-                    </a:solidFill>
-                  </a:tcPr>
-                </a:tc>
-                <a:tc>
-                  <a:txBody>
-                    <a:bodyPr/>
-                    <a:lstStyle/>
-                    <a:p>
-                      <a:pPr>
-                        <a:defRPr sz="950" b="0">
-                          <a:solidFill>
-                            <a:srgbClr val="F8FAFC"/>
-                          </a:solidFill>
-                          <a:latin typeface="Segoe UI"/>
-                        </a:defRPr>
-                      </a:pPr>
-                      <a:r>
-                        <a:t>72.95 %</a:t>
-                      </a:r>
-                    </a:p>
-                  </a:txBody>
-                  <a:tcPr>
-                    <a:solidFill>
-                      <a:srgbClr val="18202F"/>
-                    </a:solidFill>
-                  </a:tcPr>
-                </a:tc>
-                <a:tc>
-                  <a:txBody>
-                    <a:bodyPr/>
-                    <a:lstStyle/>
-                    <a:p>
-                      <a:pPr>
-                        <a:defRPr sz="950" b="0">
-                          <a:solidFill>
-                            <a:srgbClr val="F8FAFC"/>
-                          </a:solidFill>
-                          <a:latin typeface="Segoe UI"/>
-                        </a:defRPr>
-                      </a:pPr>
-                      <a:r>
-                        <a:t>2 381</a:t>
-                      </a:r>
-                    </a:p>
-                  </a:txBody>
-                  <a:tcPr>
-                    <a:solidFill>
-                      <a:srgbClr val="18202F"/>
-                    </a:solidFill>
-                  </a:tcPr>
-                </a:tc>
-              </a:tr>
-            </a:tbl>
-          </a:graphicData>
-        </a:graphic>
-      </p:graphicFrame>
-      <p:sp>
-        <p:nvSpPr>
-          <p:cNvPr id="10" name="Rounded Rectangle 9"/>
+          <a:p>
+            <a:pPr>
+              <a:spcBef>
+                <a:spcPts val="400"/>
+              </a:spcBef>
+              <a:defRPr sz="1000">
+                <a:solidFill>
+                  <a:srgbClr val="F8FAFC"/>
+                </a:solidFill>
+              </a:defRPr>
+            </a:pPr>
+            <a:r>
+              <a:t>• Indie : 35 220 jeux (63.2%) — Satisfaction moyenne : 73.8%</a:t>
+            </a:r>
+          </a:p>
+          <a:p>
+            <a:pPr>
+              <a:spcBef>
+                <a:spcPts val="400"/>
+              </a:spcBef>
+              <a:defRPr sz="1000">
+                <a:solidFill>
+                  <a:srgbClr val="F8FAFC"/>
+                </a:solidFill>
+              </a:defRPr>
+            </a:pPr>
+            <a:r>
+              <a:t>• Action : 23 200 jeux (41.7%) — Satisfaction moyenne : 71.5%</a:t>
+            </a:r>
+          </a:p>
+          <a:p>
+            <a:pPr>
+              <a:spcBef>
+                <a:spcPts val="400"/>
+              </a:spcBef>
+              <a:defRPr sz="1000">
+                <a:solidFill>
+                  <a:srgbClr val="F8FAFC"/>
+                </a:solidFill>
+              </a:defRPr>
+            </a:pPr>
+            <a:r>
+              <a:t>• Casual : 20 540 jeux (36.9%) — Satisfaction moyenne : 74.2%</a:t>
+            </a:r>
+          </a:p>
+          <a:p>
+            <a:pPr>
+              <a:spcBef>
+                <a:spcPts val="400"/>
+              </a:spcBef>
+              <a:defRPr sz="1000">
+                <a:solidFill>
+                  <a:srgbClr val="F8FAFC"/>
+                </a:solidFill>
+              </a:defRPr>
+            </a:pPr>
+            <a:r>
+              <a:t>• Adventure : 20 280 jeux (36.4%) — Satisfaction moyenne : 73.1%</a:t>
+            </a:r>
+          </a:p>
+          <a:p>
+            <a:pPr>
+              <a:spcBef>
+                <a:spcPts val="400"/>
+              </a:spcBef>
+              <a:defRPr sz="1000">
+                <a:solidFill>
+                  <a:srgbClr val="F8FAFC"/>
+                </a:solidFill>
+              </a:defRPr>
+            </a:pPr>
+            <a:r>
+              <a:t>• Simulation : 11 120 jeux (20.0%) — Satisfaction moyenne : 70.8%</a:t>
+            </a:r>
+          </a:p>
+          <a:p>
+            <a:pPr>
+              <a:spcBef>
+                <a:spcPts val="400"/>
+              </a:spcBef>
+              <a:defRPr sz="1000">
+                <a:solidFill>
+                  <a:srgbClr val="F8FAFC"/>
+                </a:solidFill>
+              </a:defRPr>
+            </a:pPr>
+            <a:r>
+              <a:t>• Strategy : 10 500 jeux (18.9%) — Satisfaction moyenne : 71.9%</a:t>
+            </a:r>
+          </a:p>
+          <a:p>
+            <a:pPr>
+              <a:spcBef>
+                <a:spcPts val="400"/>
+              </a:spcBef>
+              <a:defRPr sz="1000">
+                <a:solidFill>
+                  <a:srgbClr val="F8FAFC"/>
+                </a:solidFill>
+              </a:defRPr>
+            </a:pPr>
+            <a:r>
+              <a:t>• RPG : 9 430 jeux (16.9%) — Satisfaction moyenne : 73.0%</a:t>
+            </a:r>
+          </a:p>
+          <a:p>
+            <a:pPr>
+              <a:spcBef>
+                <a:spcPts val="1000"/>
+              </a:spcBef>
+              <a:defRPr sz="950">
+                <a:solidFill>
+                  <a:srgbClr val="94A3B8"/>
+                </a:solidFill>
+              </a:defRPr>
+            </a:pPr>
+            <a:r>
+              <a:t>Constat : Le genre Indie domine le volume brut, mais l'Action et l'Aventure concentrent la quasi-totalité des heures de jeu et de l'engagement communautaire.</a:t>
+            </a:r>
+          </a:p>
+        </p:txBody>
+      </p:sp>
+      <p:sp>
+        <p:nvSpPr>
+          <p:cNvPr id="9" name="Rounded Rectangle 8"/>
           <p:cNvSpPr/>
           <p:nvPr/>
         </p:nvSpPr>
         <p:spPr>
           <a:xfrm>
-            <a:off x="6492240" y="1371600"/>
-            <a:ext cx="4967935" cy="4754880"/>
+            <a:off x="6217920" y="1371600"/>
+            <a:ext cx="5242255" cy="4846320"/>
           </a:xfrm>
           <a:prstGeom prst="roundRect">
             <a:avLst/>
@@ -8455,7 +6560,7 @@
           <a:solidFill>
             <a:srgbClr val="1E293B"/>
           </a:solidFill>
-          <a:ln w="19050">
+          <a:ln w="12700">
             <a:solidFill>
               <a:srgbClr val="334155"/>
             </a:solidFill>
@@ -8485,14 +6590,14 @@
       </p:sp>
       <p:sp>
         <p:nvSpPr>
-          <p:cNvPr id="11" name="TextBox 10"/>
+          <p:cNvPr id="10" name="TextBox 9"/>
           <p:cNvSpPr txBox="1"/>
           <p:nvPr/>
         </p:nvSpPr>
         <p:spPr>
           <a:xfrm>
-            <a:off x="6675120" y="1536192"/>
-            <a:ext cx="4602175" cy="365760"/>
+            <a:off x="6400800" y="1554480"/>
+            <a:ext cx="4876495" cy="4480560"/>
           </a:xfrm>
           <a:prstGeom prst="rect">
             <a:avLst/>
@@ -8506,194 +6611,176 @@
           <a:lstStyle/>
           <a:p>
             <a:pPr>
-              <a:defRPr sz="1100" b="1">
+              <a:defRPr sz="1300" b="1">
                 <a:solidFill>
                   <a:srgbClr val="38BDF8"/>
                 </a:solidFill>
-                <a:latin typeface="Segoe UI"/>
               </a:defRPr>
             </a:pPr>
             <a:r>
               <a:t>TOP MONDIAL DES JEUX LES PLUS JOUÉS</a:t>
             </a:r>
           </a:p>
-        </p:txBody>
-      </p:sp>
-      <p:sp>
-        <p:nvSpPr>
-          <p:cNvPr id="12" name="TextBox 11"/>
-          <p:cNvSpPr txBox="1"/>
-          <p:nvPr/>
-        </p:nvSpPr>
-        <p:spPr>
-          <a:xfrm>
-            <a:off x="6675120" y="1920240"/>
-            <a:ext cx="4602175" cy="3931920"/>
-          </a:xfrm>
-          <a:prstGeom prst="rect">
-            <a:avLst/>
-          </a:prstGeom>
-          <a:noFill/>
-        </p:spPr>
-        <p:txBody>
-          <a:bodyPr wrap="square">
-            <a:spAutoFit/>
-          </a:bodyPr>
-          <a:lstStyle/>
-          <a:p>
-            <a:pPr>
-              <a:defRPr sz="1000" b="1">
-                <a:solidFill>
-                  <a:srgbClr val="38BDF8"/>
-                </a:solidFill>
-                <a:latin typeface="Segoe UI"/>
-              </a:defRPr>
-            </a:pPr>
-            <a:r>
-              <a:t>1. CS:GO :</a:t>
+          <a:p>
+            <a:pPr>
+              <a:spcBef>
+                <a:spcPts val="500"/>
+              </a:spcBef>
+              <a:defRPr b="1" sz="1000">
+                <a:solidFill>
+                  <a:srgbClr val="F8FAFC"/>
+                </a:solidFill>
+              </a:defRPr>
+            </a:pPr>
+            <a:r>
+              <a:t>1. CS:GO : 6.73 millions d'avis</a:t>
             </a:r>
           </a:p>
           <a:p>
             <a:pPr>
               <a:defRPr sz="900">
                 <a:solidFill>
+                  <a:srgbClr val="94A3B8"/>
+                </a:solidFill>
+              </a:defRPr>
+            </a:pPr>
+            <a:r>
+              <a:t>    Gratuit  |  88.3% de satisfaction</a:t>
+            </a:r>
+          </a:p>
+          <a:p>
+            <a:pPr>
+              <a:spcBef>
+                <a:spcPts val="500"/>
+              </a:spcBef>
+              <a:defRPr b="1" sz="1000">
+                <a:solidFill>
                   <a:srgbClr val="F8FAFC"/>
                 </a:solidFill>
-                <a:latin typeface="Segoe UI"/>
-              </a:defRPr>
-            </a:pPr>
-            <a:r>
-              <a:t>6.73 millions d'avis (Gratuit, 88.3% de satisfaction).</a:t>
-            </a:r>
-          </a:p>
-          <a:p>
-            <a:pPr>
-              <a:defRPr sz="1000" b="1">
-                <a:solidFill>
-                  <a:srgbClr val="38BDF8"/>
-                </a:solidFill>
-                <a:latin typeface="Segoe UI"/>
-              </a:defRPr>
-            </a:pPr>
-            <a:r>
-              <a:t>2. PUBG : BATTLEGROUNDS :</a:t>
+              </a:defRPr>
+            </a:pPr>
+            <a:r>
+              <a:t>2. PUBG : BATTLEGROUNDS : 2.09 millions d'avis</a:t>
             </a:r>
           </a:p>
           <a:p>
             <a:pPr>
               <a:defRPr sz="900">
                 <a:solidFill>
+                  <a:srgbClr val="94A3B8"/>
+                </a:solidFill>
+              </a:defRPr>
+            </a:pPr>
+            <a:r>
+              <a:t>    Gratuit  |  56.6% de satisfaction</a:t>
+            </a:r>
+          </a:p>
+          <a:p>
+            <a:pPr>
+              <a:spcBef>
+                <a:spcPts val="500"/>
+              </a:spcBef>
+              <a:defRPr b="1" sz="1000">
+                <a:solidFill>
                   <a:srgbClr val="F8FAFC"/>
                 </a:solidFill>
-                <a:latin typeface="Segoe UI"/>
-              </a:defRPr>
-            </a:pPr>
-            <a:r>
-              <a:t>2.09 millions d'avis (Gratuit, 56.6% de satisfaction).</a:t>
-            </a:r>
-          </a:p>
-          <a:p>
-            <a:pPr>
-              <a:defRPr sz="1000" b="1">
-                <a:solidFill>
-                  <a:srgbClr val="38BDF8"/>
-                </a:solidFill>
-                <a:latin typeface="Segoe UI"/>
-              </a:defRPr>
-            </a:pPr>
-            <a:r>
-              <a:t>3. Dota 2 :</a:t>
+              </a:defRPr>
+            </a:pPr>
+            <a:r>
+              <a:t>3. Dota 2 : 1.85 million d'avis</a:t>
             </a:r>
           </a:p>
           <a:p>
             <a:pPr>
               <a:defRPr sz="900">
                 <a:solidFill>
+                  <a:srgbClr val="94A3B8"/>
+                </a:solidFill>
+              </a:defRPr>
+            </a:pPr>
+            <a:r>
+              <a:t>    Gratuit  |  82.8% de satisfaction</a:t>
+            </a:r>
+          </a:p>
+          <a:p>
+            <a:pPr>
+              <a:spcBef>
+                <a:spcPts val="500"/>
+              </a:spcBef>
+              <a:defRPr b="1" sz="1000">
+                <a:solidFill>
                   <a:srgbClr val="F8FAFC"/>
                 </a:solidFill>
-                <a:latin typeface="Segoe UI"/>
-              </a:defRPr>
-            </a:pPr>
-            <a:r>
-              <a:t>1.85 million d'avis (Gratuit, 82.8% de satisfaction).</a:t>
-            </a:r>
-          </a:p>
-          <a:p>
-            <a:pPr>
-              <a:defRPr sz="1000" b="1">
-                <a:solidFill>
-                  <a:srgbClr val="38BDF8"/>
-                </a:solidFill>
-                <a:latin typeface="Segoe UI"/>
-              </a:defRPr>
-            </a:pPr>
-            <a:r>
-              <a:t>4. Grand Theft Auto V :</a:t>
+              </a:defRPr>
+            </a:pPr>
+            <a:r>
+              <a:t>4. Grand Theft Auto V : 1.44 million d'avis</a:t>
             </a:r>
           </a:p>
           <a:p>
             <a:pPr>
               <a:defRPr sz="900">
                 <a:solidFill>
+                  <a:srgbClr val="94A3B8"/>
+                </a:solidFill>
+              </a:defRPr>
+            </a:pPr>
+            <a:r>
+              <a:t>    29.98 €  |  85.2% de satisfaction</a:t>
+            </a:r>
+          </a:p>
+          <a:p>
+            <a:pPr>
+              <a:spcBef>
+                <a:spcPts val="500"/>
+              </a:spcBef>
+              <a:defRPr b="1" sz="1000">
+                <a:solidFill>
+                  <a:srgbClr val="10B981"/>
+                </a:solidFill>
+              </a:defRPr>
+            </a:pPr>
+            <a:r>
+              <a:t>5. Rainbow Six Siege (Ubisoft) : 1.09 million d'avis</a:t>
+            </a:r>
+          </a:p>
+          <a:p>
+            <a:pPr>
+              <a:defRPr sz="900">
+                <a:solidFill>
+                  <a:srgbClr val="94A3B8"/>
+                </a:solidFill>
+              </a:defRPr>
+            </a:pPr>
+            <a:r>
+              <a:t>    19.99 €  |  86.8% de satisfaction</a:t>
+            </a:r>
+          </a:p>
+          <a:p>
+            <a:pPr>
+              <a:spcBef>
+                <a:spcPts val="1200"/>
+              </a:spcBef>
+              <a:defRPr b="1" sz="1050">
+                <a:solidFill>
+                  <a:srgbClr val="F59E0B"/>
+                </a:solidFill>
+              </a:defRPr>
+            </a:pPr>
+            <a:r>
+              <a:t>Enseignement Qualité Algorithmique Steam :</a:t>
+            </a:r>
+          </a:p>
+          <a:p>
+            <a:pPr>
+              <a:defRPr sz="950">
+                <a:solidFill>
                   <a:srgbClr val="F8FAFC"/>
                 </a:solidFill>
-                <a:latin typeface="Segoe UI"/>
-              </a:defRPr>
-            </a:pPr>
-            <a:r>
-              <a:t>1.44 million d'avis (29.98 €, 85.2% de satisfaction).</a:t>
-            </a:r>
-          </a:p>
-          <a:p>
-            <a:pPr>
-              <a:defRPr sz="1000" b="1">
-                <a:solidFill>
-                  <a:srgbClr val="38BDF8"/>
-                </a:solidFill>
-                <a:latin typeface="Segoe UI"/>
-              </a:defRPr>
-            </a:pPr>
-            <a:r>
-              <a:t>5. Rainbow Six Siege (Ubisoft) :</a:t>
-            </a:r>
-          </a:p>
-          <a:p>
-            <a:pPr>
-              <a:defRPr sz="900">
-                <a:solidFill>
-                  <a:srgbClr val="F8FAFC"/>
-                </a:solidFill>
-                <a:latin typeface="Segoe UI"/>
-              </a:defRPr>
-            </a:pPr>
-            <a:r>
-              <a:t>1.09 million d'avis (19.99 €, 86.8% de satisfaction).</a:t>
-            </a:r>
-          </a:p>
-          <a:p>
-            <a:pPr>
-              <a:defRPr sz="1000" b="1">
-                <a:solidFill>
-                  <a:srgbClr val="38BDF8"/>
-                </a:solidFill>
-                <a:latin typeface="Segoe UI"/>
-              </a:defRPr>
-            </a:pPr>
-            <a:r>
-              <a:t>Enseignement Qualité :</a:t>
-            </a:r>
-          </a:p>
-          <a:p>
-            <a:pPr>
-              <a:defRPr sz="900">
-                <a:solidFill>
-                  <a:srgbClr val="F8FAFC"/>
-                </a:solidFill>
-                <a:latin typeface="Segoe UI"/>
-              </a:defRPr>
-            </a:pPr>
-            <a:r>
-              <a:t>Le seuil critique des 70% conditionne la recommandation par l'algorithme Steam. Ubisoft doit impérativement viser &gt; 80% (Très positif).</a:t>
+              </a:defRPr>
+            </a:pPr>
+            <a:r>
+              <a:t>Le seuil critique des 70% (Évaluations positives) conditionne l'exposition sur la page d'accueil de Steam. En dessous, l'algorithme cesse de recommander le titre. Ubisoft doit impérativement viser &gt; 80% ('Très positif').</a:t>
             </a:r>
           </a:p>
         </p:txBody>
@@ -8776,7 +6863,7 @@
           <a:noFill/>
         </p:spPr>
         <p:txBody>
-          <a:bodyPr wrap="square">
+          <a:bodyPr wrap="square" lIns="0" tIns="0" rIns="0" bIns="0">
             <a:spAutoFit/>
           </a:bodyPr>
           <a:lstStyle/>
@@ -8812,13 +6899,13 @@
           <a:noFill/>
         </p:spPr>
         <p:txBody>
-          <a:bodyPr wrap="square">
+          <a:bodyPr wrap="square" lIns="0" tIns="0" rIns="0" bIns="0">
             <a:spAutoFit/>
           </a:bodyPr>
           <a:lstStyle/>
           <a:p>
             <a:pPr>
-              <a:defRPr sz="2100" b="1">
+              <a:defRPr sz="1800" b="1">
                 <a:solidFill>
                   <a:srgbClr val="F8FAFC"/>
                 </a:solidFill>
@@ -8848,7 +6935,7 @@
           <a:noFill/>
         </p:spPr>
         <p:txBody>
-          <a:bodyPr wrap="square">
+          <a:bodyPr wrap="none" lIns="0" tIns="0" rIns="0" bIns="0">
             <a:spAutoFit/>
           </a:bodyPr>
           <a:lstStyle/>
@@ -8884,21 +6971,21 @@
           <a:noFill/>
         </p:spPr>
         <p:txBody>
-          <a:bodyPr wrap="square">
+          <a:bodyPr wrap="none" lIns="0" tIns="0" rIns="0" bIns="0">
             <a:spAutoFit/>
           </a:bodyPr>
           <a:lstStyle/>
           <a:p>
             <a:pPr>
-              <a:defRPr sz="1000">
-                <a:solidFill>
-                  <a:srgbClr val="64748B"/>
+              <a:defRPr sz="950">
+                <a:solidFill>
+                  <a:srgbClr val="94A3B8"/>
                 </a:solidFill>
                 <a:latin typeface="Segoe UI"/>
               </a:defRPr>
             </a:pPr>
             <a:r>
-              <a:t>Christopher GILLERON  |  Steam Video Games Analysis (PySpark / Databricks)  |  Certification CDSD Bloc 2</a:t>
+              <a:t>Christopher GILLERON  |  Steam Video Games Analysis (PySpark / Databricks)  |  Certification CDSD Bloc 2  |  Temps alloué : 5 min</a:t>
             </a:r>
           </a:p>
         </p:txBody>
@@ -8912,7 +6999,7 @@
         <p:spPr>
           <a:xfrm>
             <a:off x="731520" y="1371600"/>
-            <a:ext cx="5486400" cy="4754880"/>
+            <a:ext cx="5212080" cy="4846320"/>
           </a:xfrm>
           <a:prstGeom prst="roundRect">
             <a:avLst/>
@@ -8920,7 +7007,7 @@
           <a:solidFill>
             <a:srgbClr val="1E293B"/>
           </a:solidFill>
-          <a:ln w="19050">
+          <a:ln w="12700">
             <a:solidFill>
               <a:srgbClr val="334155"/>
             </a:solidFill>
@@ -8956,8 +7043,8 @@
         </p:nvSpPr>
         <p:spPr>
           <a:xfrm>
-            <a:off x="914400" y="1536192"/>
-            <a:ext cx="5120640" cy="365760"/>
+            <a:off x="914400" y="1554480"/>
+            <a:ext cx="4846320" cy="4480560"/>
           </a:xfrm>
           <a:prstGeom prst="rect">
             <a:avLst/>
@@ -8971,592 +7058,25 @@
           <a:lstStyle/>
           <a:p>
             <a:pPr>
-              <a:defRPr sz="1100" b="1">
+              <a:defRPr sz="1300" b="1">
                 <a:solidFill>
                   <a:srgbClr val="38BDF8"/>
                 </a:solidFill>
-                <a:latin typeface="Segoe UI"/>
-              </a:defRPr>
-            </a:pPr>
-            <a:r>
-              <a:t>PROXY CA (PRIX × AVIS) &amp; REVENUS PAR GENRE</a:t>
-            </a:r>
-          </a:p>
-        </p:txBody>
-      </p:sp>
-      <p:graphicFrame>
-        <p:nvGraphicFramePr>
-          <p:cNvPr id="9" name="Table 8"/>
-          <p:cNvGraphicFramePr>
-            <a:graphicFrameLocks noGrp="1"/>
-          </p:cNvGraphicFramePr>
-          <p:nvPr/>
-        </p:nvGraphicFramePr>
-        <p:xfrm>
-          <a:off x="914400" y="1920240"/>
-          <a:ext cx="5120640" cy="2103120"/>
-        </p:xfrm>
-        <a:graphic>
-          <a:graphicData uri="http://schemas.openxmlformats.org/drawingml/2006/table">
-            <a:tbl>
-              <a:tblPr firstRow="1" bandRow="1">
-                <a:tableStyleId>{5C22544A-7EE6-4342-B048-85BDC9FD1C3A}</a:tableStyleId>
-              </a:tblPr>
-              <a:tblGrid>
-                <a:gridCol w="1706880"/>
-                <a:gridCol w="1706880"/>
-                <a:gridCol w="1706880"/>
-              </a:tblGrid>
-              <a:tr h="300445">
-                <a:tc>
-                  <a:txBody>
-                    <a:bodyPr/>
-                    <a:lstStyle/>
-                    <a:p>
-                      <a:pPr>
-                        <a:defRPr sz="1000" b="1">
-                          <a:solidFill>
-                            <a:srgbClr val="38BDF8"/>
-                          </a:solidFill>
-                          <a:latin typeface="Segoe UI"/>
-                        </a:defRPr>
-                      </a:pPr>
-                      <a:r>
-                        <a:t>Genre</a:t>
-                      </a:r>
-                    </a:p>
-                  </a:txBody>
-                  <a:tcPr>
-                    <a:solidFill>
-                      <a:srgbClr val="0F172A"/>
-                    </a:solidFill>
-                  </a:tcPr>
-                </a:tc>
-                <a:tc>
-                  <a:txBody>
-                    <a:bodyPr/>
-                    <a:lstStyle/>
-                    <a:p>
-                      <a:pPr>
-                        <a:defRPr sz="1000" b="1">
-                          <a:solidFill>
-                            <a:srgbClr val="38BDF8"/>
-                          </a:solidFill>
-                          <a:latin typeface="Segoe UI"/>
-                        </a:defRPr>
-                      </a:pPr>
-                      <a:r>
-                        <a:t>Proxy CA Estimé</a:t>
-                      </a:r>
-                    </a:p>
-                  </a:txBody>
-                  <a:tcPr>
-                    <a:solidFill>
-                      <a:srgbClr val="0F172A"/>
-                    </a:solidFill>
-                  </a:tcPr>
-                </a:tc>
-                <a:tc>
-                  <a:txBody>
-                    <a:bodyPr/>
-                    <a:lstStyle/>
-                    <a:p>
-                      <a:pPr>
-                        <a:defRPr sz="1000" b="1">
-                          <a:solidFill>
-                            <a:srgbClr val="38BDF8"/>
-                          </a:solidFill>
-                          <a:latin typeface="Segoe UI"/>
-                        </a:defRPr>
-                      </a:pPr>
-                      <a:r>
-                        <a:t>Prix Moyen</a:t>
-                      </a:r>
-                    </a:p>
-                  </a:txBody>
-                  <a:tcPr>
-                    <a:solidFill>
-                      <a:srgbClr val="0F172A"/>
-                    </a:solidFill>
-                  </a:tcPr>
-                </a:tc>
-              </a:tr>
-              <a:tr h="300445">
-                <a:tc>
-                  <a:txBody>
-                    <a:bodyPr/>
-                    <a:lstStyle/>
-                    <a:p>
-                      <a:pPr>
-                        <a:defRPr sz="950" b="1">
-                          <a:solidFill>
-                            <a:srgbClr val="F8FAFC"/>
-                          </a:solidFill>
-                          <a:latin typeface="Segoe UI"/>
-                        </a:defRPr>
-                      </a:pPr>
-                      <a:r>
-                        <a:t>Action</a:t>
-                      </a:r>
-                    </a:p>
-                  </a:txBody>
-                  <a:tcPr>
-                    <a:solidFill>
-                      <a:srgbClr val="18202F"/>
-                    </a:solidFill>
-                  </a:tcPr>
-                </a:tc>
-                <a:tc>
-                  <a:txBody>
-                    <a:bodyPr/>
-                    <a:lstStyle/>
-                    <a:p>
-                      <a:pPr>
-                        <a:defRPr sz="950" b="0">
-                          <a:solidFill>
-                            <a:srgbClr val="F8FAFC"/>
-                          </a:solidFill>
-                          <a:latin typeface="Segoe UI"/>
-                        </a:defRPr>
-                      </a:pPr>
-                      <a:r>
-                        <a:t>1 053 M€ (1.05 Md€)</a:t>
-                      </a:r>
-                    </a:p>
-                  </a:txBody>
-                  <a:tcPr>
-                    <a:solidFill>
-                      <a:srgbClr val="18202F"/>
-                    </a:solidFill>
-                  </a:tcPr>
-                </a:tc>
-                <a:tc>
-                  <a:txBody>
-                    <a:bodyPr/>
-                    <a:lstStyle/>
-                    <a:p>
-                      <a:pPr>
-                        <a:defRPr sz="950" b="0">
-                          <a:solidFill>
-                            <a:srgbClr val="F8FAFC"/>
-                          </a:solidFill>
-                          <a:latin typeface="Segoe UI"/>
-                        </a:defRPr>
-                      </a:pPr>
-                      <a:r>
-                        <a:t>7.73 €</a:t>
-                      </a:r>
-                    </a:p>
-                  </a:txBody>
-                  <a:tcPr>
-                    <a:solidFill>
-                      <a:srgbClr val="18202F"/>
-                    </a:solidFill>
-                  </a:tcPr>
-                </a:tc>
-              </a:tr>
-              <a:tr h="300445">
-                <a:tc>
-                  <a:txBody>
-                    <a:bodyPr/>
-                    <a:lstStyle/>
-                    <a:p>
-                      <a:pPr>
-                        <a:defRPr sz="950" b="1">
-                          <a:solidFill>
-                            <a:srgbClr val="F8FAFC"/>
-                          </a:solidFill>
-                          <a:latin typeface="Segoe UI"/>
-                        </a:defRPr>
-                      </a:pPr>
-                      <a:r>
-                        <a:t>Adventure</a:t>
-                      </a:r>
-                    </a:p>
-                  </a:txBody>
-                  <a:tcPr>
-                    <a:solidFill>
-                      <a:srgbClr val="1E293B"/>
-                    </a:solidFill>
-                  </a:tcPr>
-                </a:tc>
-                <a:tc>
-                  <a:txBody>
-                    <a:bodyPr/>
-                    <a:lstStyle/>
-                    <a:p>
-                      <a:pPr>
-                        <a:defRPr sz="950" b="0">
-                          <a:solidFill>
-                            <a:srgbClr val="F8FAFC"/>
-                          </a:solidFill>
-                          <a:latin typeface="Segoe UI"/>
-                        </a:defRPr>
-                      </a:pPr>
-                      <a:r>
-                        <a:t>678 M€</a:t>
-                      </a:r>
-                    </a:p>
-                  </a:txBody>
-                  <a:tcPr>
-                    <a:solidFill>
-                      <a:srgbClr val="1E293B"/>
-                    </a:solidFill>
-                  </a:tcPr>
-                </a:tc>
-                <a:tc>
-                  <a:txBody>
-                    <a:bodyPr/>
-                    <a:lstStyle/>
-                    <a:p>
-                      <a:pPr>
-                        <a:defRPr sz="950" b="0">
-                          <a:solidFill>
-                            <a:srgbClr val="F8FAFC"/>
-                          </a:solidFill>
-                          <a:latin typeface="Segoe UI"/>
-                        </a:defRPr>
-                      </a:pPr>
-                      <a:r>
-                        <a:t>8.01 €</a:t>
-                      </a:r>
-                    </a:p>
-                  </a:txBody>
-                  <a:tcPr>
-                    <a:solidFill>
-                      <a:srgbClr val="1E293B"/>
-                    </a:solidFill>
-                  </a:tcPr>
-                </a:tc>
-              </a:tr>
-              <a:tr h="300445">
-                <a:tc>
-                  <a:txBody>
-                    <a:bodyPr/>
-                    <a:lstStyle/>
-                    <a:p>
-                      <a:pPr>
-                        <a:defRPr sz="950" b="1">
-                          <a:solidFill>
-                            <a:srgbClr val="F8FAFC"/>
-                          </a:solidFill>
-                          <a:latin typeface="Segoe UI"/>
-                        </a:defRPr>
-                      </a:pPr>
-                      <a:r>
-                        <a:t>Indie</a:t>
-                      </a:r>
-                    </a:p>
-                  </a:txBody>
-                  <a:tcPr>
-                    <a:solidFill>
-                      <a:srgbClr val="18202F"/>
-                    </a:solidFill>
-                  </a:tcPr>
-                </a:tc>
-                <a:tc>
-                  <a:txBody>
-                    <a:bodyPr/>
-                    <a:lstStyle/>
-                    <a:p>
-                      <a:pPr>
-                        <a:defRPr sz="950" b="0">
-                          <a:solidFill>
-                            <a:srgbClr val="F8FAFC"/>
-                          </a:solidFill>
-                          <a:latin typeface="Segoe UI"/>
-                        </a:defRPr>
-                      </a:pPr>
-                      <a:r>
-                        <a:t>506 M€</a:t>
-                      </a:r>
-                    </a:p>
-                  </a:txBody>
-                  <a:tcPr>
-                    <a:solidFill>
-                      <a:srgbClr val="18202F"/>
-                    </a:solidFill>
-                  </a:tcPr>
-                </a:tc>
-                <a:tc>
-                  <a:txBody>
-                    <a:bodyPr/>
-                    <a:lstStyle/>
-                    <a:p>
-                      <a:pPr>
-                        <a:defRPr sz="950" b="0">
-                          <a:solidFill>
-                            <a:srgbClr val="F8FAFC"/>
-                          </a:solidFill>
-                          <a:latin typeface="Segoe UI"/>
-                        </a:defRPr>
-                      </a:pPr>
-                      <a:r>
-                        <a:t>6.57 €</a:t>
-                      </a:r>
-                    </a:p>
-                  </a:txBody>
-                  <a:tcPr>
-                    <a:solidFill>
-                      <a:srgbClr val="18202F"/>
-                    </a:solidFill>
-                  </a:tcPr>
-                </a:tc>
-              </a:tr>
-              <a:tr h="300445">
-                <a:tc>
-                  <a:txBody>
-                    <a:bodyPr/>
-                    <a:lstStyle/>
-                    <a:p>
-                      <a:pPr>
-                        <a:defRPr sz="950" b="1">
-                          <a:solidFill>
-                            <a:srgbClr val="F8FAFC"/>
-                          </a:solidFill>
-                          <a:latin typeface="Segoe UI"/>
-                        </a:defRPr>
-                      </a:pPr>
-                      <a:r>
-                        <a:t>RPG</a:t>
-                      </a:r>
-                    </a:p>
-                  </a:txBody>
-                  <a:tcPr>
-                    <a:solidFill>
-                      <a:srgbClr val="1E293B"/>
-                    </a:solidFill>
-                  </a:tcPr>
-                </a:tc>
-                <a:tc>
-                  <a:txBody>
-                    <a:bodyPr/>
-                    <a:lstStyle/>
-                    <a:p>
-                      <a:pPr>
-                        <a:defRPr sz="950" b="0">
-                          <a:solidFill>
-                            <a:srgbClr val="F8FAFC"/>
-                          </a:solidFill>
-                          <a:latin typeface="Segoe UI"/>
-                        </a:defRPr>
-                      </a:pPr>
-                      <a:r>
-                        <a:t>492 M€</a:t>
-                      </a:r>
-                    </a:p>
-                  </a:txBody>
-                  <a:tcPr>
-                    <a:solidFill>
-                      <a:srgbClr val="1E293B"/>
-                    </a:solidFill>
-                  </a:tcPr>
-                </a:tc>
-                <a:tc>
-                  <a:txBody>
-                    <a:bodyPr/>
-                    <a:lstStyle/>
-                    <a:p>
-                      <a:pPr>
-                        <a:defRPr sz="950" b="0">
-                          <a:solidFill>
-                            <a:srgbClr val="F8FAFC"/>
-                          </a:solidFill>
-                          <a:latin typeface="Segoe UI"/>
-                        </a:defRPr>
-                      </a:pPr>
-                      <a:r>
-                        <a:t>9.04 €</a:t>
-                      </a:r>
-                    </a:p>
-                  </a:txBody>
-                  <a:tcPr>
-                    <a:solidFill>
-                      <a:srgbClr val="1E293B"/>
-                    </a:solidFill>
-                  </a:tcPr>
-                </a:tc>
-              </a:tr>
-              <a:tr h="300445">
-                <a:tc>
-                  <a:txBody>
-                    <a:bodyPr/>
-                    <a:lstStyle/>
-                    <a:p>
-                      <a:pPr>
-                        <a:defRPr sz="950" b="1">
-                          <a:solidFill>
-                            <a:srgbClr val="F8FAFC"/>
-                          </a:solidFill>
-                          <a:latin typeface="Segoe UI"/>
-                        </a:defRPr>
-                      </a:pPr>
-                      <a:r>
-                        <a:t>Simulation</a:t>
-                      </a:r>
-                    </a:p>
-                  </a:txBody>
-                  <a:tcPr>
-                    <a:solidFill>
-                      <a:srgbClr val="18202F"/>
-                    </a:solidFill>
-                  </a:tcPr>
-                </a:tc>
-                <a:tc>
-                  <a:txBody>
-                    <a:bodyPr/>
-                    <a:lstStyle/>
-                    <a:p>
-                      <a:pPr>
-                        <a:defRPr sz="950" b="0">
-                          <a:solidFill>
-                            <a:srgbClr val="F8FAFC"/>
-                          </a:solidFill>
-                          <a:latin typeface="Segoe UI"/>
-                        </a:defRPr>
-                      </a:pPr>
-                      <a:r>
-                        <a:t>341 M€</a:t>
-                      </a:r>
-                    </a:p>
-                  </a:txBody>
-                  <a:tcPr>
-                    <a:solidFill>
-                      <a:srgbClr val="18202F"/>
-                    </a:solidFill>
-                  </a:tcPr>
-                </a:tc>
-                <a:tc>
-                  <a:txBody>
-                    <a:bodyPr/>
-                    <a:lstStyle/>
-                    <a:p>
-                      <a:pPr>
-                        <a:defRPr sz="950" b="0">
-                          <a:solidFill>
-                            <a:srgbClr val="F8FAFC"/>
-                          </a:solidFill>
-                          <a:latin typeface="Segoe UI"/>
-                        </a:defRPr>
-                      </a:pPr>
-                      <a:r>
-                        <a:t>9.09 €</a:t>
-                      </a:r>
-                    </a:p>
-                  </a:txBody>
-                  <a:tcPr>
-                    <a:solidFill>
-                      <a:srgbClr val="18202F"/>
-                    </a:solidFill>
-                  </a:tcPr>
-                </a:tc>
-              </a:tr>
-              <a:tr h="300450">
-                <a:tc>
-                  <a:txBody>
-                    <a:bodyPr/>
-                    <a:lstStyle/>
-                    <a:p>
-                      <a:pPr>
-                        <a:defRPr sz="950" b="1">
-                          <a:solidFill>
-                            <a:srgbClr val="F8FAFC"/>
-                          </a:solidFill>
-                          <a:latin typeface="Segoe UI"/>
-                        </a:defRPr>
-                      </a:pPr>
-                      <a:r>
-                        <a:t>Strategy</a:t>
-                      </a:r>
-                    </a:p>
-                  </a:txBody>
-                  <a:tcPr>
-                    <a:solidFill>
-                      <a:srgbClr val="1E293B"/>
-                    </a:solidFill>
-                  </a:tcPr>
-                </a:tc>
-                <a:tc>
-                  <a:txBody>
-                    <a:bodyPr/>
-                    <a:lstStyle/>
-                    <a:p>
-                      <a:pPr>
-                        <a:defRPr sz="950" b="0">
-                          <a:solidFill>
-                            <a:srgbClr val="F8FAFC"/>
-                          </a:solidFill>
-                          <a:latin typeface="Segoe UI"/>
-                        </a:defRPr>
-                      </a:pPr>
-                      <a:r>
-                        <a:t>303 M€</a:t>
-                      </a:r>
-                    </a:p>
-                  </a:txBody>
-                  <a:tcPr>
-                    <a:solidFill>
-                      <a:srgbClr val="1E293B"/>
-                    </a:solidFill>
-                  </a:tcPr>
-                </a:tc>
-                <a:tc>
-                  <a:txBody>
-                    <a:bodyPr/>
-                    <a:lstStyle/>
-                    <a:p>
-                      <a:pPr>
-                        <a:defRPr sz="950" b="0">
-                          <a:solidFill>
-                            <a:srgbClr val="F8FAFC"/>
-                          </a:solidFill>
-                          <a:latin typeface="Segoe UI"/>
-                        </a:defRPr>
-                      </a:pPr>
-                      <a:r>
-                        <a:t>8.40 €</a:t>
-                      </a:r>
-                    </a:p>
-                  </a:txBody>
-                  <a:tcPr>
-                    <a:solidFill>
-                      <a:srgbClr val="1E293B"/>
-                    </a:solidFill>
-                  </a:tcPr>
-                </a:tc>
-              </a:tr>
-            </a:tbl>
-          </a:graphicData>
-        </a:graphic>
-      </p:graphicFrame>
-      <p:sp>
-        <p:nvSpPr>
-          <p:cNvPr id="10" name="TextBox 9"/>
-          <p:cNvSpPr txBox="1"/>
-          <p:nvPr/>
-        </p:nvSpPr>
-        <p:spPr>
-          <a:xfrm>
-            <a:off x="914400" y="4206240"/>
-            <a:ext cx="5120640" cy="1828800"/>
-          </a:xfrm>
-          <a:prstGeom prst="rect">
-            <a:avLst/>
-          </a:prstGeom>
-          <a:noFill/>
-        </p:spPr>
-        <p:txBody>
-          <a:bodyPr wrap="square">
-            <a:spAutoFit/>
-          </a:bodyPr>
-          <a:lstStyle/>
-          <a:p>
-            <a:pPr>
-              <a:defRPr sz="1000" b="1">
-                <a:solidFill>
-                  <a:srgbClr val="10B981"/>
-                </a:solidFill>
-                <a:latin typeface="Segoe UI"/>
+              </a:defRPr>
+            </a:pPr>
+            <a:r>
+              <a:t>PROXY CA (PRIX × AVIS) &amp; ENVIRONNEMENT</a:t>
+            </a:r>
+          </a:p>
+          <a:p>
+            <a:pPr>
+              <a:spcBef>
+                <a:spcPts val="600"/>
+              </a:spcBef>
+              <a:defRPr b="1" sz="1050">
+                <a:solidFill>
+                  <a:srgbClr val="F8FAFC"/>
+                </a:solidFill>
               </a:defRPr>
             </a:pPr>
             <a:r>
@@ -9565,24 +7085,25 @@
           </a:p>
           <a:p>
             <a:pPr>
-              <a:defRPr sz="900">
+              <a:defRPr sz="950">
+                <a:solidFill>
+                  <a:srgbClr val="94A3B8"/>
+                </a:solidFill>
+              </a:defRPr>
+            </a:pPr>
+            <a:r>
+              <a:t>Le genre Action écrase le marché avec plus de 1.05 Milliard d'euros de proxy de revenus cumulés.</a:t>
+            </a:r>
+          </a:p>
+          <a:p>
+            <a:pPr>
+              <a:spcBef>
+                <a:spcPts val="600"/>
+              </a:spcBef>
+              <a:defRPr b="1" sz="1050">
                 <a:solidFill>
                   <a:srgbClr val="F8FAFC"/>
                 </a:solidFill>
-                <a:latin typeface="Segoe UI"/>
-              </a:defRPr>
-            </a:pPr>
-            <a:r>
-              <a:t>Le genre Action écrase le marché avec plus d'un milliard d'euros de proxy de revenus.</a:t>
-            </a:r>
-          </a:p>
-          <a:p>
-            <a:pPr>
-              <a:defRPr sz="1000" b="1">
-                <a:solidFill>
-                  <a:srgbClr val="10B981"/>
-                </a:solidFill>
-                <a:latin typeface="Segoe UI"/>
               </a:defRPr>
             </a:pPr>
             <a:r>
@@ -9591,29 +7112,136 @@
           </a:p>
           <a:p>
             <a:pPr>
-              <a:defRPr sz="900">
+              <a:defRPr sz="950">
+                <a:solidFill>
+                  <a:srgbClr val="94A3B8"/>
+                </a:solidFill>
+              </a:defRPr>
+            </a:pPr>
+            <a:r>
+              <a:t>Le RPG affiche le prix moyen le plus élevé (9.04 €) pour une rentabilité unitaire 2.5 fois supérieure à l'Indie.</a:t>
+            </a:r>
+          </a:p>
+          <a:p>
+            <a:pPr>
+              <a:spcBef>
+                <a:spcPts val="600"/>
+              </a:spcBef>
+              <a:defRPr b="1" sz="1050">
                 <a:solidFill>
                   <a:srgbClr val="F8FAFC"/>
                 </a:solidFill>
-                <a:latin typeface="Segoe UI"/>
-              </a:defRPr>
-            </a:pPr>
-            <a:r>
-              <a:t>Le RPG affiche le prix moyen le plus élevé (9.04 €) pour une rentabilité unitaire 2.5 fois supérieure à l'Indie.</a:t>
-            </a:r>
-          </a:p>
-        </p:txBody>
-      </p:sp>
-      <p:sp>
-        <p:nvSpPr>
-          <p:cNvPr id="11" name="Rounded Rectangle 10"/>
+              </a:defRPr>
+            </a:pPr>
+            <a:r>
+              <a:t>Windows Universel :</a:t>
+            </a:r>
+          </a:p>
+          <a:p>
+            <a:pPr>
+              <a:defRPr sz="950">
+                <a:solidFill>
+                  <a:srgbClr val="94A3B8"/>
+                </a:solidFill>
+              </a:defRPr>
+            </a:pPr>
+            <a:r>
+              <a:t>99.97% du catalogue (55 676 jeux) supporte Windows. Standard incontournable.</a:t>
+            </a:r>
+          </a:p>
+          <a:p>
+            <a:pPr>
+              <a:spcBef>
+                <a:spcPts val="600"/>
+              </a:spcBef>
+              <a:defRPr b="1" sz="1050">
+                <a:solidFill>
+                  <a:srgbClr val="F8FAFC"/>
+                </a:solidFill>
+              </a:defRPr>
+            </a:pPr>
+            <a:r>
+              <a:t>MacOS &amp; Linux :</a:t>
+            </a:r>
+          </a:p>
+          <a:p>
+            <a:pPr>
+              <a:defRPr sz="950">
+                <a:solidFill>
+                  <a:srgbClr val="94A3B8"/>
+                </a:solidFill>
+              </a:defRPr>
+            </a:pPr>
+            <a:r>
+              <a:t>MacOS à 22.9% (12 770 jeux). Linux à 15.2% (8 458 jeux), en forte accélération grâce au Steam Deck.</a:t>
+            </a:r>
+          </a:p>
+          <a:p>
+            <a:pPr>
+              <a:spcBef>
+                <a:spcPts val="600"/>
+              </a:spcBef>
+              <a:defRPr b="1" sz="1050">
+                <a:solidFill>
+                  <a:srgbClr val="F8FAFC"/>
+                </a:solidFill>
+              </a:defRPr>
+            </a:pPr>
+            <a:r>
+              <a:t>Top Langues Mondiales :</a:t>
+            </a:r>
+          </a:p>
+          <a:p>
+            <a:pPr>
+              <a:defRPr sz="950">
+                <a:solidFill>
+                  <a:srgbClr val="94A3B8"/>
+                </a:solidFill>
+              </a:defRPr>
+            </a:pPr>
+            <a:r>
+              <a:t>Anglais (99.0%), Allemand (25.2%), Chinois Simplifié (24.5%), Français (24.1%), Russe (23.2%).</a:t>
+            </a:r>
+          </a:p>
+          <a:p>
+            <a:pPr>
+              <a:spcBef>
+                <a:spcPts val="600"/>
+              </a:spcBef>
+              <a:defRPr b="1" sz="1050">
+                <a:solidFill>
+                  <a:srgbClr val="F8FAFC"/>
+                </a:solidFill>
+              </a:defRPr>
+            </a:pPr>
+            <a:r>
+              <a:t>Opportunité Steam Deck :</a:t>
+            </a:r>
+          </a:p>
+          <a:p>
+            <a:pPr>
+              <a:defRPr sz="950">
+                <a:solidFill>
+                  <a:srgbClr val="94A3B8"/>
+                </a:solidFill>
+              </a:defRPr>
+            </a:pPr>
+            <a:r>
+              <a:t>Le label 'Deck Verified' génère un boost moyen de +30% de ventes sans coût de portage additionnel grâce à la couche Proton.</a:t>
+            </a:r>
+          </a:p>
+        </p:txBody>
+      </p:sp>
+      <p:sp>
+        <p:nvSpPr>
+          <p:cNvPr id="9" name="Rounded Rectangle 8"/>
           <p:cNvSpPr/>
           <p:nvPr/>
         </p:nvSpPr>
         <p:spPr>
           <a:xfrm>
-            <a:off x="6492240" y="1371600"/>
-            <a:ext cx="4967935" cy="4754880"/>
+            <a:off x="6217920" y="1371600"/>
+            <a:ext cx="5242255" cy="4846320"/>
           </a:xfrm>
           <a:prstGeom prst="roundRect">
             <a:avLst/>
@@ -9621,7 +7249,7 @@
           <a:solidFill>
             <a:srgbClr val="1E293B"/>
           </a:solidFill>
-          <a:ln w="19050">
+          <a:ln w="12700">
             <a:solidFill>
               <a:srgbClr val="334155"/>
             </a:solidFill>
@@ -9649,6 +7277,75 @@
           </a:p>
         </p:txBody>
       </p:sp>
+      <p:pic>
+        <p:nvPicPr>
+          <p:cNvPr id="10" name="Picture 9" descr="steam_chart_rev_os.png"/>
+          <p:cNvPicPr>
+            <a:picLocks noChangeAspect="1"/>
+          </p:cNvPicPr>
+          <p:nvPr/>
+        </p:nvPicPr>
+        <p:blipFill>
+          <a:blip r:embed="rId2"/>
+          <a:stretch>
+            <a:fillRect/>
+          </a:stretch>
+        </p:blipFill>
+        <p:spPr>
+          <a:xfrm>
+            <a:off x="6400800" y="1554480"/>
+            <a:ext cx="4876495" cy="2020824"/>
+          </a:xfrm>
+          <a:prstGeom prst="rect">
+            <a:avLst/>
+          </a:prstGeom>
+        </p:spPr>
+      </p:pic>
+      <p:sp>
+        <p:nvSpPr>
+          <p:cNvPr id="11" name="Rounded Rectangle 10"/>
+          <p:cNvSpPr/>
+          <p:nvPr/>
+        </p:nvSpPr>
+        <p:spPr>
+          <a:xfrm>
+            <a:off x="6400800" y="3749039"/>
+            <a:ext cx="4876495" cy="2286000"/>
+          </a:xfrm>
+          <a:prstGeom prst="roundRect">
+            <a:avLst/>
+          </a:prstGeom>
+          <a:solidFill>
+            <a:srgbClr val="0F172A"/>
+          </a:solidFill>
+          <a:ln w="12700">
+            <a:solidFill>
+              <a:srgbClr val="334155"/>
+            </a:solidFill>
+          </a:ln>
+        </p:spPr>
+        <p:style>
+          <a:lnRef idx="1">
+            <a:schemeClr val="accent1"/>
+          </a:lnRef>
+          <a:fillRef idx="3">
+            <a:schemeClr val="accent1"/>
+          </a:fillRef>
+          <a:effectRef idx="2">
+            <a:schemeClr val="accent1"/>
+          </a:effectRef>
+          <a:fontRef idx="minor">
+            <a:schemeClr val="lt1"/>
+          </a:fontRef>
+        </p:style>
+        <p:txBody>
+          <a:bodyPr rtlCol="0" anchor="ctr"/>
+          <a:lstStyle/>
+          <a:p>
+            <a:pPr algn="ctr"/>
+          </a:p>
+        </p:txBody>
+      </p:sp>
       <p:sp>
         <p:nvSpPr>
           <p:cNvPr id="12" name="TextBox 11"/>
@@ -9657,8 +7354,8 @@
         </p:nvSpPr>
         <p:spPr>
           <a:xfrm>
-            <a:off x="6675120" y="1536192"/>
-            <a:ext cx="4602175" cy="365760"/>
+            <a:off x="6583680" y="3840480"/>
+            <a:ext cx="4510735" cy="2103120"/>
           </a:xfrm>
           <a:prstGeom prst="rect">
             <a:avLst/>
@@ -9674,138 +7371,57 @@
             <a:pPr>
               <a:defRPr sz="1100" b="1">
                 <a:solidFill>
-                  <a:srgbClr val="38BDF8"/>
-                </a:solidFill>
-                <a:latin typeface="Segoe UI"/>
-              </a:defRPr>
-            </a:pPr>
-            <a:r>
-              <a:t>MULTI-PLATEFORMES &amp; LOCALISATION</a:t>
-            </a:r>
-          </a:p>
-        </p:txBody>
-      </p:sp>
-      <p:sp>
-        <p:nvSpPr>
-          <p:cNvPr id="13" name="TextBox 12"/>
-          <p:cNvSpPr txBox="1"/>
-          <p:nvPr/>
-        </p:nvSpPr>
-        <p:spPr>
-          <a:xfrm>
-            <a:off x="6675120" y="1920240"/>
-            <a:ext cx="4602175" cy="3931920"/>
-          </a:xfrm>
-          <a:prstGeom prst="rect">
-            <a:avLst/>
-          </a:prstGeom>
-          <a:noFill/>
-        </p:spPr>
-        <p:txBody>
-          <a:bodyPr wrap="square">
-            <a:spAutoFit/>
-          </a:bodyPr>
-          <a:lstStyle/>
-          <a:p>
-            <a:pPr>
-              <a:defRPr sz="1000" b="1">
-                <a:solidFill>
-                  <a:srgbClr val="38BDF8"/>
-                </a:solidFill>
-                <a:latin typeface="Segoe UI"/>
-              </a:defRPr>
-            </a:pPr>
-            <a:r>
-              <a:t>Couverture OS :</a:t>
-            </a:r>
-          </a:p>
-          <a:p>
-            <a:pPr>
-              <a:defRPr sz="900">
+                  <a:srgbClr val="10B981"/>
+                </a:solidFill>
+              </a:defRPr>
+            </a:pPr>
+            <a:r>
+              <a:t>SYNTHÈSE MULTI-PLATEFORMES &amp; LOCALISATION</a:t>
+            </a:r>
+          </a:p>
+          <a:p>
+            <a:pPr>
+              <a:spcBef>
+                <a:spcPts val="400"/>
+              </a:spcBef>
+              <a:defRPr sz="950">
                 <a:solidFill>
                   <a:srgbClr val="F8FAFC"/>
                 </a:solidFill>
-                <a:latin typeface="Segoe UI"/>
-              </a:defRPr>
-            </a:pPr>
-            <a:r>
-              <a:t>• Windows : 99.97% (55 676 jeux) — Standard universel.</a:t>
-            </a:r>
-            <a:br/>
-            <a:r>
-              <a:t>• MacOS : 22.9% (12 770 jeux) — Part captive bureautique.</a:t>
-            </a:r>
-            <a:br/>
-            <a:r>
-              <a:t>• Linux : 15.2% (8 458 jeux) — Boom porté par le Steam Deck.</a:t>
-            </a:r>
-          </a:p>
-          <a:p>
-            <a:pPr>
-              <a:defRPr sz="1000" b="1">
-                <a:solidFill>
-                  <a:srgbClr val="38BDF8"/>
-                </a:solidFill>
-                <a:latin typeface="Segoe UI"/>
-              </a:defRPr>
-            </a:pPr>
-            <a:r>
-              <a:t>Top 5 Langues Mondiales :</a:t>
-            </a:r>
-          </a:p>
-          <a:p>
-            <a:pPr>
-              <a:defRPr sz="900">
+              </a:defRPr>
+            </a:pPr>
+            <a:r>
+              <a:t>• Action-RPG Dominant : L'association de l'Action (1 053 M€) et du RPG (492 M€) combine le volume de masse et la valeur unitaire élevée.</a:t>
+            </a:r>
+          </a:p>
+          <a:p>
+            <a:pPr>
+              <a:spcBef>
+                <a:spcPts val="400"/>
+              </a:spcBef>
+              <a:defRPr sz="950">
                 <a:solidFill>
                   <a:srgbClr val="F8FAFC"/>
                 </a:solidFill>
-                <a:latin typeface="Segoe UI"/>
-              </a:defRPr>
-            </a:pPr>
-            <a:r>
-              <a:t>• Anglais : 55 123 (99.0%)</a:t>
-            </a:r>
-            <a:br/>
-            <a:r>
-              <a:t>• Allemand : 14 021 (25.2%)</a:t>
-            </a:r>
-            <a:br/>
-            <a:r>
-              <a:t>• Chinois : 13 658 (24.5%)</a:t>
-            </a:r>
-            <a:br/>
-            <a:r>
-              <a:t>• Français : 13 428 (24.1%)</a:t>
-            </a:r>
-            <a:br/>
-            <a:r>
-              <a:t>• Russe : 12 925 (23.2%)</a:t>
-            </a:r>
-          </a:p>
-          <a:p>
-            <a:pPr>
-              <a:defRPr sz="1000" b="1">
-                <a:solidFill>
-                  <a:srgbClr val="38BDF8"/>
-                </a:solidFill>
-                <a:latin typeface="Segoe UI"/>
-              </a:defRPr>
-            </a:pPr>
-            <a:r>
-              <a:t>Opportunité Steam Deck :</a:t>
-            </a:r>
-          </a:p>
-          <a:p>
-            <a:pPr>
-              <a:defRPr sz="900">
+              </a:defRPr>
+            </a:pPr>
+            <a:r>
+              <a:t>• Pivot Chinois Simplifié : Avec 13 658 jeux et une croissance record des joueurs asiatiques, le doublage/sous-titrage chinois est un prérequis obligatoire.</a:t>
+            </a:r>
+          </a:p>
+          <a:p>
+            <a:pPr>
+              <a:spcBef>
+                <a:spcPts val="400"/>
+              </a:spcBef>
+              <a:defRPr sz="950">
                 <a:solidFill>
                   <a:srgbClr val="F8FAFC"/>
                 </a:solidFill>
-                <a:latin typeface="Segoe UI"/>
-              </a:defRPr>
-            </a:pPr>
-            <a:r>
-              <a:t>Le label 'Deck Verified' apporte un boost de ventes de +30% sans coût de portage lourd grâce à Proton.</a:t>
+              </a:defRPr>
+            </a:pPr>
+            <a:r>
+              <a:t>• Compatibilité Steam Deck : Optimiser le framerate à 40/60 fps et les contrôles tactiles dès le lancement pour obtenir le badge vert.</a:t>
             </a:r>
           </a:p>
         </p:txBody>
@@ -9888,7 +7504,7 @@
           <a:noFill/>
         </p:spPr>
         <p:txBody>
-          <a:bodyPr wrap="square">
+          <a:bodyPr wrap="square" lIns="0" tIns="0" rIns="0" bIns="0">
             <a:spAutoFit/>
           </a:bodyPr>
           <a:lstStyle/>
@@ -9924,13 +7540,13 @@
           <a:noFill/>
         </p:spPr>
         <p:txBody>
-          <a:bodyPr wrap="square">
+          <a:bodyPr wrap="square" lIns="0" tIns="0" rIns="0" bIns="0">
             <a:spAutoFit/>
           </a:bodyPr>
           <a:lstStyle/>
           <a:p>
             <a:pPr>
-              <a:defRPr sz="2100" b="1">
+              <a:defRPr sz="1800" b="1">
                 <a:solidFill>
                   <a:srgbClr val="F8FAFC"/>
                 </a:solidFill>
@@ -9960,7 +7576,7 @@
           <a:noFill/>
         </p:spPr>
         <p:txBody>
-          <a:bodyPr wrap="square">
+          <a:bodyPr wrap="none" lIns="0" tIns="0" rIns="0" bIns="0">
             <a:spAutoFit/>
           </a:bodyPr>
           <a:lstStyle/>
@@ -9996,21 +7612,21 @@
           <a:noFill/>
         </p:spPr>
         <p:txBody>
-          <a:bodyPr wrap="square">
+          <a:bodyPr wrap="none" lIns="0" tIns="0" rIns="0" bIns="0">
             <a:spAutoFit/>
           </a:bodyPr>
           <a:lstStyle/>
           <a:p>
             <a:pPr>
-              <a:defRPr sz="1000">
-                <a:solidFill>
-                  <a:srgbClr val="64748B"/>
+              <a:defRPr sz="950">
+                <a:solidFill>
+                  <a:srgbClr val="94A3B8"/>
                 </a:solidFill>
                 <a:latin typeface="Segoe UI"/>
               </a:defRPr>
             </a:pPr>
             <a:r>
-              <a:t>Christopher GILLERON  |  Steam Video Games Analysis (PySpark / Databricks)  |  Certification CDSD Bloc 2</a:t>
+              <a:t>Christopher GILLERON  |  Steam Video Games Analysis (PySpark / Databricks)  |  Certification CDSD Bloc 2  |  Temps alloué : 5 min</a:t>
             </a:r>
           </a:p>
         </p:txBody>
@@ -10024,7 +7640,7 @@
         <p:spPr>
           <a:xfrm>
             <a:off x="731520" y="1371600"/>
-            <a:ext cx="5242255" cy="2377440"/>
+            <a:ext cx="5212080" cy="2286000"/>
           </a:xfrm>
           <a:prstGeom prst="roundRect">
             <a:avLst/>
@@ -10032,9 +7648,9 @@
           <a:solidFill>
             <a:srgbClr val="1E293B"/>
           </a:solidFill>
-          <a:ln w="19050">
+          <a:ln w="12700">
             <a:solidFill>
-              <a:srgbClr val="10B981"/>
+              <a:srgbClr val="334155"/>
             </a:solidFill>
           </a:ln>
         </p:spPr>
@@ -10068,8 +7684,8 @@
         </p:nvSpPr>
         <p:spPr>
           <a:xfrm>
-            <a:off x="914400" y="1536192"/>
-            <a:ext cx="4876495" cy="365760"/>
+            <a:off x="914400" y="1508760"/>
+            <a:ext cx="4846320" cy="2011680"/>
           </a:xfrm>
           <a:prstGeom prst="rect">
             <a:avLst/>
@@ -10083,47 +7699,25 @@
           <a:lstStyle/>
           <a:p>
             <a:pPr>
-              <a:defRPr sz="1100" b="1">
+              <a:defRPr sz="1200" b="1">
                 <a:solidFill>
                   <a:srgbClr val="38BDF8"/>
                 </a:solidFill>
-                <a:latin typeface="Segoe UI"/>
               </a:defRPr>
             </a:pPr>
             <a:r>
               <a:t>01 | POSITIONNEMENT PRIX : 24.99 € - 29.99 €</a:t>
             </a:r>
           </a:p>
-        </p:txBody>
-      </p:sp>
-      <p:sp>
-        <p:nvSpPr>
-          <p:cNvPr id="9" name="TextBox 8"/>
-          <p:cNvSpPr txBox="1"/>
-          <p:nvPr/>
-        </p:nvSpPr>
-        <p:spPr>
-          <a:xfrm>
-            <a:off x="914400" y="1874520"/>
-            <a:ext cx="4876495" cy="1737360"/>
-          </a:xfrm>
-          <a:prstGeom prst="rect">
-            <a:avLst/>
-          </a:prstGeom>
-          <a:noFill/>
-        </p:spPr>
-        <p:txBody>
-          <a:bodyPr wrap="square">
-            <a:spAutoFit/>
-          </a:bodyPr>
-          <a:lstStyle/>
-          <a:p>
-            <a:pPr>
-              <a:defRPr sz="1000" b="1">
-                <a:solidFill>
-                  <a:srgbClr val="10B981"/>
-                </a:solidFill>
-                <a:latin typeface="Segoe UI"/>
+          <a:p>
+            <a:pPr>
+              <a:spcBef>
+                <a:spcPts val="600"/>
+              </a:spcBef>
+              <a:defRPr b="1" sz="1000">
+                <a:solidFill>
+                  <a:srgbClr val="F8FAFC"/>
+                </a:solidFill>
               </a:defRPr>
             </a:pPr>
             <a:r>
@@ -10132,24 +7726,25 @@
           </a:p>
           <a:p>
             <a:pPr>
-              <a:defRPr sz="900">
+              <a:defRPr sz="950">
+                <a:solidFill>
+                  <a:srgbClr val="94A3B8"/>
+                </a:solidFill>
+              </a:defRPr>
+            </a:pPr>
+            <a:r>
+              <a:t>Évite la guerre des prix de l'ultra-budget (&lt;15€) tout en abaissant la barrière psychologique des 60€+.</a:t>
+            </a:r>
+          </a:p>
+          <a:p>
+            <a:pPr>
+              <a:spcBef>
+                <a:spcPts val="400"/>
+              </a:spcBef>
+              <a:defRPr b="1" sz="1000">
                 <a:solidFill>
                   <a:srgbClr val="F8FAFC"/>
                 </a:solidFill>
-                <a:latin typeface="Segoe UI"/>
-              </a:defRPr>
-            </a:pPr>
-            <a:r>
-              <a:t>Évite la guerre des prix de l'ultra-budget (&lt;15€) tout en abaissant la barrière psychologique des 60€+.</a:t>
-            </a:r>
-          </a:p>
-          <a:p>
-            <a:pPr>
-              <a:defRPr sz="1000" b="1">
-                <a:solidFill>
-                  <a:srgbClr val="10B981"/>
-                </a:solidFill>
-                <a:latin typeface="Segoe UI"/>
               </a:defRPr>
             </a:pPr>
             <a:r>
@@ -10158,11 +7753,10 @@
           </a:p>
           <a:p>
             <a:pPr>
-              <a:defRPr sz="900">
-                <a:solidFill>
-                  <a:srgbClr val="F8FAFC"/>
-                </a:solidFill>
-                <a:latin typeface="Segoe UI"/>
+              <a:defRPr sz="950">
+                <a:solidFill>
+                  <a:srgbClr val="94A3B8"/>
+                </a:solidFill>
               </a:defRPr>
             </a:pPr>
             <a:r>
@@ -10173,14 +7767,14 @@
       </p:sp>
       <p:sp>
         <p:nvSpPr>
-          <p:cNvPr id="10" name="Rounded Rectangle 9"/>
+          <p:cNvPr id="9" name="Rounded Rectangle 8"/>
           <p:cNvSpPr/>
           <p:nvPr/>
         </p:nvSpPr>
         <p:spPr>
           <a:xfrm>
             <a:off x="6217920" y="1371600"/>
-            <a:ext cx="5242255" cy="2377440"/>
+            <a:ext cx="5212080" cy="2286000"/>
           </a:xfrm>
           <a:prstGeom prst="roundRect">
             <a:avLst/>
@@ -10188,9 +7782,9 @@
           <a:solidFill>
             <a:srgbClr val="1E293B"/>
           </a:solidFill>
-          <a:ln w="19050">
+          <a:ln w="12700">
             <a:solidFill>
-              <a:srgbClr val="38BDF8"/>
+              <a:srgbClr val="334155"/>
             </a:solidFill>
           </a:ln>
         </p:spPr>
@@ -10218,14 +7812,14 @@
       </p:sp>
       <p:sp>
         <p:nvSpPr>
-          <p:cNvPr id="11" name="TextBox 10"/>
+          <p:cNvPr id="10" name="TextBox 9"/>
           <p:cNvSpPr txBox="1"/>
           <p:nvPr/>
         </p:nvSpPr>
         <p:spPr>
           <a:xfrm>
-            <a:off x="6400800" y="1536192"/>
-            <a:ext cx="4876495" cy="365760"/>
+            <a:off x="6400800" y="1508760"/>
+            <a:ext cx="4846320" cy="2011680"/>
           </a:xfrm>
           <a:prstGeom prst="rect">
             <a:avLst/>
@@ -10239,47 +7833,25 @@
           <a:lstStyle/>
           <a:p>
             <a:pPr>
-              <a:defRPr sz="1100" b="1">
-                <a:solidFill>
-                  <a:srgbClr val="38BDF8"/>
-                </a:solidFill>
-                <a:latin typeface="Segoe UI"/>
+              <a:defRPr sz="1200" b="1">
+                <a:solidFill>
+                  <a:srgbClr val="10B981"/>
+                </a:solidFill>
               </a:defRPr>
             </a:pPr>
             <a:r>
               <a:t>02 | GENRE CIBLE : L'ACTION-RPG HYBRIDE</a:t>
             </a:r>
           </a:p>
-        </p:txBody>
-      </p:sp>
-      <p:sp>
-        <p:nvSpPr>
-          <p:cNvPr id="12" name="TextBox 11"/>
-          <p:cNvSpPr txBox="1"/>
-          <p:nvPr/>
-        </p:nvSpPr>
-        <p:spPr>
-          <a:xfrm>
-            <a:off x="6400800" y="1874520"/>
-            <a:ext cx="4876495" cy="1737360"/>
-          </a:xfrm>
-          <a:prstGeom prst="rect">
-            <a:avLst/>
-          </a:prstGeom>
-          <a:noFill/>
-        </p:spPr>
-        <p:txBody>
-          <a:bodyPr wrap="square">
-            <a:spAutoFit/>
-          </a:bodyPr>
-          <a:lstStyle/>
-          <a:p>
-            <a:pPr>
-              <a:defRPr sz="1000" b="1">
-                <a:solidFill>
-                  <a:srgbClr val="38BDF8"/>
-                </a:solidFill>
-                <a:latin typeface="Segoe UI"/>
+          <a:p>
+            <a:pPr>
+              <a:spcBef>
+                <a:spcPts val="600"/>
+              </a:spcBef>
+              <a:defRPr b="1" sz="1000">
+                <a:solidFill>
+                  <a:srgbClr val="F8FAFC"/>
+                </a:solidFill>
               </a:defRPr>
             </a:pPr>
             <a:r>
@@ -10288,24 +7860,25 @@
           </a:p>
           <a:p>
             <a:pPr>
-              <a:defRPr sz="900">
+              <a:defRPr sz="950">
+                <a:solidFill>
+                  <a:srgbClr val="94A3B8"/>
+                </a:solidFill>
+              </a:defRPr>
+            </a:pPr>
+            <a:r>
+              <a:t>Action = 1er proxy revenus (1.05 Md€). RPG = prix moyen le plus élevé (9.04€) et 73% de satisfaction.</a:t>
+            </a:r>
+          </a:p>
+          <a:p>
+            <a:pPr>
+              <a:spcBef>
+                <a:spcPts val="400"/>
+              </a:spcBef>
+              <a:defRPr b="1" sz="1000">
                 <a:solidFill>
                   <a:srgbClr val="F8FAFC"/>
                 </a:solidFill>
-                <a:latin typeface="Segoe UI"/>
-              </a:defRPr>
-            </a:pPr>
-            <a:r>
-              <a:t>Action = 1er proxy revenus (1.05 Md€). RPG = prix moyen le plus élevé (9.04€) et 73% de satisfaction.</a:t>
-            </a:r>
-          </a:p>
-          <a:p>
-            <a:pPr>
-              <a:defRPr sz="1000" b="1">
-                <a:solidFill>
-                  <a:srgbClr val="38BDF8"/>
-                </a:solidFill>
-                <a:latin typeface="Segoe UI"/>
               </a:defRPr>
             </a:pPr>
             <a:r>
@@ -10314,11 +7887,10 @@
           </a:p>
           <a:p>
             <a:pPr>
-              <a:defRPr sz="900">
-                <a:solidFill>
-                  <a:srgbClr val="F8FAFC"/>
-                </a:solidFill>
-                <a:latin typeface="Segoe UI"/>
+              <a:defRPr sz="950">
+                <a:solidFill>
+                  <a:srgbClr val="94A3B8"/>
+                </a:solidFill>
               </a:defRPr>
             </a:pPr>
             <a:r>
@@ -10329,14 +7901,14 @@
       </p:sp>
       <p:sp>
         <p:nvSpPr>
-          <p:cNvPr id="13" name="Rounded Rectangle 12"/>
+          <p:cNvPr id="11" name="Rounded Rectangle 10"/>
           <p:cNvSpPr/>
           <p:nvPr/>
         </p:nvSpPr>
         <p:spPr>
           <a:xfrm>
             <a:off x="731520" y="3931920"/>
-            <a:ext cx="5242255" cy="2377440"/>
+            <a:ext cx="5212080" cy="2286000"/>
           </a:xfrm>
           <a:prstGeom prst="roundRect">
             <a:avLst/>
@@ -10344,9 +7916,9 @@
           <a:solidFill>
             <a:srgbClr val="1E293B"/>
           </a:solidFill>
-          <a:ln w="19050">
+          <a:ln w="12700">
             <a:solidFill>
-              <a:srgbClr val="F59E0B"/>
+              <a:srgbClr val="334155"/>
             </a:solidFill>
           </a:ln>
         </p:spPr>
@@ -10374,14 +7946,14 @@
       </p:sp>
       <p:sp>
         <p:nvSpPr>
-          <p:cNvPr id="14" name="TextBox 13"/>
+          <p:cNvPr id="12" name="TextBox 11"/>
           <p:cNvSpPr txBox="1"/>
           <p:nvPr/>
         </p:nvSpPr>
         <p:spPr>
           <a:xfrm>
-            <a:off x="914400" y="4096512"/>
-            <a:ext cx="4876495" cy="365760"/>
+            <a:off x="914400" y="4069080"/>
+            <a:ext cx="4846320" cy="2011680"/>
           </a:xfrm>
           <a:prstGeom prst="rect">
             <a:avLst/>
@@ -10395,47 +7967,25 @@
           <a:lstStyle/>
           <a:p>
             <a:pPr>
-              <a:defRPr sz="1100" b="1">
-                <a:solidFill>
-                  <a:srgbClr val="38BDF8"/>
-                </a:solidFill>
-                <a:latin typeface="Segoe UI"/>
+              <a:defRPr sz="1200" b="1">
+                <a:solidFill>
+                  <a:srgbClr val="F59E0B"/>
+                </a:solidFill>
               </a:defRPr>
             </a:pPr>
             <a:r>
               <a:t>03 | CALENDRIER DES SOLDES PROGRESSIF</a:t>
             </a:r>
           </a:p>
-        </p:txBody>
-      </p:sp>
-      <p:sp>
-        <p:nvSpPr>
-          <p:cNvPr id="15" name="TextBox 14"/>
-          <p:cNvSpPr txBox="1"/>
-          <p:nvPr/>
-        </p:nvSpPr>
-        <p:spPr>
-          <a:xfrm>
-            <a:off x="914400" y="4434840"/>
-            <a:ext cx="4876495" cy="1737360"/>
-          </a:xfrm>
-          <a:prstGeom prst="rect">
-            <a:avLst/>
-          </a:prstGeom>
-          <a:noFill/>
-        </p:spPr>
-        <p:txBody>
-          <a:bodyPr wrap="square">
-            <a:spAutoFit/>
-          </a:bodyPr>
-          <a:lstStyle/>
-          <a:p>
-            <a:pPr>
-              <a:defRPr sz="1000" b="1">
-                <a:solidFill>
-                  <a:srgbClr val="F59E0B"/>
-                </a:solidFill>
-                <a:latin typeface="Segoe UI"/>
+          <a:p>
+            <a:pPr>
+              <a:spcBef>
+                <a:spcPts val="600"/>
+              </a:spcBef>
+              <a:defRPr b="1" sz="1000">
+                <a:solidFill>
+                  <a:srgbClr val="F8FAFC"/>
+                </a:solidFill>
               </a:defRPr>
             </a:pPr>
             <a:r>
@@ -10444,24 +7994,25 @@
           </a:p>
           <a:p>
             <a:pPr>
-              <a:defRPr sz="900">
+              <a:defRPr sz="950">
+                <a:solidFill>
+                  <a:srgbClr val="94A3B8"/>
+                </a:solidFill>
+              </a:defRPr>
+            </a:pPr>
+            <a:r>
+              <a:t>Aucune promotion avant 90 jours pour préserver les marges Day One.</a:t>
+            </a:r>
+          </a:p>
+          <a:p>
+            <a:pPr>
+              <a:spcBef>
+                <a:spcPts val="400"/>
+              </a:spcBef>
+              <a:defRPr b="1" sz="1000">
                 <a:solidFill>
                   <a:srgbClr val="F8FAFC"/>
                 </a:solidFill>
-                <a:latin typeface="Segoe UI"/>
-              </a:defRPr>
-            </a:pPr>
-            <a:r>
-              <a:t>Aucune promotion avant 90 jours pour préserver les marges Day One.</a:t>
-            </a:r>
-          </a:p>
-          <a:p>
-            <a:pPr>
-              <a:defRPr sz="1000" b="1">
-                <a:solidFill>
-                  <a:srgbClr val="F59E0B"/>
-                </a:solidFill>
-                <a:latin typeface="Segoe UI"/>
               </a:defRPr>
             </a:pPr>
             <a:r>
@@ -10470,11 +8021,10 @@
           </a:p>
           <a:p>
             <a:pPr>
-              <a:defRPr sz="900">
-                <a:solidFill>
-                  <a:srgbClr val="F8FAFC"/>
-                </a:solidFill>
-                <a:latin typeface="Segoe UI"/>
+              <a:defRPr sz="950">
+                <a:solidFill>
+                  <a:srgbClr val="94A3B8"/>
+                </a:solidFill>
               </a:defRPr>
             </a:pPr>
             <a:r>
@@ -10485,14 +8035,14 @@
       </p:sp>
       <p:sp>
         <p:nvSpPr>
-          <p:cNvPr id="16" name="Rounded Rectangle 15"/>
+          <p:cNvPr id="13" name="Rounded Rectangle 12"/>
           <p:cNvSpPr/>
           <p:nvPr/>
         </p:nvSpPr>
         <p:spPr>
           <a:xfrm>
             <a:off x="6217920" y="3931920"/>
-            <a:ext cx="5242255" cy="2377440"/>
+            <a:ext cx="5212080" cy="2286000"/>
           </a:xfrm>
           <a:prstGeom prst="roundRect">
             <a:avLst/>
@@ -10500,9 +8050,9 @@
           <a:solidFill>
             <a:srgbClr val="1E293B"/>
           </a:solidFill>
-          <a:ln w="19050">
+          <a:ln w="12700">
             <a:solidFill>
-              <a:srgbClr val="A855F7"/>
+              <a:srgbClr val="334155"/>
             </a:solidFill>
           </a:ln>
         </p:spPr>
@@ -10530,14 +8080,14 @@
       </p:sp>
       <p:sp>
         <p:nvSpPr>
-          <p:cNvPr id="17" name="TextBox 16"/>
+          <p:cNvPr id="14" name="TextBox 13"/>
           <p:cNvSpPr txBox="1"/>
           <p:nvPr/>
         </p:nvSpPr>
         <p:spPr>
           <a:xfrm>
-            <a:off x="6400800" y="4096512"/>
-            <a:ext cx="4876495" cy="365760"/>
+            <a:off x="6400800" y="4069080"/>
+            <a:ext cx="4846320" cy="2011680"/>
           </a:xfrm>
           <a:prstGeom prst="rect">
             <a:avLst/>
@@ -10551,47 +8101,25 @@
           <a:lstStyle/>
           <a:p>
             <a:pPr>
-              <a:defRPr sz="1100" b="1">
-                <a:solidFill>
-                  <a:srgbClr val="38BDF8"/>
-                </a:solidFill>
-                <a:latin typeface="Segoe UI"/>
+              <a:defRPr sz="1200" b="1">
+                <a:solidFill>
+                  <a:srgbClr val="A855F7"/>
+                </a:solidFill>
               </a:defRPr>
             </a:pPr>
             <a:r>
               <a:t>04 | STEAM DECK &amp; DOUBLAGE ASIATIQUE</a:t>
             </a:r>
           </a:p>
-        </p:txBody>
-      </p:sp>
-      <p:sp>
-        <p:nvSpPr>
-          <p:cNvPr id="18" name="TextBox 17"/>
-          <p:cNvSpPr txBox="1"/>
-          <p:nvPr/>
-        </p:nvSpPr>
-        <p:spPr>
-          <a:xfrm>
-            <a:off x="6400800" y="4434840"/>
-            <a:ext cx="4876495" cy="1737360"/>
-          </a:xfrm>
-          <a:prstGeom prst="rect">
-            <a:avLst/>
-          </a:prstGeom>
-          <a:noFill/>
-        </p:spPr>
-        <p:txBody>
-          <a:bodyPr wrap="square">
-            <a:spAutoFit/>
-          </a:bodyPr>
-          <a:lstStyle/>
-          <a:p>
-            <a:pPr>
-              <a:defRPr sz="1000" b="1">
-                <a:solidFill>
-                  <a:srgbClr val="A855F7"/>
-                </a:solidFill>
-                <a:latin typeface="Segoe UI"/>
+          <a:p>
+            <a:pPr>
+              <a:spcBef>
+                <a:spcPts val="600"/>
+              </a:spcBef>
+              <a:defRPr b="1" sz="1000">
+                <a:solidFill>
+                  <a:srgbClr val="F8FAFC"/>
+                </a:solidFill>
               </a:defRPr>
             </a:pPr>
             <a:r>
@@ -10600,24 +8128,25 @@
           </a:p>
           <a:p>
             <a:pPr>
-              <a:defRPr sz="900">
+              <a:defRPr sz="950">
+                <a:solidFill>
+                  <a:srgbClr val="94A3B8"/>
+                </a:solidFill>
+              </a:defRPr>
+            </a:pPr>
+            <a:r>
+              <a:t>Garantir le badge 'Deck Verified' dès le lancement (anti-triche compatible).</a:t>
+            </a:r>
+          </a:p>
+          <a:p>
+            <a:pPr>
+              <a:spcBef>
+                <a:spcPts val="400"/>
+              </a:spcBef>
+              <a:defRPr b="1" sz="1000">
                 <a:solidFill>
                   <a:srgbClr val="F8FAFC"/>
                 </a:solidFill>
-                <a:latin typeface="Segoe UI"/>
-              </a:defRPr>
-            </a:pPr>
-            <a:r>
-              <a:t>Garantir le badge 'Deck Verified' dès le lancement (anti-triche compatible).</a:t>
-            </a:r>
-          </a:p>
-          <a:p>
-            <a:pPr>
-              <a:defRPr sz="1000" b="1">
-                <a:solidFill>
-                  <a:srgbClr val="A855F7"/>
-                </a:solidFill>
-                <a:latin typeface="Segoe UI"/>
               </a:defRPr>
             </a:pPr>
             <a:r>
@@ -10626,11 +8155,10 @@
           </a:p>
           <a:p>
             <a:pPr>
-              <a:defRPr sz="900">
-                <a:solidFill>
-                  <a:srgbClr val="F8FAFC"/>
-                </a:solidFill>
-                <a:latin typeface="Segoe UI"/>
+              <a:defRPr sz="950">
+                <a:solidFill>
+                  <a:srgbClr val="94A3B8"/>
+                </a:solidFill>
               </a:defRPr>
             </a:pPr>
             <a:r>

--- a/Bloc_2_Analyse_Exploratoire/Steam/Steam_presentation.pptx
+++ b/Bloc_2_Analyse_Exploratoire/Steam/Steam_presentation.pptx
@@ -11243,7 +11243,7 @@
         <p:spPr>
           <a:xfrm>
             <a:off x="1828800" y="1463040"/>
-            <a:ext cx="8534095" cy="365760"/>
+            <a:ext cx="8534100" cy="461700"/>
           </a:xfrm>
           <a:prstGeom prst="rect">
             <a:avLst/>
@@ -11269,7 +11269,7 @@
               <a:buNone/>
             </a:pPr>
             <a:r>
-              <a:rPr b="1" i="0" lang="en-US" sz="1200" u="none" cap="none" strike="noStrike">
+              <a:rPr b="1" i="0" lang="en-US" sz="2400" u="none" cap="none" strike="noStrike">
                 <a:solidFill>
                   <a:srgbClr val="38BDF8"/>
                 </a:solidFill>
@@ -11280,7 +11280,7 @@
               </a:rPr>
               <a:t>BLOC 2 — ANALYSE EXPLORATOIRE DE DONNÉES BIG DATA</a:t>
             </a:r>
-            <a:endParaRPr/>
+            <a:endParaRPr sz="2600"/>
           </a:p>
         </p:txBody>
       </p:sp>
@@ -11433,7 +11433,7 @@
         <p:spPr>
           <a:xfrm>
             <a:off x="2011680" y="3520440"/>
-            <a:ext cx="2286000" cy="1005840"/>
+            <a:ext cx="2286000" cy="1015800"/>
           </a:xfrm>
           <a:prstGeom prst="rect">
             <a:avLst/>
@@ -11459,7 +11459,7 @@
               <a:buNone/>
             </a:pPr>
             <a:r>
-              <a:rPr b="1" i="0" lang="en-US" sz="2000" u="none" cap="none" strike="noStrike">
+              <a:rPr b="1" i="0" lang="en-US" sz="2300" u="none" cap="none" strike="noStrike">
                 <a:solidFill>
                   <a:srgbClr val="38BDF8"/>
                 </a:solidFill>
@@ -11470,7 +11470,7 @@
               </a:rPr>
               <a:t>55 691</a:t>
             </a:r>
-            <a:endParaRPr/>
+            <a:endParaRPr sz="1700"/>
           </a:p>
           <a:p>
             <a:pPr indent="0" lvl="0" marL="0" marR="0" rtl="0" algn="l">
@@ -11483,7 +11483,7 @@
               <a:buNone/>
             </a:pPr>
             <a:r>
-              <a:rPr b="1" i="0" lang="en-US" sz="1000" u="none" cap="none" strike="noStrike">
+              <a:rPr b="1" i="0" lang="en-US" sz="1300" u="none" cap="none" strike="noStrike">
                 <a:solidFill>
                   <a:srgbClr val="F8FAFC"/>
                 </a:solidFill>
@@ -11494,7 +11494,7 @@
               </a:rPr>
               <a:t>JEUX ANALYSÉS</a:t>
             </a:r>
-            <a:endParaRPr/>
+            <a:endParaRPr sz="1700"/>
           </a:p>
           <a:p>
             <a:pPr indent="0" lvl="0" marL="0" marR="0" rtl="0" algn="l">
@@ -11507,7 +11507,7 @@
               <a:buNone/>
             </a:pPr>
             <a:r>
-              <a:rPr b="0" i="0" lang="en-US" sz="900" u="none" cap="none" strike="noStrike">
+              <a:rPr b="0" i="0" lang="en-US" sz="1200" u="none" cap="none" strike="noStrike">
                 <a:solidFill>
                   <a:srgbClr val="94A3B8"/>
                 </a:solidFill>
@@ -11518,7 +11518,7 @@
               </a:rPr>
               <a:t>Dump JSON multi-lignes AWS S3</a:t>
             </a:r>
-            <a:endParaRPr/>
+            <a:endParaRPr sz="1700"/>
           </a:p>
         </p:txBody>
       </p:sp>
@@ -11597,7 +11597,7 @@
         <p:spPr>
           <a:xfrm>
             <a:off x="4937760" y="3520440"/>
-            <a:ext cx="2286000" cy="1005840"/>
+            <a:ext cx="2286000" cy="877200"/>
           </a:xfrm>
           <a:prstGeom prst="rect">
             <a:avLst/>
@@ -11623,7 +11623,7 @@
               <a:buNone/>
             </a:pPr>
             <a:r>
-              <a:rPr b="1" i="0" lang="en-US" sz="2000" u="none" cap="none" strike="noStrike">
+              <a:rPr b="1" i="0" lang="en-US" sz="2400" u="none" cap="none" strike="noStrike">
                 <a:solidFill>
                   <a:srgbClr val="10B981"/>
                 </a:solidFill>
@@ -11634,7 +11634,7 @@
               </a:rPr>
               <a:t>1.05 Md€</a:t>
             </a:r>
-            <a:endParaRPr/>
+            <a:endParaRPr sz="1800"/>
           </a:p>
           <a:p>
             <a:pPr indent="0" lvl="0" marL="0" marR="0" rtl="0" algn="l">
@@ -11647,7 +11647,7 @@
               <a:buNone/>
             </a:pPr>
             <a:r>
-              <a:rPr b="1" i="0" lang="en-US" sz="1000" u="none" cap="none" strike="noStrike">
+              <a:rPr b="1" i="0" lang="en-US" u="none" cap="none" strike="noStrike">
                 <a:solidFill>
                   <a:srgbClr val="F8FAFC"/>
                 </a:solidFill>
@@ -11658,7 +11658,7 @@
               </a:rPr>
               <a:t>PROXY REVENUS ACTION</a:t>
             </a:r>
-            <a:endParaRPr/>
+            <a:endParaRPr sz="1800"/>
           </a:p>
           <a:p>
             <a:pPr indent="0" lvl="0" marL="0" marR="0" rtl="0" algn="l">
@@ -11671,7 +11671,7 @@
               <a:buNone/>
             </a:pPr>
             <a:r>
-              <a:rPr b="0" i="0" lang="en-US" sz="900" u="none" cap="none" strike="noStrike">
+              <a:rPr b="0" i="0" lang="en-US" sz="1300" u="none" cap="none" strike="noStrike">
                 <a:solidFill>
                   <a:srgbClr val="94A3B8"/>
                 </a:solidFill>
@@ -11682,7 +11682,7 @@
               </a:rPr>
               <a:t>Genre dominant de l'industrie</a:t>
             </a:r>
-            <a:endParaRPr/>
+            <a:endParaRPr sz="1800"/>
           </a:p>
         </p:txBody>
       </p:sp>
@@ -11761,7 +11761,7 @@
         <p:spPr>
           <a:xfrm>
             <a:off x="7863840" y="3520440"/>
-            <a:ext cx="2286000" cy="1005840"/>
+            <a:ext cx="2286000" cy="877200"/>
           </a:xfrm>
           <a:prstGeom prst="rect">
             <a:avLst/>
@@ -11787,7 +11787,7 @@
               <a:buNone/>
             </a:pPr>
             <a:r>
-              <a:rPr b="1" i="0" lang="en-US" sz="2000" u="none" cap="none" strike="noStrike">
+              <a:rPr b="1" i="0" lang="en-US" sz="2400" u="none" cap="none" strike="noStrike">
                 <a:solidFill>
                   <a:srgbClr val="F59E0B"/>
                 </a:solidFill>
@@ -11798,7 +11798,7 @@
               </a:rPr>
               <a:t>14.0% / 86.0%</a:t>
             </a:r>
-            <a:endParaRPr/>
+            <a:endParaRPr sz="1800"/>
           </a:p>
           <a:p>
             <a:pPr indent="0" lvl="0" marL="0" marR="0" rtl="0" algn="l">
@@ -11811,7 +11811,7 @@
               <a:buNone/>
             </a:pPr>
             <a:r>
-              <a:rPr b="1" i="0" lang="en-US" sz="1000" u="none" cap="none" strike="noStrike">
+              <a:rPr b="1" i="0" lang="en-US" u="none" cap="none" strike="noStrike">
                 <a:solidFill>
                   <a:srgbClr val="F8FAFC"/>
                 </a:solidFill>
@@ -11822,7 +11822,7 @@
               </a:rPr>
               <a:t>GRATUIT VS PAYANT</a:t>
             </a:r>
-            <a:endParaRPr/>
+            <a:endParaRPr sz="1800"/>
           </a:p>
           <a:p>
             <a:pPr indent="0" lvl="0" marL="0" marR="0" rtl="0" algn="l">
@@ -11835,7 +11835,7 @@
               <a:buNone/>
             </a:pPr>
             <a:r>
-              <a:rPr b="0" i="0" lang="en-US" sz="900" u="none" cap="none" strike="noStrike">
+              <a:rPr b="0" i="0" lang="en-US" sz="1300" u="none" cap="none" strike="noStrike">
                 <a:solidFill>
                   <a:srgbClr val="94A3B8"/>
                 </a:solidFill>
@@ -11846,7 +11846,7 @@
               </a:rPr>
               <a:t>Monétisation &amp; élasticité prix</a:t>
             </a:r>
-            <a:endParaRPr/>
+            <a:endParaRPr sz="1800"/>
           </a:p>
         </p:txBody>
       </p:sp>
@@ -11859,7 +11859,7 @@
         <p:spPr>
           <a:xfrm>
             <a:off x="1828800" y="4937760"/>
-            <a:ext cx="8534095" cy="457200"/>
+            <a:ext cx="8534100" cy="261600"/>
           </a:xfrm>
           <a:prstGeom prst="rect">
             <a:avLst/>
@@ -11894,7 +11894,7 @@
                 <a:cs typeface="Quattrocento Sans"/>
                 <a:sym typeface="Quattrocento Sans"/>
               </a:rPr>
-              <a:t>Candidat : Christopher GILLERON   |   Commanditaire : Ubisoft   |   Certification CDSD (Niveau 7)   |   Soutenance 5 min (8 slides)</a:t>
+              <a:t>Candidat : Christopher GILLERON   </a:t>
             </a:r>
             <a:endParaRPr/>
           </a:p>
@@ -11971,7 +11971,7 @@
             <a:r>
               <a:t/>
             </a:r>
-            <a:endParaRPr b="0" i="0" sz="1800" u="none" cap="none" strike="noStrike">
+            <a:endParaRPr b="0" i="0" sz="2200" u="none" cap="none" strike="noStrike">
               <a:solidFill>
                 <a:schemeClr val="dk1"/>
               </a:solidFill>
@@ -11992,7 +11992,7 @@
         <p:spPr>
           <a:xfrm>
             <a:off x="731520" y="365760"/>
-            <a:ext cx="7315200" cy="320040"/>
+            <a:ext cx="7315200" cy="307800"/>
           </a:xfrm>
           <a:prstGeom prst="rect">
             <a:avLst/>
@@ -12018,7 +12018,7 @@
               <a:buNone/>
             </a:pPr>
             <a:r>
-              <a:rPr b="1" i="0" lang="en-US" sz="1100" u="none" cap="none" strike="noStrike">
+              <a:rPr b="1" i="0" lang="en-US" sz="2000" u="none" cap="none" strike="noStrike">
                 <a:solidFill>
                   <a:srgbClr val="38BDF8"/>
                 </a:solidFill>
@@ -12029,7 +12029,7 @@
               </a:rPr>
               <a:t>ÉTAPE 01 | CADRAGE &amp; PIPELINE TECHNIQUE</a:t>
             </a:r>
-            <a:endParaRPr/>
+            <a:endParaRPr sz="2300"/>
           </a:p>
         </p:txBody>
       </p:sp>
@@ -12042,7 +12042,7 @@
         <p:spPr>
           <a:xfrm>
             <a:off x="731520" y="685800"/>
-            <a:ext cx="9601200" cy="502920"/>
+            <a:ext cx="9601200" cy="338700"/>
           </a:xfrm>
           <a:prstGeom prst="rect">
             <a:avLst/>
@@ -12068,7 +12068,7 @@
               <a:buNone/>
             </a:pPr>
             <a:r>
-              <a:rPr b="1" i="0" lang="en-US" sz="1800" u="none" cap="none" strike="noStrike">
+              <a:rPr b="1" i="0" lang="en-US" sz="2200" u="none" cap="none" strike="noStrike">
                 <a:solidFill>
                   <a:srgbClr val="F8FAFC"/>
                 </a:solidFill>
@@ -12079,7 +12079,7 @@
               </a:rPr>
               <a:t>Contexte Stratégique Ubisoft &amp; Architecture Big Data PySpark</a:t>
             </a:r>
-            <a:endParaRPr/>
+            <a:endParaRPr sz="1800"/>
           </a:p>
         </p:txBody>
       </p:sp>
@@ -12092,7 +12092,7 @@
         <p:spPr>
           <a:xfrm>
             <a:off x="10362895" y="411480"/>
-            <a:ext cx="1097280" cy="365760"/>
+            <a:ext cx="1097400" cy="246300"/>
           </a:xfrm>
           <a:prstGeom prst="rect">
             <a:avLst/>
@@ -12118,7 +12118,7 @@
               <a:buNone/>
             </a:pPr>
             <a:r>
-              <a:rPr b="1" i="0" lang="en-US" sz="1200" u="none" cap="none" strike="noStrike">
+              <a:rPr b="1" i="0" lang="en-US" sz="1600" u="none" cap="none" strike="noStrike">
                 <a:solidFill>
                   <a:srgbClr val="94A3B8"/>
                 </a:solidFill>
@@ -12129,7 +12129,7 @@
               </a:rPr>
               <a:t>2 / 8</a:t>
             </a:r>
-            <a:endParaRPr/>
+            <a:endParaRPr sz="1800"/>
           </a:p>
         </p:txBody>
       </p:sp>
@@ -12142,7 +12142,7 @@
         <p:spPr>
           <a:xfrm>
             <a:off x="731520" y="6400800"/>
-            <a:ext cx="10728655" cy="274320"/>
+            <a:ext cx="10728600" cy="277200"/>
           </a:xfrm>
           <a:prstGeom prst="rect">
             <a:avLst/>
@@ -12168,18 +12168,9 @@
               <a:buNone/>
             </a:pPr>
             <a:r>
-              <a:rPr b="0" i="0" lang="en-US" sz="950" u="none" cap="none" strike="noStrike">
-                <a:solidFill>
-                  <a:srgbClr val="94A3B8"/>
-                </a:solidFill>
-                <a:latin typeface="Quattrocento Sans"/>
-                <a:ea typeface="Quattrocento Sans"/>
-                <a:cs typeface="Quattrocento Sans"/>
-                <a:sym typeface="Quattrocento Sans"/>
-              </a:rPr>
-              <a:t>Christopher GILLERON  |  Steam Video Games Analysis (PySpark / Databricks)  |  Certification CDSD Bloc 2  |  Temps alloué : 5 min</a:t>
-            </a:r>
-            <a:endParaRPr/>
+              <a:t/>
+            </a:r>
+            <a:endParaRPr sz="1800"/>
           </a:p>
         </p:txBody>
       </p:sp>
@@ -12237,7 +12228,7 @@
             <a:r>
               <a:t/>
             </a:r>
-            <a:endParaRPr b="0" i="0" sz="1800" u="none" cap="none" strike="noStrike">
+            <a:endParaRPr b="0" i="0" sz="2200" u="none" cap="none" strike="noStrike">
               <a:solidFill>
                 <a:schemeClr val="dk1"/>
               </a:solidFill>
@@ -12258,7 +12249,7 @@
         <p:spPr>
           <a:xfrm>
             <a:off x="914400" y="1554480"/>
-            <a:ext cx="4846320" cy="4480560"/>
+            <a:ext cx="4846200" cy="3745500"/>
           </a:xfrm>
           <a:prstGeom prst="rect">
             <a:avLst/>
@@ -12284,7 +12275,7 @@
               <a:buNone/>
             </a:pPr>
             <a:r>
-              <a:rPr b="1" i="0" lang="en-US" sz="1400" u="none" cap="none" strike="noStrike">
+              <a:rPr b="1" i="0" lang="en-US" sz="1800" u="none" cap="none" strike="noStrike">
                 <a:solidFill>
                   <a:srgbClr val="38BDF8"/>
                 </a:solidFill>
@@ -12295,7 +12286,7 @@
               </a:rPr>
               <a:t>01 | CONTEXTE STRATÉGIQUE UBISOFT</a:t>
             </a:r>
-            <a:endParaRPr/>
+            <a:endParaRPr sz="1800"/>
           </a:p>
           <a:p>
             <a:pPr indent="0" lvl="0" marL="0" marR="0" rtl="0" algn="l">
@@ -12308,7 +12299,7 @@
               <a:buNone/>
             </a:pPr>
             <a:r>
-              <a:rPr b="1" i="0" lang="en-US" sz="1100" u="none" cap="none" strike="noStrike">
+              <a:rPr b="1" i="0" lang="en-US" sz="1500" u="none" cap="none" strike="noStrike">
                 <a:solidFill>
                   <a:srgbClr val="F8FAFC"/>
                 </a:solidFill>
@@ -12319,7 +12310,7 @@
               </a:rPr>
               <a:t>Mandat Ubisoft :</a:t>
             </a:r>
-            <a:endParaRPr/>
+            <a:endParaRPr sz="1800"/>
           </a:p>
           <a:p>
             <a:pPr indent="0" lvl="0" marL="0" marR="0" rtl="0" algn="l">
@@ -12332,7 +12323,7 @@
               <a:buNone/>
             </a:pPr>
             <a:r>
-              <a:rPr b="0" i="0" lang="en-US" sz="1000" u="none" cap="none" strike="noStrike">
+              <a:rPr b="0" i="0" lang="en-US" u="none" cap="none" strike="noStrike">
                 <a:solidFill>
                   <a:srgbClr val="94A3B8"/>
                 </a:solidFill>
@@ -12343,7 +12334,7 @@
               </a:rPr>
               <a:t>Explorer l'intégralité du catalogue Steam pour orienter la conception, le pricing et le positionnement du prochain jeu phare.</a:t>
             </a:r>
-            <a:endParaRPr/>
+            <a:endParaRPr sz="1800"/>
           </a:p>
           <a:p>
             <a:pPr indent="0" lvl="0" marL="0" marR="0" rtl="0" algn="l">
@@ -12356,7 +12347,7 @@
               <a:buNone/>
             </a:pPr>
             <a:r>
-              <a:rPr b="1" i="0" lang="en-US" sz="1100" u="none" cap="none" strike="noStrike">
+              <a:rPr b="1" i="0" lang="en-US" sz="1500" u="none" cap="none" strike="noStrike">
                 <a:solidFill>
                   <a:srgbClr val="F8FAFC"/>
                 </a:solidFill>
@@ -12367,7 +12358,7 @@
               </a:rPr>
               <a:t>Périmètre Données :</a:t>
             </a:r>
-            <a:endParaRPr/>
+            <a:endParaRPr sz="1800"/>
           </a:p>
           <a:p>
             <a:pPr indent="0" lvl="0" marL="0" marR="0" rtl="0" algn="l">
@@ -12380,7 +12371,7 @@
               <a:buNone/>
             </a:pPr>
             <a:r>
-              <a:rPr b="0" i="0" lang="en-US" sz="1000" u="none" cap="none" strike="noStrike">
+              <a:rPr b="0" i="0" lang="en-US" u="none" cap="none" strike="noStrike">
                 <a:solidFill>
                   <a:srgbClr val="94A3B8"/>
                 </a:solidFill>
@@ -12391,7 +12382,7 @@
               </a:rPr>
               <a:t>55 691 jeux vidéo uniques collectés via l'API Steam Web, hébergés sur AWS S3 sous forme de dump JSON semi-structuré.</a:t>
             </a:r>
-            <a:endParaRPr/>
+            <a:endParaRPr sz="1800"/>
           </a:p>
           <a:p>
             <a:pPr indent="0" lvl="0" marL="0" marR="0" rtl="0" algn="l">
@@ -12404,7 +12395,7 @@
               <a:buNone/>
             </a:pPr>
             <a:r>
-              <a:rPr b="1" i="0" lang="en-US" sz="1100" u="none" cap="none" strike="noStrike">
+              <a:rPr b="1" i="0" lang="en-US" sz="1500" u="none" cap="none" strike="noStrike">
                 <a:solidFill>
                   <a:srgbClr val="F8FAFC"/>
                 </a:solidFill>
@@ -12415,7 +12406,7 @@
               </a:rPr>
               <a:t>Enjeux Décisionnels :</a:t>
             </a:r>
-            <a:endParaRPr/>
+            <a:endParaRPr sz="1800"/>
           </a:p>
           <a:p>
             <a:pPr indent="0" lvl="0" marL="0" marR="0" rtl="0" algn="l">
@@ -12428,7 +12419,7 @@
               <a:buNone/>
             </a:pPr>
             <a:r>
-              <a:rPr b="0" i="0" lang="en-US" sz="1000" u="none" cap="none" strike="noStrike">
+              <a:rPr b="0" i="0" lang="en-US" u="none" cap="none" strike="noStrike">
                 <a:solidFill>
                   <a:srgbClr val="94A3B8"/>
                 </a:solidFill>
@@ -12439,7 +12430,7 @@
               </a:rPr>
               <a:t>Identifier les genres les plus lucratifs, mesurer l'impact du Free-to-Play, analyser la concurrence et optimiser le support OS.</a:t>
             </a:r>
-            <a:endParaRPr/>
+            <a:endParaRPr sz="1800"/>
           </a:p>
           <a:p>
             <a:pPr indent="0" lvl="0" marL="0" marR="0" rtl="0" algn="l">
@@ -12452,7 +12443,7 @@
               <a:buNone/>
             </a:pPr>
             <a:r>
-              <a:rPr b="1" i="0" lang="en-US" sz="1100" u="none" cap="none" strike="noStrike">
+              <a:rPr b="1" i="0" lang="en-US" sz="1500" u="none" cap="none" strike="noStrike">
                 <a:solidFill>
                   <a:srgbClr val="F8FAFC"/>
                 </a:solidFill>
@@ -12463,7 +12454,7 @@
               </a:rPr>
               <a:t>Contrainte Volume :</a:t>
             </a:r>
-            <a:endParaRPr/>
+            <a:endParaRPr sz="1800"/>
           </a:p>
           <a:p>
             <a:pPr indent="0" lvl="0" marL="0" marR="0" rtl="0" algn="l">
@@ -12476,7 +12467,7 @@
               <a:buNone/>
             </a:pPr>
             <a:r>
-              <a:rPr b="0" i="0" lang="en-US" sz="1000" u="none" cap="none" strike="noStrike">
+              <a:rPr b="0" i="0" lang="en-US" u="none" cap="none" strike="noStrike">
                 <a:solidFill>
                   <a:srgbClr val="94A3B8"/>
                 </a:solidFill>
@@ -12487,7 +12478,7 @@
               </a:rPr>
               <a:t>Traiter un schéma complexe multi-niveaux sans perte d'information grâce au moteur distribué PySpark sur Databricks.</a:t>
             </a:r>
-            <a:endParaRPr/>
+            <a:endParaRPr sz="1800"/>
           </a:p>
         </p:txBody>
       </p:sp>
@@ -12545,7 +12536,7 @@
             <a:r>
               <a:t/>
             </a:r>
-            <a:endParaRPr b="0" i="0" sz="1800" u="none" cap="none" strike="noStrike">
+            <a:endParaRPr b="0" i="0" sz="2200" u="none" cap="none" strike="noStrike">
               <a:solidFill>
                 <a:schemeClr val="dk1"/>
               </a:solidFill>
@@ -12566,7 +12557,7 @@
         <p:spPr>
           <a:xfrm>
             <a:off x="6400800" y="1554480"/>
-            <a:ext cx="4876495" cy="4480560"/>
+            <a:ext cx="4876500" cy="3807000"/>
           </a:xfrm>
           <a:prstGeom prst="rect">
             <a:avLst/>
@@ -12592,7 +12583,7 @@
               <a:buNone/>
             </a:pPr>
             <a:r>
-              <a:rPr b="1" i="0" lang="en-US" sz="1400" u="none" cap="none" strike="noStrike">
+              <a:rPr b="1" i="0" lang="en-US" sz="1800" u="none" cap="none" strike="noStrike">
                 <a:solidFill>
                   <a:srgbClr val="38BDF8"/>
                 </a:solidFill>
@@ -12603,7 +12594,7 @@
               </a:rPr>
               <a:t>02 | PIPELINE DE TRAITEMENT PYSPARK (DATABRICKS)</a:t>
             </a:r>
-            <a:endParaRPr/>
+            <a:endParaRPr sz="1800"/>
           </a:p>
           <a:p>
             <a:pPr indent="0" lvl="0" marL="0" marR="0" rtl="0" algn="l">
@@ -12616,7 +12607,7 @@
               <a:buNone/>
             </a:pPr>
             <a:r>
-              <a:rPr b="1" i="0" lang="en-US" sz="1100" u="none" cap="none" strike="noStrike">
+              <a:rPr b="1" i="0" lang="en-US" sz="1500" u="none" cap="none" strike="noStrike">
                 <a:solidFill>
                   <a:srgbClr val="F8FAFC"/>
                 </a:solidFill>
@@ -12627,7 +12618,7 @@
               </a:rPr>
               <a:t>Aplatissement Struct (data.*) :</a:t>
             </a:r>
-            <a:endParaRPr/>
+            <a:endParaRPr sz="1800"/>
           </a:p>
           <a:p>
             <a:pPr indent="0" lvl="0" marL="0" marR="0" rtl="0" algn="l">
@@ -12640,7 +12631,7 @@
               <a:buNone/>
             </a:pPr>
             <a:r>
-              <a:rPr b="0" i="0" lang="en-US" sz="1000" u="none" cap="none" strike="noStrike">
+              <a:rPr b="0" i="0" lang="en-US" u="none" cap="none" strike="noStrike">
                 <a:solidFill>
                   <a:srgbClr val="94A3B8"/>
                 </a:solidFill>
@@ -12651,7 +12642,7 @@
               </a:rPr>
               <a:t>Dé-imbrication automatique de 22 attributs racines depuis la structure complexe 'data'.</a:t>
             </a:r>
-            <a:endParaRPr/>
+            <a:endParaRPr sz="1800"/>
           </a:p>
           <a:p>
             <a:pPr indent="0" lvl="0" marL="0" marR="0" rtl="0" algn="l">
@@ -12664,7 +12655,7 @@
               <a:buNone/>
             </a:pPr>
             <a:r>
-              <a:rPr b="1" i="0" lang="en-US" sz="1100" u="none" cap="none" strike="noStrike">
+              <a:rPr b="1" i="0" lang="en-US" sz="1500" u="none" cap="none" strike="noStrike">
                 <a:solidFill>
                   <a:srgbClr val="F8FAFC"/>
                 </a:solidFill>
@@ -12675,7 +12666,7 @@
               </a:rPr>
               <a:t>Fonctions de Résilience :</a:t>
             </a:r>
-            <a:endParaRPr/>
+            <a:endParaRPr sz="1800"/>
           </a:p>
           <a:p>
             <a:pPr indent="0" lvl="0" marL="0" marR="0" rtl="0" algn="l">
@@ -12688,7 +12679,7 @@
               <a:buNone/>
             </a:pPr>
             <a:r>
-              <a:rPr b="0" i="0" lang="en-US" sz="1000" u="none" cap="none" strike="noStrike">
+              <a:rPr b="0" i="0" lang="en-US" u="none" cap="none" strike="noStrike">
                 <a:solidFill>
                   <a:srgbClr val="94A3B8"/>
                 </a:solidFill>
@@ -12699,7 +12690,7 @@
               </a:rPr>
               <a:t>Implémentation de first_existing_col() pour garantir l'extraction des prix, genres et dates quel que soit le schéma.</a:t>
             </a:r>
-            <a:endParaRPr/>
+            <a:endParaRPr sz="1800"/>
           </a:p>
           <a:p>
             <a:pPr indent="0" lvl="0" marL="0" marR="0" rtl="0" algn="l">
@@ -12712,7 +12703,7 @@
               <a:buNone/>
             </a:pPr>
             <a:r>
-              <a:rPr b="1" i="0" lang="en-US" sz="1100" u="none" cap="none" strike="noStrike">
+              <a:rPr b="1" i="0" lang="en-US" sz="1500" u="none" cap="none" strike="noStrike">
                 <a:solidFill>
                   <a:srgbClr val="F8FAFC"/>
                 </a:solidFill>
@@ -12723,7 +12714,7 @@
               </a:rPr>
               <a:t>Nettoyage &amp; Typage Distribué :</a:t>
             </a:r>
-            <a:endParaRPr/>
+            <a:endParaRPr sz="1800"/>
           </a:p>
           <a:p>
             <a:pPr indent="0" lvl="0" marL="0" marR="0" rtl="0" algn="l">
@@ -12736,7 +12727,7 @@
               <a:buNone/>
             </a:pPr>
             <a:r>
-              <a:rPr b="0" i="0" lang="en-US" sz="1000" u="none" cap="none" strike="noStrike">
+              <a:rPr b="0" i="0" lang="en-US" u="none" cap="none" strike="noStrike">
                 <a:solidFill>
                   <a:srgbClr val="94A3B8"/>
                 </a:solidFill>
@@ -12747,7 +12738,7 @@
               </a:rPr>
               <a:t>Conversion des centimes en euros (price / 100), détection de is_free, parsing multi-formats des dates via try_to_date().</a:t>
             </a:r>
-            <a:endParaRPr/>
+            <a:endParaRPr sz="1800"/>
           </a:p>
           <a:p>
             <a:pPr indent="0" lvl="0" marL="0" marR="0" rtl="0" algn="l">
@@ -12760,7 +12751,7 @@
               <a:buNone/>
             </a:pPr>
             <a:r>
-              <a:rPr b="1" i="0" lang="en-US" sz="1100" u="none" cap="none" strike="noStrike">
+              <a:rPr b="1" i="0" lang="en-US" sz="1500" u="none" cap="none" strike="noStrike">
                 <a:solidFill>
                   <a:srgbClr val="F8FAFC"/>
                 </a:solidFill>
@@ -12771,7 +12762,7 @@
               </a:rPr>
               <a:t>Optimisation Catalyst :</a:t>
             </a:r>
-            <a:endParaRPr/>
+            <a:endParaRPr sz="1800"/>
           </a:p>
           <a:p>
             <a:pPr indent="0" lvl="0" marL="0" marR="0" rtl="0" algn="l">
@@ -12784,7 +12775,7 @@
               <a:buNone/>
             </a:pPr>
             <a:r>
-              <a:rPr b="0" i="0" lang="en-US" sz="1000" u="none" cap="none" strike="noStrike">
+              <a:rPr b="0" i="0" lang="en-US" u="none" cap="none" strike="noStrike">
                 <a:solidFill>
                   <a:srgbClr val="94A3B8"/>
                 </a:solidFill>
@@ -12795,7 +12786,7 @@
               </a:rPr>
               <a:t>Calcul vectoriel des ratios d'avis (positive_ratio) et décomposition des listes via explode_outer().</a:t>
             </a:r>
-            <a:endParaRPr/>
+            <a:endParaRPr sz="1800"/>
           </a:p>
         </p:txBody>
       </p:sp>
@@ -12891,7 +12882,7 @@
         <p:spPr>
           <a:xfrm>
             <a:off x="731520" y="365760"/>
-            <a:ext cx="7315200" cy="200100"/>
+            <a:ext cx="7315200" cy="277200"/>
           </a:xfrm>
           <a:prstGeom prst="rect">
             <a:avLst/>
@@ -12917,7 +12908,7 @@
               <a:buNone/>
             </a:pPr>
             <a:r>
-              <a:rPr b="1" i="0" lang="en-US" sz="1300" u="none" cap="none" strike="noStrike">
+              <a:rPr b="1" i="0" lang="en-US" sz="1800" u="none" cap="none" strike="noStrike">
                 <a:solidFill>
                   <a:srgbClr val="38BDF8"/>
                 </a:solidFill>
@@ -12928,7 +12919,7 @@
               </a:rPr>
               <a:t>ÉTAPE 02 | EXPLORATION TEMPORELLE</a:t>
             </a:r>
-            <a:endParaRPr sz="1600"/>
+            <a:endParaRPr sz="2100"/>
           </a:p>
         </p:txBody>
       </p:sp>
@@ -13041,7 +13032,7 @@
         <p:spPr>
           <a:xfrm>
             <a:off x="731520" y="6400800"/>
-            <a:ext cx="10728655" cy="274320"/>
+            <a:ext cx="10728600" cy="215400"/>
           </a:xfrm>
           <a:prstGeom prst="rect">
             <a:avLst/>
@@ -13067,16 +13058,7 @@
               <a:buNone/>
             </a:pPr>
             <a:r>
-              <a:rPr b="0" i="0" lang="en-US" sz="950" u="none" cap="none" strike="noStrike">
-                <a:solidFill>
-                  <a:srgbClr val="94A3B8"/>
-                </a:solidFill>
-                <a:latin typeface="Quattrocento Sans"/>
-                <a:ea typeface="Quattrocento Sans"/>
-                <a:cs typeface="Quattrocento Sans"/>
-                <a:sym typeface="Quattrocento Sans"/>
-              </a:rPr>
-              <a:t>Christopher GILLERON  |  Steam Video Games Analysis (PySpark / Databricks)  |  Certification CDSD Bloc 2  |  Temps alloué : 5 min</a:t>
+              <a:t/>
             </a:r>
             <a:endParaRPr/>
           </a:p>
@@ -13859,7 +13841,7 @@
         <p:spPr>
           <a:xfrm>
             <a:off x="731520" y="365760"/>
-            <a:ext cx="7315200" cy="215400"/>
+            <a:ext cx="7315200" cy="292500"/>
           </a:xfrm>
           <a:prstGeom prst="rect">
             <a:avLst/>
@@ -13885,7 +13867,7 @@
               <a:buNone/>
             </a:pPr>
             <a:r>
-              <a:rPr b="1" i="0" lang="en-US" u="none" cap="none" strike="noStrike">
+              <a:rPr b="1" i="0" lang="en-US" sz="1900" u="none" cap="none" strike="noStrike">
                 <a:solidFill>
                   <a:srgbClr val="38BDF8"/>
                 </a:solidFill>
@@ -13896,7 +13878,7 @@
               </a:rPr>
               <a:t>ÉTAPE 03 | PANORAMA CONCURRENTIEL</a:t>
             </a:r>
-            <a:endParaRPr sz="1700"/>
+            <a:endParaRPr sz="2200"/>
           </a:p>
         </p:txBody>
       </p:sp>
@@ -14009,7 +13991,7 @@
         <p:spPr>
           <a:xfrm>
             <a:off x="731520" y="6400800"/>
-            <a:ext cx="10728600" cy="192300"/>
+            <a:ext cx="10728600" cy="261600"/>
           </a:xfrm>
           <a:prstGeom prst="rect">
             <a:avLst/>
@@ -14035,16 +14017,7 @@
               <a:buNone/>
             </a:pPr>
             <a:r>
-              <a:rPr b="0" i="0" lang="en-US" sz="1250" u="none" cap="none" strike="noStrike">
-                <a:solidFill>
-                  <a:srgbClr val="94A3B8"/>
-                </a:solidFill>
-                <a:latin typeface="Quattrocento Sans"/>
-                <a:ea typeface="Quattrocento Sans"/>
-                <a:cs typeface="Quattrocento Sans"/>
-                <a:sym typeface="Quattrocento Sans"/>
-              </a:rPr>
-              <a:t>Christopher GILLERON  |  Steam Video Games Analysis (PySpark / Databricks)  |  Certification CDSD Bloc 2  |  Temps alloué : 5 min</a:t>
+              <a:t/>
             </a:r>
             <a:endParaRPr sz="1700"/>
           </a:p>
@@ -14124,7 +14097,7 @@
         </p:nvSpPr>
         <p:spPr>
           <a:xfrm>
-            <a:off x="914400" y="1554480"/>
+            <a:off x="1027775" y="1849205"/>
             <a:ext cx="4846200" cy="2647500"/>
           </a:xfrm>
           <a:prstGeom prst="rect">
@@ -14854,7 +14827,7 @@
         <p:spPr>
           <a:xfrm>
             <a:off x="731520" y="365760"/>
-            <a:ext cx="7315200" cy="215400"/>
+            <a:ext cx="7315200" cy="292500"/>
           </a:xfrm>
           <a:prstGeom prst="rect">
             <a:avLst/>
@@ -14880,7 +14853,7 @@
               <a:buNone/>
             </a:pPr>
             <a:r>
-              <a:rPr b="1" i="0" lang="en-US" u="none" cap="none" strike="noStrike">
+              <a:rPr b="1" i="0" lang="en-US" sz="1900" u="none" cap="none" strike="noStrike">
                 <a:solidFill>
                   <a:srgbClr val="38BDF8"/>
                 </a:solidFill>
@@ -14891,7 +14864,7 @@
               </a:rPr>
               <a:t>ÉTAPE 04 | MODÈLES ÉCONOMIQUES</a:t>
             </a:r>
-            <a:endParaRPr sz="1700"/>
+            <a:endParaRPr sz="2200"/>
           </a:p>
         </p:txBody>
       </p:sp>
@@ -15004,7 +14977,7 @@
         <p:spPr>
           <a:xfrm>
             <a:off x="731520" y="6400800"/>
-            <a:ext cx="10728600" cy="274200"/>
+            <a:ext cx="10728600" cy="215400"/>
           </a:xfrm>
           <a:prstGeom prst="rect">
             <a:avLst/>
@@ -15030,16 +15003,7 @@
               <a:buNone/>
             </a:pPr>
             <a:r>
-              <a:rPr b="0" i="0" lang="en-US" sz="950" u="none" cap="none" strike="noStrike">
-                <a:solidFill>
-                  <a:srgbClr val="94A3B8"/>
-                </a:solidFill>
-                <a:latin typeface="Quattrocento Sans"/>
-                <a:ea typeface="Quattrocento Sans"/>
-                <a:cs typeface="Quattrocento Sans"/>
-                <a:sym typeface="Quattrocento Sans"/>
-              </a:rPr>
-              <a:t>Christopher GILLERON  |  Steam Video Games Analysis (PySpark / Databricks)  |  Certification CDSD Bloc 2  |  Temps alloué : 5 min</a:t>
+              <a:t/>
             </a:r>
             <a:endParaRPr/>
           </a:p>
@@ -15822,7 +15786,7 @@
         <p:spPr>
           <a:xfrm>
             <a:off x="731520" y="365760"/>
-            <a:ext cx="7315200" cy="215400"/>
+            <a:ext cx="7315200" cy="292500"/>
           </a:xfrm>
           <a:prstGeom prst="rect">
             <a:avLst/>
@@ -15848,7 +15812,7 @@
               <a:buNone/>
             </a:pPr>
             <a:r>
-              <a:rPr b="1" i="0" lang="en-US" u="none" cap="none" strike="noStrike">
+              <a:rPr b="1" i="0" lang="en-US" sz="1900" u="none" cap="none" strike="noStrike">
                 <a:solidFill>
                   <a:srgbClr val="38BDF8"/>
                 </a:solidFill>
@@ -15859,7 +15823,7 @@
               </a:rPr>
               <a:t>ÉTAPE 05 | ANALYSE DES GENRES &amp; QUALITÉ</a:t>
             </a:r>
-            <a:endParaRPr sz="1700"/>
+            <a:endParaRPr sz="2200"/>
           </a:p>
         </p:txBody>
       </p:sp>
@@ -15972,7 +15936,7 @@
         <p:spPr>
           <a:xfrm>
             <a:off x="731520" y="6400800"/>
-            <a:ext cx="10728600" cy="146100"/>
+            <a:ext cx="10728600" cy="215400"/>
           </a:xfrm>
           <a:prstGeom prst="rect">
             <a:avLst/>
@@ -15998,16 +15962,7 @@
               <a:buNone/>
             </a:pPr>
             <a:r>
-              <a:rPr b="0" i="0" lang="en-US" sz="950" u="none" cap="none" strike="noStrike">
-                <a:solidFill>
-                  <a:srgbClr val="94A3B8"/>
-                </a:solidFill>
-                <a:latin typeface="Quattrocento Sans"/>
-                <a:ea typeface="Quattrocento Sans"/>
-                <a:cs typeface="Quattrocento Sans"/>
-                <a:sym typeface="Quattrocento Sans"/>
-              </a:rPr>
-              <a:t>Christopher GILLERON  |  Steam Video Games Analysis (PySpark / Databricks)  |  Certification CDSD Bloc 2  |  Temps alloué : 5 min</a:t>
+              <a:t/>
             </a:r>
             <a:endParaRPr/>
           </a:p>
@@ -16817,7 +16772,7 @@
         <p:spPr>
           <a:xfrm>
             <a:off x="731520" y="365760"/>
-            <a:ext cx="7315200" cy="215400"/>
+            <a:ext cx="7315200" cy="307800"/>
           </a:xfrm>
           <a:prstGeom prst="rect">
             <a:avLst/>
@@ -16843,7 +16798,7 @@
               <a:buNone/>
             </a:pPr>
             <a:r>
-              <a:rPr b="1" i="0" lang="en-US" u="none" cap="none" strike="noStrike">
+              <a:rPr b="1" i="0" lang="en-US" sz="2000" u="none" cap="none" strike="noStrike">
                 <a:solidFill>
                   <a:srgbClr val="38BDF8"/>
                 </a:solidFill>
@@ -16854,7 +16809,7 @@
               </a:rPr>
               <a:t>ÉTAPE 06 | RENTABILITÉ &amp; ÉCOSYSTÈME</a:t>
             </a:r>
-            <a:endParaRPr sz="1700"/>
+            <a:endParaRPr sz="2300"/>
           </a:p>
         </p:txBody>
       </p:sp>
@@ -16967,7 +16922,7 @@
         <p:spPr>
           <a:xfrm>
             <a:off x="731520" y="6400800"/>
-            <a:ext cx="10728655" cy="274320"/>
+            <a:ext cx="10728600" cy="215400"/>
           </a:xfrm>
           <a:prstGeom prst="rect">
             <a:avLst/>
@@ -16993,16 +16948,7 @@
               <a:buNone/>
             </a:pPr>
             <a:r>
-              <a:rPr b="0" i="0" lang="en-US" sz="950" u="none" cap="none" strike="noStrike">
-                <a:solidFill>
-                  <a:srgbClr val="94A3B8"/>
-                </a:solidFill>
-                <a:latin typeface="Quattrocento Sans"/>
-                <a:ea typeface="Quattrocento Sans"/>
-                <a:cs typeface="Quattrocento Sans"/>
-                <a:sym typeface="Quattrocento Sans"/>
-              </a:rPr>
-              <a:t>Christopher GILLERON  |  Steam Video Games Analysis (PySpark / Databricks)  |  Certification CDSD Bloc 2  |  Temps alloué : 5 min</a:t>
+              <a:t/>
             </a:r>
             <a:endParaRPr/>
           </a:p>
@@ -17764,7 +17710,7 @@
             <a:r>
               <a:t/>
             </a:r>
-            <a:endParaRPr b="0" i="0" sz="1800" u="none" cap="none" strike="noStrike">
+            <a:endParaRPr b="0" i="0" sz="2400" u="none" cap="none" strike="noStrike">
               <a:solidFill>
                 <a:schemeClr val="dk1"/>
               </a:solidFill>
@@ -17785,7 +17731,7 @@
         <p:spPr>
           <a:xfrm>
             <a:off x="731520" y="365760"/>
-            <a:ext cx="7315200" cy="320040"/>
+            <a:ext cx="7315200" cy="261600"/>
           </a:xfrm>
           <a:prstGeom prst="rect">
             <a:avLst/>
@@ -17811,7 +17757,7 @@
               <a:buNone/>
             </a:pPr>
             <a:r>
-              <a:rPr b="1" i="0" lang="en-US" sz="1100" u="none" cap="none" strike="noStrike">
+              <a:rPr b="1" i="0" lang="en-US" sz="1700" u="none" cap="none" strike="noStrike">
                 <a:solidFill>
                   <a:srgbClr val="38BDF8"/>
                 </a:solidFill>
@@ -17822,7 +17768,7 @@
               </a:rPr>
               <a:t>ÉTAPE 07 | PLAN D'ACTION &amp; SYNTHÈSE</a:t>
             </a:r>
-            <a:endParaRPr/>
+            <a:endParaRPr sz="2000"/>
           </a:p>
         </p:txBody>
       </p:sp>
@@ -17835,7 +17781,7 @@
         <p:spPr>
           <a:xfrm>
             <a:off x="731520" y="685800"/>
-            <a:ext cx="9601200" cy="502920"/>
+            <a:ext cx="9601200" cy="369300"/>
           </a:xfrm>
           <a:prstGeom prst="rect">
             <a:avLst/>
@@ -17861,7 +17807,7 @@
               <a:buNone/>
             </a:pPr>
             <a:r>
-              <a:rPr b="1" i="0" lang="en-US" sz="1800" u="none" cap="none" strike="noStrike">
+              <a:rPr b="1" i="0" lang="en-US" sz="2400" u="none" cap="none" strike="noStrike">
                 <a:solidFill>
                   <a:srgbClr val="F8FAFC"/>
                 </a:solidFill>
@@ -17872,7 +17818,7 @@
               </a:rPr>
               <a:t>4 Recommandations Stratégiques Clés pour Ubisoft</a:t>
             </a:r>
-            <a:endParaRPr/>
+            <a:endParaRPr sz="2000"/>
           </a:p>
         </p:txBody>
       </p:sp>
@@ -17885,7 +17831,7 @@
         <p:spPr>
           <a:xfrm>
             <a:off x="10362895" y="411480"/>
-            <a:ext cx="1097280" cy="365760"/>
+            <a:ext cx="1097400" cy="277200"/>
           </a:xfrm>
           <a:prstGeom prst="rect">
             <a:avLst/>
@@ -17911,7 +17857,7 @@
               <a:buNone/>
             </a:pPr>
             <a:r>
-              <a:rPr b="1" i="0" lang="en-US" sz="1200" u="none" cap="none" strike="noStrike">
+              <a:rPr b="1" i="0" lang="en-US" sz="1800" u="none" cap="none" strike="noStrike">
                 <a:solidFill>
                   <a:srgbClr val="94A3B8"/>
                 </a:solidFill>
@@ -17922,7 +17868,7 @@
               </a:rPr>
               <a:t>8 / 8</a:t>
             </a:r>
-            <a:endParaRPr/>
+            <a:endParaRPr sz="2000"/>
           </a:p>
         </p:txBody>
       </p:sp>
@@ -17935,7 +17881,7 @@
         <p:spPr>
           <a:xfrm>
             <a:off x="731520" y="6400800"/>
-            <a:ext cx="10728655" cy="274320"/>
+            <a:ext cx="10728600" cy="307800"/>
           </a:xfrm>
           <a:prstGeom prst="rect">
             <a:avLst/>
@@ -17961,18 +17907,9 @@
               <a:buNone/>
             </a:pPr>
             <a:r>
-              <a:rPr b="0" i="0" lang="en-US" sz="950" u="none" cap="none" strike="noStrike">
-                <a:solidFill>
-                  <a:srgbClr val="94A3B8"/>
-                </a:solidFill>
-                <a:latin typeface="Quattrocento Sans"/>
-                <a:ea typeface="Quattrocento Sans"/>
-                <a:cs typeface="Quattrocento Sans"/>
-                <a:sym typeface="Quattrocento Sans"/>
-              </a:rPr>
-              <a:t>Christopher GILLERON  |  Steam Video Games Analysis (PySpark / Databricks)  |  Certification CDSD Bloc 2  |  Temps alloué : 5 min</a:t>
-            </a:r>
-            <a:endParaRPr/>
+              <a:t/>
+            </a:r>
+            <a:endParaRPr sz="2000"/>
           </a:p>
         </p:txBody>
       </p:sp>
@@ -18030,7 +17967,7 @@
             <a:r>
               <a:t/>
             </a:r>
-            <a:endParaRPr b="0" i="0" sz="1800" u="none" cap="none" strike="noStrike">
+            <a:endParaRPr b="0" i="0" sz="2400" u="none" cap="none" strike="noStrike">
               <a:solidFill>
                 <a:schemeClr val="dk1"/>
               </a:solidFill>
@@ -18051,7 +17988,7 @@
         <p:spPr>
           <a:xfrm>
             <a:off x="914400" y="1508760"/>
-            <a:ext cx="4846320" cy="2011680"/>
+            <a:ext cx="4846200" cy="1944600"/>
           </a:xfrm>
           <a:prstGeom prst="rect">
             <a:avLst/>
@@ -18077,7 +18014,7 @@
               <a:buNone/>
             </a:pPr>
             <a:r>
-              <a:rPr b="1" i="0" lang="en-US" sz="1200" u="none" cap="none" strike="noStrike">
+              <a:rPr b="1" i="0" lang="en-US" sz="1800" u="none" cap="none" strike="noStrike">
                 <a:solidFill>
                   <a:srgbClr val="38BDF8"/>
                 </a:solidFill>
@@ -18088,7 +18025,7 @@
               </a:rPr>
               <a:t>01 | POSITIONNEMENT PRIX : 24.99 € - 29.99 €</a:t>
             </a:r>
-            <a:endParaRPr/>
+            <a:endParaRPr sz="2000"/>
           </a:p>
           <a:p>
             <a:pPr indent="0" lvl="0" marL="0" marR="0" rtl="0" algn="l">
@@ -18101,7 +18038,7 @@
               <a:buNone/>
             </a:pPr>
             <a:r>
-              <a:rPr b="1" i="0" lang="en-US" sz="1000" u="none" cap="none" strike="noStrike">
+              <a:rPr b="1" i="0" lang="en-US" sz="1600" u="none" cap="none" strike="noStrike">
                 <a:solidFill>
                   <a:srgbClr val="F8FAFC"/>
                 </a:solidFill>
@@ -18112,7 +18049,7 @@
               </a:rPr>
               <a:t>Justification Data :</a:t>
             </a:r>
-            <a:endParaRPr/>
+            <a:endParaRPr sz="2000"/>
           </a:p>
           <a:p>
             <a:pPr indent="0" lvl="0" marL="0" marR="0" rtl="0" algn="l">
@@ -18125,7 +18062,7 @@
               <a:buNone/>
             </a:pPr>
             <a:r>
-              <a:rPr b="0" i="0" lang="en-US" sz="950" u="none" cap="none" strike="noStrike">
+              <a:rPr b="0" i="0" lang="en-US" sz="1550" u="none" cap="none" strike="noStrike">
                 <a:solidFill>
                   <a:srgbClr val="94A3B8"/>
                 </a:solidFill>
@@ -18136,7 +18073,7 @@
               </a:rPr>
               <a:t>Évite la guerre des prix de l'ultra-budget (&lt;15€) tout en abaissant la barrière psychologique des 60€+.</a:t>
             </a:r>
-            <a:endParaRPr/>
+            <a:endParaRPr sz="2000"/>
           </a:p>
           <a:p>
             <a:pPr indent="0" lvl="0" marL="0" marR="0" rtl="0" algn="l">
@@ -18149,7 +18086,7 @@
               <a:buNone/>
             </a:pPr>
             <a:r>
-              <a:rPr b="1" i="0" lang="en-US" sz="1000" u="none" cap="none" strike="noStrike">
+              <a:rPr b="1" i="0" lang="en-US" sz="1600" u="none" cap="none" strike="noStrike">
                 <a:solidFill>
                   <a:srgbClr val="F8FAFC"/>
                 </a:solidFill>
@@ -18160,7 +18097,7 @@
               </a:rPr>
               <a:t>Upsell :</a:t>
             </a:r>
-            <a:endParaRPr/>
+            <a:endParaRPr sz="2000"/>
           </a:p>
           <a:p>
             <a:pPr indent="0" lvl="0" marL="0" marR="0" rtl="0" algn="l">
@@ -18173,7 +18110,7 @@
               <a:buNone/>
             </a:pPr>
             <a:r>
-              <a:rPr b="0" i="0" lang="en-US" sz="950" u="none" cap="none" strike="noStrike">
+              <a:rPr b="0" i="0" lang="en-US" sz="1550" u="none" cap="none" strike="noStrike">
                 <a:solidFill>
                   <a:srgbClr val="94A3B8"/>
                 </a:solidFill>
@@ -18184,7 +18121,7 @@
               </a:rPr>
               <a:t>Proposer une Édition Deluxe à 39.99€ avec cosmétiques exclusifs.</a:t>
             </a:r>
-            <a:endParaRPr/>
+            <a:endParaRPr sz="2000"/>
           </a:p>
         </p:txBody>
       </p:sp>
@@ -18242,7 +18179,7 @@
             <a:r>
               <a:t/>
             </a:r>
-            <a:endParaRPr b="0" i="0" sz="1800" u="none" cap="none" strike="noStrike">
+            <a:endParaRPr b="0" i="0" sz="2400" u="none" cap="none" strike="noStrike">
               <a:solidFill>
                 <a:schemeClr val="dk1"/>
               </a:solidFill>
@@ -18263,7 +18200,7 @@
         <p:spPr>
           <a:xfrm>
             <a:off x="6400800" y="1508760"/>
-            <a:ext cx="4846320" cy="2011680"/>
+            <a:ext cx="4846200" cy="1944600"/>
           </a:xfrm>
           <a:prstGeom prst="rect">
             <a:avLst/>
@@ -18289,7 +18226,7 @@
               <a:buNone/>
             </a:pPr>
             <a:r>
-              <a:rPr b="1" i="0" lang="en-US" sz="1200" u="none" cap="none" strike="noStrike">
+              <a:rPr b="1" i="0" lang="en-US" sz="1800" u="none" cap="none" strike="noStrike">
                 <a:solidFill>
                   <a:srgbClr val="10B981"/>
                 </a:solidFill>
@@ -18300,7 +18237,7 @@
               </a:rPr>
               <a:t>02 | GENRE CIBLE : L'ACTION-RPG HYBRIDE</a:t>
             </a:r>
-            <a:endParaRPr/>
+            <a:endParaRPr sz="2000"/>
           </a:p>
           <a:p>
             <a:pPr indent="0" lvl="0" marL="0" marR="0" rtl="0" algn="l">
@@ -18313,7 +18250,7 @@
               <a:buNone/>
             </a:pPr>
             <a:r>
-              <a:rPr b="1" i="0" lang="en-US" sz="1000" u="none" cap="none" strike="noStrike">
+              <a:rPr b="1" i="0" lang="en-US" sz="1600" u="none" cap="none" strike="noStrike">
                 <a:solidFill>
                   <a:srgbClr val="F8FAFC"/>
                 </a:solidFill>
@@ -18324,7 +18261,7 @@
               </a:rPr>
               <a:t>Justification Data :</a:t>
             </a:r>
-            <a:endParaRPr/>
+            <a:endParaRPr sz="2000"/>
           </a:p>
           <a:p>
             <a:pPr indent="0" lvl="0" marL="0" marR="0" rtl="0" algn="l">
@@ -18337,7 +18274,7 @@
               <a:buNone/>
             </a:pPr>
             <a:r>
-              <a:rPr b="0" i="0" lang="en-US" sz="950" u="none" cap="none" strike="noStrike">
+              <a:rPr b="0" i="0" lang="en-US" sz="1550" u="none" cap="none" strike="noStrike">
                 <a:solidFill>
                   <a:srgbClr val="94A3B8"/>
                 </a:solidFill>
@@ -18348,7 +18285,7 @@
               </a:rPr>
               <a:t>Action = 1er proxy revenus (1.05 Md€). RPG = prix moyen le plus élevé (9.04€) et 73% de satisfaction.</a:t>
             </a:r>
-            <a:endParaRPr/>
+            <a:endParaRPr sz="2000"/>
           </a:p>
           <a:p>
             <a:pPr indent="0" lvl="0" marL="0" marR="0" rtl="0" algn="l">
@@ -18361,7 +18298,7 @@
               <a:buNone/>
             </a:pPr>
             <a:r>
-              <a:rPr b="1" i="0" lang="en-US" sz="1000" u="none" cap="none" strike="noStrike">
+              <a:rPr b="1" i="0" lang="en-US" sz="1600" u="none" cap="none" strike="noStrike">
                 <a:solidFill>
                   <a:srgbClr val="F8FAFC"/>
                 </a:solidFill>
@@ -18372,7 +18309,7 @@
               </a:rPr>
               <a:t>Atout :</a:t>
             </a:r>
-            <a:endParaRPr/>
+            <a:endParaRPr sz="2000"/>
           </a:p>
           <a:p>
             <a:pPr indent="0" lvl="0" marL="0" marR="0" rtl="0" algn="l">
@@ -18385,7 +18322,7 @@
               <a:buNone/>
             </a:pPr>
             <a:r>
-              <a:rPr b="0" i="0" lang="en-US" sz="950" u="none" cap="none" strike="noStrike">
+              <a:rPr b="0" i="0" lang="en-US" sz="1550" u="none" cap="none" strike="noStrike">
                 <a:solidFill>
                   <a:srgbClr val="94A3B8"/>
                 </a:solidFill>
@@ -18396,7 +18333,7 @@
               </a:rPr>
               <a:t>Progression de personnage profonde et forte rétention multijoueur.</a:t>
             </a:r>
-            <a:endParaRPr/>
+            <a:endParaRPr sz="2000"/>
           </a:p>
         </p:txBody>
       </p:sp>
@@ -18454,7 +18391,7 @@
             <a:r>
               <a:t/>
             </a:r>
-            <a:endParaRPr b="0" i="0" sz="1800" u="none" cap="none" strike="noStrike">
+            <a:endParaRPr b="0" i="0" sz="2400" u="none" cap="none" strike="noStrike">
               <a:solidFill>
                 <a:schemeClr val="dk1"/>
               </a:solidFill>
@@ -18475,7 +18412,7 @@
         <p:spPr>
           <a:xfrm>
             <a:off x="914400" y="4069080"/>
-            <a:ext cx="4846320" cy="2011680"/>
+            <a:ext cx="4846200" cy="1944600"/>
           </a:xfrm>
           <a:prstGeom prst="rect">
             <a:avLst/>
@@ -18501,7 +18438,7 @@
               <a:buNone/>
             </a:pPr>
             <a:r>
-              <a:rPr b="1" i="0" lang="en-US" sz="1200" u="none" cap="none" strike="noStrike">
+              <a:rPr b="1" i="0" lang="en-US" sz="1800" u="none" cap="none" strike="noStrike">
                 <a:solidFill>
                   <a:srgbClr val="F59E0B"/>
                 </a:solidFill>
@@ -18512,7 +18449,7 @@
               </a:rPr>
               <a:t>03 | CALENDRIER DES SOLDES PROGRESSIF</a:t>
             </a:r>
-            <a:endParaRPr/>
+            <a:endParaRPr sz="2000"/>
           </a:p>
           <a:p>
             <a:pPr indent="0" lvl="0" marL="0" marR="0" rtl="0" algn="l">
@@ -18525,7 +18462,7 @@
               <a:buNone/>
             </a:pPr>
             <a:r>
-              <a:rPr b="1" i="0" lang="en-US" sz="1000" u="none" cap="none" strike="noStrike">
+              <a:rPr b="1" i="0" lang="en-US" sz="1600" u="none" cap="none" strike="noStrike">
                 <a:solidFill>
                   <a:srgbClr val="F8FAFC"/>
                 </a:solidFill>
@@ -18536,7 +18473,7 @@
               </a:rPr>
               <a:t>Protection Lancement :</a:t>
             </a:r>
-            <a:endParaRPr/>
+            <a:endParaRPr sz="2000"/>
           </a:p>
           <a:p>
             <a:pPr indent="0" lvl="0" marL="0" marR="0" rtl="0" algn="l">
@@ -18549,7 +18486,7 @@
               <a:buNone/>
             </a:pPr>
             <a:r>
-              <a:rPr b="0" i="0" lang="en-US" sz="950" u="none" cap="none" strike="noStrike">
+              <a:rPr b="0" i="0" lang="en-US" sz="1550" u="none" cap="none" strike="noStrike">
                 <a:solidFill>
                   <a:srgbClr val="94A3B8"/>
                 </a:solidFill>
@@ -18560,7 +18497,7 @@
               </a:rPr>
               <a:t>Aucune promotion avant 90 jours pour préserver les marges Day One.</a:t>
             </a:r>
-            <a:endParaRPr/>
+            <a:endParaRPr sz="2000"/>
           </a:p>
           <a:p>
             <a:pPr indent="0" lvl="0" marL="0" marR="0" rtl="0" algn="l">
@@ -18573,7 +18510,7 @@
               <a:buNone/>
             </a:pPr>
             <a:r>
-              <a:rPr b="1" i="0" lang="en-US" sz="1000" u="none" cap="none" strike="noStrike">
+              <a:rPr b="1" i="0" lang="en-US" sz="1600" u="none" cap="none" strike="noStrike">
                 <a:solidFill>
                   <a:srgbClr val="F8FAFC"/>
                 </a:solidFill>
@@ -18584,7 +18521,7 @@
               </a:rPr>
               <a:t>Élasticité :</a:t>
             </a:r>
-            <a:endParaRPr/>
+            <a:endParaRPr sz="2000"/>
           </a:p>
           <a:p>
             <a:pPr indent="0" lvl="0" marL="0" marR="0" rtl="0" algn="l">
@@ -18597,7 +18534,7 @@
               <a:buNone/>
             </a:pPr>
             <a:r>
-              <a:rPr b="0" i="0" lang="en-US" sz="950" u="none" cap="none" strike="noStrike">
+              <a:rPr b="0" i="0" lang="en-US" sz="1550" u="none" cap="none" strike="noStrike">
                 <a:solidFill>
                   <a:srgbClr val="94A3B8"/>
                 </a:solidFill>
@@ -18608,7 +18545,7 @@
               </a:rPr>
               <a:t>Participer aux Soldes d'Hiver avec -25% pour convertir les Wishlists accumulées.</a:t>
             </a:r>
-            <a:endParaRPr/>
+            <a:endParaRPr sz="2000"/>
           </a:p>
         </p:txBody>
       </p:sp>
@@ -18666,7 +18603,7 @@
             <a:r>
               <a:t/>
             </a:r>
-            <a:endParaRPr b="0" i="0" sz="1800" u="none" cap="none" strike="noStrike">
+            <a:endParaRPr b="0" i="0" sz="2400" u="none" cap="none" strike="noStrike">
               <a:solidFill>
                 <a:schemeClr val="dk1"/>
               </a:solidFill>
@@ -18687,7 +18624,7 @@
         <p:spPr>
           <a:xfrm>
             <a:off x="6400800" y="4069080"/>
-            <a:ext cx="4846320" cy="2011680"/>
+            <a:ext cx="4846200" cy="1944600"/>
           </a:xfrm>
           <a:prstGeom prst="rect">
             <a:avLst/>
@@ -18713,7 +18650,7 @@
               <a:buNone/>
             </a:pPr>
             <a:r>
-              <a:rPr b="1" i="0" lang="en-US" sz="1200" u="none" cap="none" strike="noStrike">
+              <a:rPr b="1" i="0" lang="en-US" sz="1800" u="none" cap="none" strike="noStrike">
                 <a:solidFill>
                   <a:srgbClr val="A855F7"/>
                 </a:solidFill>
@@ -18724,7 +18661,7 @@
               </a:rPr>
               <a:t>04 | STEAM DECK &amp; DOUBLAGE ASIATIQUE</a:t>
             </a:r>
-            <a:endParaRPr/>
+            <a:endParaRPr sz="2000"/>
           </a:p>
           <a:p>
             <a:pPr indent="0" lvl="0" marL="0" marR="0" rtl="0" algn="l">
@@ -18737,7 +18674,7 @@
               <a:buNone/>
             </a:pPr>
             <a:r>
-              <a:rPr b="1" i="0" lang="en-US" sz="1000" u="none" cap="none" strike="noStrike">
+              <a:rPr b="1" i="0" lang="en-US" sz="1600" u="none" cap="none" strike="noStrike">
                 <a:solidFill>
                   <a:srgbClr val="F8FAFC"/>
                 </a:solidFill>
@@ -18748,7 +18685,7 @@
               </a:rPr>
               <a:t>Compatibilité Proton :</a:t>
             </a:r>
-            <a:endParaRPr/>
+            <a:endParaRPr sz="2000"/>
           </a:p>
           <a:p>
             <a:pPr indent="0" lvl="0" marL="0" marR="0" rtl="0" algn="l">
@@ -18761,7 +18698,7 @@
               <a:buNone/>
             </a:pPr>
             <a:r>
-              <a:rPr b="0" i="0" lang="en-US" sz="950" u="none" cap="none" strike="noStrike">
+              <a:rPr b="0" i="0" lang="en-US" sz="1550" u="none" cap="none" strike="noStrike">
                 <a:solidFill>
                   <a:srgbClr val="94A3B8"/>
                 </a:solidFill>
@@ -18772,7 +18709,7 @@
               </a:rPr>
               <a:t>Garantir le badge 'Deck Verified' dès le lancement (anti-triche compatible).</a:t>
             </a:r>
-            <a:endParaRPr/>
+            <a:endParaRPr sz="2000"/>
           </a:p>
           <a:p>
             <a:pPr indent="0" lvl="0" marL="0" marR="0" rtl="0" algn="l">
@@ -18785,7 +18722,7 @@
               <a:buNone/>
             </a:pPr>
             <a:r>
-              <a:rPr b="1" i="0" lang="en-US" sz="1000" u="none" cap="none" strike="noStrike">
+              <a:rPr b="1" i="0" lang="en-US" sz="1600" u="none" cap="none" strike="noStrike">
                 <a:solidFill>
                   <a:srgbClr val="F8FAFC"/>
                 </a:solidFill>
@@ -18796,7 +18733,7 @@
               </a:rPr>
               <a:t>Chinois Simplifié :</a:t>
             </a:r>
-            <a:endParaRPr/>
+            <a:endParaRPr sz="2000"/>
           </a:p>
           <a:p>
             <a:pPr indent="0" lvl="0" marL="0" marR="0" rtl="0" algn="l">
@@ -18809,7 +18746,7 @@
               <a:buNone/>
             </a:pPr>
             <a:r>
-              <a:rPr b="0" i="0" lang="en-US" sz="950" u="none" cap="none" strike="noStrike">
+              <a:rPr b="0" i="0" lang="en-US" sz="1550" u="none" cap="none" strike="noStrike">
                 <a:solidFill>
                   <a:srgbClr val="94A3B8"/>
                 </a:solidFill>
@@ -18820,7 +18757,7 @@
               </a:rPr>
               <a:t>24.5% du catalogue : bassin d'audience prioritaire hors Occident.</a:t>
             </a:r>
-            <a:endParaRPr/>
+            <a:endParaRPr sz="2000"/>
           </a:p>
         </p:txBody>
       </p:sp>
@@ -18833,6 +18770,285 @@
 </file>
 
 <file path=ppt/theme/theme1.xml><?xml version="1.0" encoding="utf-8"?>
+<a:theme xmlns:a="http://schemas.openxmlformats.org/drawingml/2006/main" xmlns:r="http://schemas.openxmlformats.org/officeDocument/2006/relationships" name="Office Theme">
+  <a:themeElements>
+    <a:clrScheme name="Office">
+      <a:dk1>
+        <a:srgbClr val="000000"/>
+      </a:dk1>
+      <a:lt1>
+        <a:srgbClr val="FFFFFF"/>
+      </a:lt1>
+      <a:dk2>
+        <a:srgbClr val="1F497D"/>
+      </a:dk2>
+      <a:lt2>
+        <a:srgbClr val="EEECE1"/>
+      </a:lt2>
+      <a:accent1>
+        <a:srgbClr val="4F81BD"/>
+      </a:accent1>
+      <a:accent2>
+        <a:srgbClr val="C0504D"/>
+      </a:accent2>
+      <a:accent3>
+        <a:srgbClr val="9BBB59"/>
+      </a:accent3>
+      <a:accent4>
+        <a:srgbClr val="8064A2"/>
+      </a:accent4>
+      <a:accent5>
+        <a:srgbClr val="4BACC6"/>
+      </a:accent5>
+      <a:accent6>
+        <a:srgbClr val="F79646"/>
+      </a:accent6>
+      <a:hlink>
+        <a:srgbClr val="0000FF"/>
+      </a:hlink>
+      <a:folHlink>
+        <a:srgbClr val="800080"/>
+      </a:folHlink>
+    </a:clrScheme>
+    <a:fontScheme name="Office">
+      <a:majorFont>
+        <a:latin typeface="Arial"/>
+        <a:ea typeface=""/>
+        <a:cs typeface=""/>
+        <a:font script="Jpan" typeface="ＭＳ Ｐゴシック"/>
+        <a:font script="Hang" typeface="맑은 고딕"/>
+        <a:font script="Hans" typeface="宋体"/>
+        <a:font script="Hant" typeface="新細明體"/>
+        <a:font script="Arab" typeface="Times New Roman"/>
+        <a:font script="Hebr" typeface="Times New Roman"/>
+        <a:font script="Thai" typeface="Angsana New"/>
+        <a:font script="Ethi" typeface="Nyala"/>
+        <a:font script="Beng" typeface="Vrinda"/>
+        <a:font script="Gujr" typeface="Shruti"/>
+        <a:font script="Khmr" typeface="MoolBoran"/>
+        <a:font script="Knda" typeface="Tunga"/>
+        <a:font script="Guru" typeface="Raavi"/>
+        <a:font script="Cans" typeface="Euphemia"/>
+        <a:font script="Cher" typeface="Plantagenet Cherokee"/>
+        <a:font script="Yiii" typeface="Microsoft Yi Baiti"/>
+        <a:font script="Tibt" typeface="Microsoft Himalaya"/>
+        <a:font script="Thaa" typeface="MV Boli"/>
+        <a:font script="Deva" typeface="Mangal"/>
+        <a:font script="Telu" typeface="Gautami"/>
+        <a:font script="Taml" typeface="Latha"/>
+        <a:font script="Syrc" typeface="Estrangelo Edessa"/>
+        <a:font script="Orya" typeface="Kalinga"/>
+        <a:font script="Mlym" typeface="Kartika"/>
+        <a:font script="Laoo" typeface="DokChampa"/>
+        <a:font script="Sinh" typeface="Iskoola Pota"/>
+        <a:font script="Mong" typeface="Mongolian Baiti"/>
+        <a:font script="Viet" typeface="Times New Roman"/>
+        <a:font script="Uigh" typeface="Microsoft Uighur"/>
+        <a:font script="Geor" typeface="Sylfaen"/>
+      </a:majorFont>
+      <a:minorFont>
+        <a:latin typeface="Arial"/>
+        <a:ea typeface=""/>
+        <a:cs typeface=""/>
+        <a:font script="Jpan" typeface="ＭＳ Ｐゴシック"/>
+        <a:font script="Hang" typeface="맑은 고딕"/>
+        <a:font script="Hans" typeface="宋体"/>
+        <a:font script="Hant" typeface="新細明體"/>
+        <a:font script="Arab" typeface="Arial"/>
+        <a:font script="Hebr" typeface="Arial"/>
+        <a:font script="Thai" typeface="Cordia New"/>
+        <a:font script="Ethi" typeface="Nyala"/>
+        <a:font script="Beng" typeface="Vrinda"/>
+        <a:font script="Gujr" typeface="Shruti"/>
+        <a:font script="Khmr" typeface="DaunPenh"/>
+        <a:font script="Knda" typeface="Tunga"/>
+        <a:font script="Guru" typeface="Raavi"/>
+        <a:font script="Cans" typeface="Euphemia"/>
+        <a:font script="Cher" typeface="Plantagenet Cherokee"/>
+        <a:font script="Yiii" typeface="Microsoft Yi Baiti"/>
+        <a:font script="Tibt" typeface="Microsoft Himalaya"/>
+        <a:font script="Thaa" typeface="MV Boli"/>
+        <a:font script="Deva" typeface="Mangal"/>
+        <a:font script="Telu" typeface="Gautami"/>
+        <a:font script="Taml" typeface="Latha"/>
+        <a:font script="Syrc" typeface="Estrangelo Edessa"/>
+        <a:font script="Orya" typeface="Kalinga"/>
+        <a:font script="Mlym" typeface="Kartika"/>
+        <a:font script="Laoo" typeface="DokChampa"/>
+        <a:font script="Sinh" typeface="Iskoola Pota"/>
+        <a:font script="Mong" typeface="Mongolian Baiti"/>
+        <a:font script="Viet" typeface="Arial"/>
+        <a:font script="Uigh" typeface="Microsoft Uighur"/>
+        <a:font script="Geor" typeface="Sylfaen"/>
+      </a:minorFont>
+    </a:fontScheme>
+    <a:fmtScheme name="Office">
+      <a:fillStyleLst>
+        <a:solidFill>
+          <a:schemeClr val="phClr"/>
+        </a:solidFill>
+        <a:gradFill rotWithShape="1">
+          <a:gsLst>
+            <a:gs pos="0">
+              <a:schemeClr val="phClr">
+                <a:tint val="50000"/>
+                <a:satMod val="300000"/>
+              </a:schemeClr>
+            </a:gs>
+            <a:gs pos="35000">
+              <a:schemeClr val="phClr">
+                <a:tint val="37000"/>
+                <a:satMod val="300000"/>
+              </a:schemeClr>
+            </a:gs>
+            <a:gs pos="100000">
+              <a:schemeClr val="phClr">
+                <a:tint val="15000"/>
+                <a:satMod val="350000"/>
+              </a:schemeClr>
+            </a:gs>
+          </a:gsLst>
+          <a:lin ang="16200000" scaled="1"/>
+        </a:gradFill>
+        <a:gradFill rotWithShape="1">
+          <a:gsLst>
+            <a:gs pos="0">
+              <a:schemeClr val="phClr">
+                <a:tint val="100000"/>
+                <a:shade val="100000"/>
+                <a:satMod val="130000"/>
+              </a:schemeClr>
+            </a:gs>
+            <a:gs pos="100000">
+              <a:schemeClr val="phClr">
+                <a:tint val="50000"/>
+                <a:shade val="100000"/>
+                <a:satMod val="350000"/>
+              </a:schemeClr>
+            </a:gs>
+          </a:gsLst>
+          <a:lin ang="16200000" scaled="0"/>
+        </a:gradFill>
+      </a:fillStyleLst>
+      <a:lnStyleLst>
+        <a:ln w="9525" cap="flat" cmpd="sng" algn="ctr">
+          <a:solidFill>
+            <a:schemeClr val="phClr">
+              <a:shade val="95000"/>
+              <a:satMod val="105000"/>
+            </a:schemeClr>
+          </a:solidFill>
+          <a:prstDash val="solid"/>
+        </a:ln>
+        <a:ln w="25400" cap="flat" cmpd="sng" algn="ctr">
+          <a:solidFill>
+            <a:schemeClr val="phClr"/>
+          </a:solidFill>
+          <a:prstDash val="solid"/>
+        </a:ln>
+        <a:ln w="38100" cap="flat" cmpd="sng" algn="ctr">
+          <a:solidFill>
+            <a:schemeClr val="phClr"/>
+          </a:solidFill>
+          <a:prstDash val="solid"/>
+        </a:ln>
+      </a:lnStyleLst>
+      <a:effectStyleLst>
+        <a:effectStyle>
+          <a:effectLst>
+            <a:outerShdw blurRad="40000" dist="20000" dir="5400000" rotWithShape="0">
+              <a:srgbClr val="000000">
+                <a:alpha val="38000"/>
+              </a:srgbClr>
+            </a:outerShdw>
+          </a:effectLst>
+        </a:effectStyle>
+        <a:effectStyle>
+          <a:effectLst>
+            <a:outerShdw blurRad="40000" dist="23000" dir="5400000" rotWithShape="0">
+              <a:srgbClr val="000000">
+                <a:alpha val="35000"/>
+              </a:srgbClr>
+            </a:outerShdw>
+          </a:effectLst>
+        </a:effectStyle>
+        <a:effectStyle>
+          <a:effectLst>
+            <a:outerShdw blurRad="40000" dist="23000" dir="5400000" rotWithShape="0">
+              <a:srgbClr val="000000">
+                <a:alpha val="35000"/>
+              </a:srgbClr>
+            </a:outerShdw>
+          </a:effectLst>
+          <a:scene3d>
+            <a:camera prst="orthographicFront">
+              <a:rot lat="0" lon="0" rev="0"/>
+            </a:camera>
+            <a:lightRig rig="threePt" dir="t">
+              <a:rot lat="0" lon="0" rev="1200000"/>
+            </a:lightRig>
+          </a:scene3d>
+          <a:sp3d>
+            <a:bevelT w="63500" h="25400"/>
+          </a:sp3d>
+        </a:effectStyle>
+      </a:effectStyleLst>
+      <a:bgFillStyleLst>
+        <a:solidFill>
+          <a:schemeClr val="phClr"/>
+        </a:solidFill>
+        <a:gradFill rotWithShape="1">
+          <a:gsLst>
+            <a:gs pos="0">
+              <a:schemeClr val="phClr">
+                <a:tint val="40000"/>
+                <a:satMod val="350000"/>
+              </a:schemeClr>
+            </a:gs>
+            <a:gs pos="40000">
+              <a:schemeClr val="phClr">
+                <a:tint val="45000"/>
+                <a:shade val="99000"/>
+                <a:satMod val="350000"/>
+              </a:schemeClr>
+            </a:gs>
+            <a:gs pos="100000">
+              <a:schemeClr val="phClr">
+                <a:shade val="20000"/>
+                <a:satMod val="255000"/>
+              </a:schemeClr>
+            </a:gs>
+          </a:gsLst>
+          <a:path path="circle">
+            <a:fillToRect l="50000" t="-80000" r="50000" b="180000"/>
+          </a:path>
+        </a:gradFill>
+        <a:gradFill rotWithShape="1">
+          <a:gsLst>
+            <a:gs pos="0">
+              <a:schemeClr val="phClr">
+                <a:tint val="80000"/>
+                <a:satMod val="300000"/>
+              </a:schemeClr>
+            </a:gs>
+            <a:gs pos="100000">
+              <a:schemeClr val="phClr">
+                <a:shade val="30000"/>
+                <a:satMod val="200000"/>
+              </a:schemeClr>
+            </a:gs>
+          </a:gsLst>
+          <a:path path="circle">
+            <a:fillToRect l="50000" t="50000" r="50000" b="50000"/>
+          </a:path>
+        </a:gradFill>
+      </a:bgFillStyleLst>
+    </a:fmtScheme>
+  </a:themeElements>
+</a:theme>
+</file>
+
+<file path=ppt/theme/theme2.xml><?xml version="1.0" encoding="utf-8"?>
 <a:theme xmlns:a="http://schemas.openxmlformats.org/drawingml/2006/main" xmlns:r="http://schemas.openxmlformats.org/officeDocument/2006/relationships">
   <a:themeElements>
     <a:clrScheme name="Default">
@@ -19109,283 +19325,4 @@
     </a:fmtScheme>
   </a:themeElements>
 </a:theme>
-</file>
-
-<file path=ppt/theme/theme2.xml><?xml version="1.0" encoding="utf-8"?>
-<a:theme xmlns:a="http://schemas.openxmlformats.org/drawingml/2006/main" xmlns:r="http://schemas.openxmlformats.org/officeDocument/2006/relationships" name="Office Theme">
-  <a:themeElements>
-    <a:clrScheme name="Office">
-      <a:dk1>
-        <a:srgbClr val="000000"/>
-      </a:dk1>
-      <a:lt1>
-        <a:srgbClr val="FFFFFF"/>
-      </a:lt1>
-      <a:dk2>
-        <a:srgbClr val="1F497D"/>
-      </a:dk2>
-      <a:lt2>
-        <a:srgbClr val="EEECE1"/>
-      </a:lt2>
-      <a:accent1>
-        <a:srgbClr val="4F81BD"/>
-      </a:accent1>
-      <a:accent2>
-        <a:srgbClr val="C0504D"/>
-      </a:accent2>
-      <a:accent3>
-        <a:srgbClr val="9BBB59"/>
-      </a:accent3>
-      <a:accent4>
-        <a:srgbClr val="8064A2"/>
-      </a:accent4>
-      <a:accent5>
-        <a:srgbClr val="4BACC6"/>
-      </a:accent5>
-      <a:accent6>
-        <a:srgbClr val="F79646"/>
-      </a:accent6>
-      <a:hlink>
-        <a:srgbClr val="0000FF"/>
-      </a:hlink>
-      <a:folHlink>
-        <a:srgbClr val="800080"/>
-      </a:folHlink>
-    </a:clrScheme>
-    <a:fontScheme name="Office">
-      <a:majorFont>
-        <a:latin typeface="Arial"/>
-        <a:ea typeface=""/>
-        <a:cs typeface=""/>
-        <a:font script="Jpan" typeface="ＭＳ Ｐゴシック"/>
-        <a:font script="Hang" typeface="맑은 고딕"/>
-        <a:font script="Hans" typeface="宋体"/>
-        <a:font script="Hant" typeface="新細明體"/>
-        <a:font script="Arab" typeface="Times New Roman"/>
-        <a:font script="Hebr" typeface="Times New Roman"/>
-        <a:font script="Thai" typeface="Angsana New"/>
-        <a:font script="Ethi" typeface="Nyala"/>
-        <a:font script="Beng" typeface="Vrinda"/>
-        <a:font script="Gujr" typeface="Shruti"/>
-        <a:font script="Khmr" typeface="MoolBoran"/>
-        <a:font script="Knda" typeface="Tunga"/>
-        <a:font script="Guru" typeface="Raavi"/>
-        <a:font script="Cans" typeface="Euphemia"/>
-        <a:font script="Cher" typeface="Plantagenet Cherokee"/>
-        <a:font script="Yiii" typeface="Microsoft Yi Baiti"/>
-        <a:font script="Tibt" typeface="Microsoft Himalaya"/>
-        <a:font script="Thaa" typeface="MV Boli"/>
-        <a:font script="Deva" typeface="Mangal"/>
-        <a:font script="Telu" typeface="Gautami"/>
-        <a:font script="Taml" typeface="Latha"/>
-        <a:font script="Syrc" typeface="Estrangelo Edessa"/>
-        <a:font script="Orya" typeface="Kalinga"/>
-        <a:font script="Mlym" typeface="Kartika"/>
-        <a:font script="Laoo" typeface="DokChampa"/>
-        <a:font script="Sinh" typeface="Iskoola Pota"/>
-        <a:font script="Mong" typeface="Mongolian Baiti"/>
-        <a:font script="Viet" typeface="Times New Roman"/>
-        <a:font script="Uigh" typeface="Microsoft Uighur"/>
-        <a:font script="Geor" typeface="Sylfaen"/>
-      </a:majorFont>
-      <a:minorFont>
-        <a:latin typeface="Arial"/>
-        <a:ea typeface=""/>
-        <a:cs typeface=""/>
-        <a:font script="Jpan" typeface="ＭＳ Ｐゴシック"/>
-        <a:font script="Hang" typeface="맑은 고딕"/>
-        <a:font script="Hans" typeface="宋体"/>
-        <a:font script="Hant" typeface="新細明體"/>
-        <a:font script="Arab" typeface="Arial"/>
-        <a:font script="Hebr" typeface="Arial"/>
-        <a:font script="Thai" typeface="Cordia New"/>
-        <a:font script="Ethi" typeface="Nyala"/>
-        <a:font script="Beng" typeface="Vrinda"/>
-        <a:font script="Gujr" typeface="Shruti"/>
-        <a:font script="Khmr" typeface="DaunPenh"/>
-        <a:font script="Knda" typeface="Tunga"/>
-        <a:font script="Guru" typeface="Raavi"/>
-        <a:font script="Cans" typeface="Euphemia"/>
-        <a:font script="Cher" typeface="Plantagenet Cherokee"/>
-        <a:font script="Yiii" typeface="Microsoft Yi Baiti"/>
-        <a:font script="Tibt" typeface="Microsoft Himalaya"/>
-        <a:font script="Thaa" typeface="MV Boli"/>
-        <a:font script="Deva" typeface="Mangal"/>
-        <a:font script="Telu" typeface="Gautami"/>
-        <a:font script="Taml" typeface="Latha"/>
-        <a:font script="Syrc" typeface="Estrangelo Edessa"/>
-        <a:font script="Orya" typeface="Kalinga"/>
-        <a:font script="Mlym" typeface="Kartika"/>
-        <a:font script="Laoo" typeface="DokChampa"/>
-        <a:font script="Sinh" typeface="Iskoola Pota"/>
-        <a:font script="Mong" typeface="Mongolian Baiti"/>
-        <a:font script="Viet" typeface="Arial"/>
-        <a:font script="Uigh" typeface="Microsoft Uighur"/>
-        <a:font script="Geor" typeface="Sylfaen"/>
-      </a:minorFont>
-    </a:fontScheme>
-    <a:fmtScheme name="Office">
-      <a:fillStyleLst>
-        <a:solidFill>
-          <a:schemeClr val="phClr"/>
-        </a:solidFill>
-        <a:gradFill rotWithShape="1">
-          <a:gsLst>
-            <a:gs pos="0">
-              <a:schemeClr val="phClr">
-                <a:tint val="50000"/>
-                <a:satMod val="300000"/>
-              </a:schemeClr>
-            </a:gs>
-            <a:gs pos="35000">
-              <a:schemeClr val="phClr">
-                <a:tint val="37000"/>
-                <a:satMod val="300000"/>
-              </a:schemeClr>
-            </a:gs>
-            <a:gs pos="100000">
-              <a:schemeClr val="phClr">
-                <a:tint val="15000"/>
-                <a:satMod val="350000"/>
-              </a:schemeClr>
-            </a:gs>
-          </a:gsLst>
-          <a:lin ang="16200000" scaled="1"/>
-        </a:gradFill>
-        <a:gradFill rotWithShape="1">
-          <a:gsLst>
-            <a:gs pos="0">
-              <a:schemeClr val="phClr">
-                <a:tint val="100000"/>
-                <a:shade val="100000"/>
-                <a:satMod val="130000"/>
-              </a:schemeClr>
-            </a:gs>
-            <a:gs pos="100000">
-              <a:schemeClr val="phClr">
-                <a:tint val="50000"/>
-                <a:shade val="100000"/>
-                <a:satMod val="350000"/>
-              </a:schemeClr>
-            </a:gs>
-          </a:gsLst>
-          <a:lin ang="16200000" scaled="0"/>
-        </a:gradFill>
-      </a:fillStyleLst>
-      <a:lnStyleLst>
-        <a:ln w="9525" cap="flat" cmpd="sng" algn="ctr">
-          <a:solidFill>
-            <a:schemeClr val="phClr">
-              <a:shade val="95000"/>
-              <a:satMod val="105000"/>
-            </a:schemeClr>
-          </a:solidFill>
-          <a:prstDash val="solid"/>
-        </a:ln>
-        <a:ln w="25400" cap="flat" cmpd="sng" algn="ctr">
-          <a:solidFill>
-            <a:schemeClr val="phClr"/>
-          </a:solidFill>
-          <a:prstDash val="solid"/>
-        </a:ln>
-        <a:ln w="38100" cap="flat" cmpd="sng" algn="ctr">
-          <a:solidFill>
-            <a:schemeClr val="phClr"/>
-          </a:solidFill>
-          <a:prstDash val="solid"/>
-        </a:ln>
-      </a:lnStyleLst>
-      <a:effectStyleLst>
-        <a:effectStyle>
-          <a:effectLst>
-            <a:outerShdw blurRad="40000" dist="20000" dir="5400000" rotWithShape="0">
-              <a:srgbClr val="000000">
-                <a:alpha val="38000"/>
-              </a:srgbClr>
-            </a:outerShdw>
-          </a:effectLst>
-        </a:effectStyle>
-        <a:effectStyle>
-          <a:effectLst>
-            <a:outerShdw blurRad="40000" dist="23000" dir="5400000" rotWithShape="0">
-              <a:srgbClr val="000000">
-                <a:alpha val="35000"/>
-              </a:srgbClr>
-            </a:outerShdw>
-          </a:effectLst>
-        </a:effectStyle>
-        <a:effectStyle>
-          <a:effectLst>
-            <a:outerShdw blurRad="40000" dist="23000" dir="5400000" rotWithShape="0">
-              <a:srgbClr val="000000">
-                <a:alpha val="35000"/>
-              </a:srgbClr>
-            </a:outerShdw>
-          </a:effectLst>
-          <a:scene3d>
-            <a:camera prst="orthographicFront">
-              <a:rot lat="0" lon="0" rev="0"/>
-            </a:camera>
-            <a:lightRig rig="threePt" dir="t">
-              <a:rot lat="0" lon="0" rev="1200000"/>
-            </a:lightRig>
-          </a:scene3d>
-          <a:sp3d>
-            <a:bevelT w="63500" h="25400"/>
-          </a:sp3d>
-        </a:effectStyle>
-      </a:effectStyleLst>
-      <a:bgFillStyleLst>
-        <a:solidFill>
-          <a:schemeClr val="phClr"/>
-        </a:solidFill>
-        <a:gradFill rotWithShape="1">
-          <a:gsLst>
-            <a:gs pos="0">
-              <a:schemeClr val="phClr">
-                <a:tint val="40000"/>
-                <a:satMod val="350000"/>
-              </a:schemeClr>
-            </a:gs>
-            <a:gs pos="40000">
-              <a:schemeClr val="phClr">
-                <a:tint val="45000"/>
-                <a:shade val="99000"/>
-                <a:satMod val="350000"/>
-              </a:schemeClr>
-            </a:gs>
-            <a:gs pos="100000">
-              <a:schemeClr val="phClr">
-                <a:shade val="20000"/>
-                <a:satMod val="255000"/>
-              </a:schemeClr>
-            </a:gs>
-          </a:gsLst>
-          <a:path path="circle">
-            <a:fillToRect l="50000" t="-80000" r="50000" b="180000"/>
-          </a:path>
-        </a:gradFill>
-        <a:gradFill rotWithShape="1">
-          <a:gsLst>
-            <a:gs pos="0">
-              <a:schemeClr val="phClr">
-                <a:tint val="80000"/>
-                <a:satMod val="300000"/>
-              </a:schemeClr>
-            </a:gs>
-            <a:gs pos="100000">
-              <a:schemeClr val="phClr">
-                <a:shade val="30000"/>
-                <a:satMod val="200000"/>
-              </a:schemeClr>
-            </a:gs>
-          </a:gsLst>
-          <a:path path="circle">
-            <a:fillToRect l="50000" t="50000" r="50000" b="50000"/>
-          </a:path>
-        </a:gradFill>
-      </a:bgFillStyleLst>
-    </a:fmtScheme>
-  </a:themeElements>
-</a:theme>
 </file>